--- a/1. Semester/Technology Management/Praktikum/PorscheTechManagement1.pptx
+++ b/1. Semester/Technology Management/Praktikum/PorscheTechManagement1.pptx
@@ -5,7 +5,7 @@
     <p:sldMasterId id="2147483648" r:id="rId1"/>
   </p:sldMasterIdLst>
   <p:notesMasterIdLst>
-    <p:notesMasterId r:id="rId13"/>
+    <p:notesMasterId r:id="rId18"/>
   </p:notesMasterIdLst>
   <p:sldIdLst>
     <p:sldId id="270" r:id="rId2"/>
@@ -18,7 +18,12 @@
     <p:sldId id="275" r:id="rId9"/>
     <p:sldId id="276" r:id="rId10"/>
     <p:sldId id="277" r:id="rId11"/>
-    <p:sldId id="266" r:id="rId12"/>
+    <p:sldId id="282" r:id="rId12"/>
+    <p:sldId id="281" r:id="rId13"/>
+    <p:sldId id="280" r:id="rId14"/>
+    <p:sldId id="285" r:id="rId15"/>
+    <p:sldId id="284" r:id="rId16"/>
+    <p:sldId id="266" r:id="rId17"/>
   </p:sldIdLst>
   <p:sldSz cx="12192000" cy="6858000"/>
   <p:notesSz cx="6858000" cy="9144000"/>
@@ -10149,7 +10154,7 @@
           <a:p>
             <a:fld id="{63C0262F-28AC-2341-B497-044C5E8CB782}" type="datetimeFigureOut">
               <a:rPr lang="de-DE" smtClean="0"/>
-              <a:t>04.05.26</a:t>
+              <a:t>17.05.26</a:t>
             </a:fld>
             <a:endParaRPr lang="de-DE"/>
           </a:p>
@@ -10500,6 +10505,90 @@
 </p:notes>
 </file>
 
+<file path=ppt/notesSlides/notesSlide10.xml><?xml version="1.0" encoding="utf-8"?>
+<p:notes xmlns:a="http://schemas.openxmlformats.org/drawingml/2006/main" xmlns:r="http://schemas.openxmlformats.org/officeDocument/2006/relationships" xmlns:p="http://schemas.openxmlformats.org/presentationml/2006/main">
+  <p:cSld>
+    <p:spTree>
+      <p:nvGrpSpPr>
+        <p:cNvPr id="1" name=""/>
+        <p:cNvGrpSpPr/>
+        <p:nvPr/>
+      </p:nvGrpSpPr>
+      <p:grpSpPr>
+        <a:xfrm>
+          <a:off x="0" y="0"/>
+          <a:ext cx="0" cy="0"/>
+          <a:chOff x="0" y="0"/>
+          <a:chExt cx="0" cy="0"/>
+        </a:xfrm>
+      </p:grpSpPr>
+      <p:sp>
+        <p:nvSpPr>
+          <p:cNvPr id="2" name="Slide Image Placeholder 1"/>
+          <p:cNvSpPr>
+            <a:spLocks noGrp="1" noRot="1" noChangeAspect="1"/>
+          </p:cNvSpPr>
+          <p:nvPr>
+            <p:ph type="sldImg"/>
+          </p:nvPr>
+        </p:nvSpPr>
+        <p:spPr/>
+      </p:sp>
+      <p:sp>
+        <p:nvSpPr>
+          <p:cNvPr id="3" name="Notes Placeholder 2"/>
+          <p:cNvSpPr>
+            <a:spLocks noGrp="1"/>
+          </p:cNvSpPr>
+          <p:nvPr>
+            <p:ph type="body" idx="1"/>
+          </p:nvPr>
+        </p:nvSpPr>
+        <p:spPr/>
+        <p:txBody>
+          <a:bodyPr/>
+          <a:lstStyle/>
+          <a:p>
+            <a:endParaRPr lang="en-US"/>
+          </a:p>
+        </p:txBody>
+      </p:sp>
+      <p:sp>
+        <p:nvSpPr>
+          <p:cNvPr id="4" name="Slide Number Placeholder 3"/>
+          <p:cNvSpPr>
+            <a:spLocks noGrp="1"/>
+          </p:cNvSpPr>
+          <p:nvPr>
+            <p:ph type="sldNum" sz="quarter" idx="5"/>
+          </p:nvPr>
+        </p:nvSpPr>
+        <p:spPr/>
+        <p:txBody>
+          <a:bodyPr/>
+          <a:lstStyle/>
+          <a:p>
+            <a:fld id="{5E9947BD-AC0A-9B48-9B0D-917726E2A866}" type="slidenum">
+              <a:rPr lang="de-DE" smtClean="0"/>
+              <a:t>15</a:t>
+            </a:fld>
+            <a:endParaRPr lang="de-DE"/>
+          </a:p>
+        </p:txBody>
+      </p:sp>
+    </p:spTree>
+    <p:extLst>
+      <p:ext uri="{BB962C8B-B14F-4D97-AF65-F5344CB8AC3E}">
+        <p14:creationId xmlns:p14="http://schemas.microsoft.com/office/powerpoint/2010/main" val="1178530381"/>
+      </p:ext>
+    </p:extLst>
+  </p:cSld>
+  <p:clrMapOvr>
+    <a:masterClrMapping/>
+  </p:clrMapOvr>
+</p:notes>
+</file>
+
 <file path=ppt/notesSlides/notesSlide2.xml><?xml version="1.0" encoding="utf-8"?>
 <p:notes xmlns:a="http://schemas.openxmlformats.org/drawingml/2006/main" xmlns:r="http://schemas.openxmlformats.org/officeDocument/2006/relationships" xmlns:p="http://schemas.openxmlformats.org/presentationml/2006/main">
   <p:cSld>
@@ -12789,6 +12878,1807 @@
     <p:extLst>
       <p:ext uri="{BB962C8B-B14F-4D97-AF65-F5344CB8AC3E}">
         <p14:creationId xmlns:p14="http://schemas.microsoft.com/office/powerpoint/2010/main" val="1558597253"/>
+      </p:ext>
+    </p:extLst>
+  </p:cSld>
+  <p:clrMapOvr>
+    <a:masterClrMapping/>
+  </p:clrMapOvr>
+</p:notes>
+</file>
+
+<file path=ppt/notesSlides/notesSlide7.xml><?xml version="1.0" encoding="utf-8"?>
+<p:notes xmlns:a="http://schemas.openxmlformats.org/drawingml/2006/main" xmlns:r="http://schemas.openxmlformats.org/officeDocument/2006/relationships" xmlns:p="http://schemas.openxmlformats.org/presentationml/2006/main">
+  <p:cSld>
+    <p:spTree>
+      <p:nvGrpSpPr>
+        <p:cNvPr id="1" name="">
+          <a:extLst>
+            <a:ext uri="{FF2B5EF4-FFF2-40B4-BE49-F238E27FC236}">
+              <a16:creationId xmlns:a16="http://schemas.microsoft.com/office/drawing/2014/main" id="{C1FF749A-6A18-7256-0E04-E7DA87C94462}"/>
+            </a:ext>
+          </a:extLst>
+        </p:cNvPr>
+        <p:cNvGrpSpPr/>
+        <p:nvPr/>
+      </p:nvGrpSpPr>
+      <p:grpSpPr>
+        <a:xfrm>
+          <a:off x="0" y="0"/>
+          <a:ext cx="0" cy="0"/>
+          <a:chOff x="0" y="0"/>
+          <a:chExt cx="0" cy="0"/>
+        </a:xfrm>
+      </p:grpSpPr>
+      <p:sp>
+        <p:nvSpPr>
+          <p:cNvPr id="2" name="Slide Image Placeholder 1">
+            <a:extLst>
+              <a:ext uri="{FF2B5EF4-FFF2-40B4-BE49-F238E27FC236}">
+                <a16:creationId xmlns:a16="http://schemas.microsoft.com/office/drawing/2014/main" id="{75A8BA20-8A6F-1146-BB74-D361DBE8C082}"/>
+              </a:ext>
+            </a:extLst>
+          </p:cNvPr>
+          <p:cNvSpPr>
+            <a:spLocks noGrp="1" noRot="1" noChangeAspect="1"/>
+          </p:cNvSpPr>
+          <p:nvPr>
+            <p:ph type="sldImg"/>
+          </p:nvPr>
+        </p:nvSpPr>
+        <p:spPr/>
+      </p:sp>
+      <p:sp>
+        <p:nvSpPr>
+          <p:cNvPr id="3" name="Notes Placeholder 2">
+            <a:extLst>
+              <a:ext uri="{FF2B5EF4-FFF2-40B4-BE49-F238E27FC236}">
+                <a16:creationId xmlns:a16="http://schemas.microsoft.com/office/drawing/2014/main" id="{4743F686-0B85-746F-94DF-1EA00CEA93F1}"/>
+              </a:ext>
+            </a:extLst>
+          </p:cNvPr>
+          <p:cNvSpPr>
+            <a:spLocks noGrp="1"/>
+          </p:cNvSpPr>
+          <p:nvPr>
+            <p:ph type="body" idx="1"/>
+          </p:nvPr>
+        </p:nvSpPr>
+        <p:spPr/>
+        <p:txBody>
+          <a:bodyPr/>
+          <a:lstStyle/>
+          <a:p>
+            <a:r>
+              <a:rPr lang="en-US" b="1"/>
+              <a:t>Wettbewerb innerhalb der Branche</a:t>
+            </a:r>
+          </a:p>
+          <a:p>
+            <a:r>
+              <a:rPr lang="en-US" b="1"/>
+              <a:t>Verbrenner: </a:t>
+            </a:r>
+            <a:r>
+              <a:rPr lang="en-US" b="0"/>
+              <a:t>Hier kämpft Porsche Gegen etablierte Marken wie Ferrari, Aston Martin, BMW M, AMG Der Kampf wird über Rundenzeiten, emotionalen Sound und Marken Prestige ausgetragen</a:t>
+            </a:r>
+          </a:p>
+          <a:p>
+            <a:endParaRPr lang="en-US" b="1"/>
+          </a:p>
+          <a:p>
+            <a:r>
+              <a:rPr lang="en-US" b="1"/>
+              <a:t>Elektro: </a:t>
+            </a:r>
+            <a:r>
+              <a:rPr lang="en-US" b="0"/>
+              <a:t>Hier trifft Porsche auf aggressive neue Konkurrenten wie Tesla (Plaid-Modelle), Lucid Motors oder extrem starke chinesische Premium-Marken wie Yangwang (BYD) oder Zeekr</a:t>
+            </a:r>
+          </a:p>
+          <a:p>
+            <a:endParaRPr lang="en-US" b="0"/>
+          </a:p>
+          <a:p>
+            <a:r>
+              <a:rPr lang="en-US" b="1"/>
+              <a:t>Fazit: </a:t>
+            </a:r>
+            <a:r>
+              <a:rPr lang="en-US" b="0"/>
+              <a:t>Wettbewerb hoch, weil technologischer Wandel gigantische Investoren erfordert und jeder Hersteller versucht, sich als Technologieführer zu positionieren</a:t>
+            </a:r>
+            <a:endParaRPr lang="en-US" b="1"/>
+          </a:p>
+          <a:p>
+            <a:endParaRPr lang="en-US" b="0"/>
+          </a:p>
+          <a:p>
+            <a:r>
+              <a:rPr lang="en-US" b="1"/>
+              <a:t>Bedrohung durch Ersatzprodukte (sehr gering)</a:t>
+            </a:r>
+          </a:p>
+          <a:p>
+            <a:r>
+              <a:rPr lang="en-US"/>
+              <a:t>Ein Ersatzprodukt (Substitut) erfüllt denselben Zweck durch eine andere Technologie.</a:t>
+            </a:r>
+          </a:p>
+          <a:p>
+            <a:endParaRPr lang="en-US"/>
+          </a:p>
+          <a:p>
+            <a:r>
+              <a:rPr lang="en-US" b="1"/>
+              <a:t>Status vs. Mobilität:</a:t>
+            </a:r>
+            <a:r>
+              <a:rPr lang="en-US"/>
+              <a:t> Ginge es nur um den Transport von A nach B, wären Bahn, Uber oder künftige Robotaxis echte Bedrohungen.</a:t>
+            </a:r>
+          </a:p>
+          <a:p>
+            <a:endParaRPr lang="en-US"/>
+          </a:p>
+          <a:p>
+            <a:r>
+              <a:rPr lang="en-US" b="1"/>
+              <a:t>Emotionale Bindung:</a:t>
+            </a:r>
+            <a:r>
+              <a:rPr lang="en-US"/>
+              <a:t> Ein Porsche wird als Belohnung, Statussymbol und Fahrspaß-Maschine gekauft. Es gibt außerhalb der exklusiven Sportwagenwelt praktisch keine Substitutionsprodukte, die dieses spezifische Bündel an Emotionen und sozialer Signalwirkung ersetzen können.</a:t>
+            </a:r>
+          </a:p>
+          <a:p>
+            <a:endParaRPr lang="en-US" b="1"/>
+          </a:p>
+          <a:p>
+            <a:endParaRPr lang="en-US" b="0"/>
+          </a:p>
+          <a:p>
+            <a:r>
+              <a:rPr lang="en-US" b="1"/>
+              <a:t>Gefahr von Markteintritten</a:t>
+            </a:r>
+          </a:p>
+          <a:p>
+            <a:r>
+              <a:rPr lang="en-US" b="1"/>
+              <a:t>Niedrigere Barrieren durch BEV (Battery Electric Vehicle): </a:t>
+            </a:r>
+            <a:r>
+              <a:rPr lang="en-US" b="0"/>
+              <a:t>Elektromotor wesentlich einfacher zu bauen, als ein Hochleistungsverbrenner</a:t>
+            </a:r>
+          </a:p>
+          <a:p>
+            <a:endParaRPr lang="en-US" b="0"/>
+          </a:p>
+          <a:p>
+            <a:r>
+              <a:rPr lang="en-US" b="1"/>
+              <a:t>Porsches Schutzschild:</a:t>
+            </a:r>
+            <a:r>
+              <a:rPr lang="en-US"/>
+              <a:t> Was Porsche jedoch massiv schützt, ist die </a:t>
+            </a:r>
+            <a:r>
+              <a:rPr lang="en-US" i="1"/>
+              <a:t>Markenheritage</a:t>
+            </a:r>
+            <a:r>
+              <a:rPr lang="en-US"/>
+              <a:t> (Motorsport-Historie) und das Markenimage. Einen schnellen Elektromotor kann heute fast jeder bauen; das Handling, die Verarbeitungsqualität und das Prestige eines Porsches lassen sich jedoch nicht über Nacht kopieren</a:t>
+            </a:r>
+          </a:p>
+          <a:p>
+            <a:endParaRPr lang="en-US"/>
+          </a:p>
+          <a:p>
+            <a:r>
+              <a:rPr lang="en-US" b="1"/>
+              <a:t>Fazit: </a:t>
+            </a:r>
+            <a:r>
+              <a:rPr lang="en-US" b="0"/>
+              <a:t>Berohung ist gestiegen, wird druch Porsches Markenidentität abgefedert</a:t>
+            </a:r>
+          </a:p>
+          <a:p>
+            <a:endParaRPr lang="en-US" b="1"/>
+          </a:p>
+        </p:txBody>
+      </p:sp>
+      <p:sp>
+        <p:nvSpPr>
+          <p:cNvPr id="4" name="Slide Number Placeholder 3">
+            <a:extLst>
+              <a:ext uri="{FF2B5EF4-FFF2-40B4-BE49-F238E27FC236}">
+                <a16:creationId xmlns:a16="http://schemas.microsoft.com/office/drawing/2014/main" id="{06099066-E69B-7B95-ACA2-7C67BE6CC26E}"/>
+              </a:ext>
+            </a:extLst>
+          </p:cNvPr>
+          <p:cNvSpPr>
+            <a:spLocks noGrp="1"/>
+          </p:cNvSpPr>
+          <p:nvPr>
+            <p:ph type="sldNum" sz="quarter" idx="5"/>
+          </p:nvPr>
+        </p:nvSpPr>
+        <p:spPr/>
+        <p:txBody>
+          <a:bodyPr/>
+          <a:lstStyle/>
+          <a:p>
+            <a:fld id="{5E9947BD-AC0A-9B48-9B0D-917726E2A866}" type="slidenum">
+              <a:rPr lang="de-DE" smtClean="0"/>
+              <a:t>11</a:t>
+            </a:fld>
+            <a:endParaRPr lang="de-DE"/>
+          </a:p>
+        </p:txBody>
+      </p:sp>
+    </p:spTree>
+    <p:extLst>
+      <p:ext uri="{BB962C8B-B14F-4D97-AF65-F5344CB8AC3E}">
+        <p14:creationId xmlns:p14="http://schemas.microsoft.com/office/powerpoint/2010/main" val="1798826342"/>
+      </p:ext>
+    </p:extLst>
+  </p:cSld>
+  <p:clrMapOvr>
+    <a:masterClrMapping/>
+  </p:clrMapOvr>
+</p:notes>
+</file>
+
+<file path=ppt/notesSlides/notesSlide8.xml><?xml version="1.0" encoding="utf-8"?>
+<p:notes xmlns:a="http://schemas.openxmlformats.org/drawingml/2006/main" xmlns:r="http://schemas.openxmlformats.org/officeDocument/2006/relationships" xmlns:p="http://schemas.openxmlformats.org/presentationml/2006/main">
+  <p:cSld>
+    <p:spTree>
+      <p:nvGrpSpPr>
+        <p:cNvPr id="1" name="">
+          <a:extLst>
+            <a:ext uri="{FF2B5EF4-FFF2-40B4-BE49-F238E27FC236}">
+              <a16:creationId xmlns:a16="http://schemas.microsoft.com/office/drawing/2014/main" id="{41C108D4-A9A9-0732-DC26-955324A096F9}"/>
+            </a:ext>
+          </a:extLst>
+        </p:cNvPr>
+        <p:cNvGrpSpPr/>
+        <p:nvPr/>
+      </p:nvGrpSpPr>
+      <p:grpSpPr>
+        <a:xfrm>
+          <a:off x="0" y="0"/>
+          <a:ext cx="0" cy="0"/>
+          <a:chOff x="0" y="0"/>
+          <a:chExt cx="0" cy="0"/>
+        </a:xfrm>
+      </p:grpSpPr>
+      <p:sp>
+        <p:nvSpPr>
+          <p:cNvPr id="2" name="Slide Image Placeholder 1">
+            <a:extLst>
+              <a:ext uri="{FF2B5EF4-FFF2-40B4-BE49-F238E27FC236}">
+                <a16:creationId xmlns:a16="http://schemas.microsoft.com/office/drawing/2014/main" id="{5A1A402A-1D62-EE6F-8314-32EF2C9E74AB}"/>
+              </a:ext>
+            </a:extLst>
+          </p:cNvPr>
+          <p:cNvSpPr>
+            <a:spLocks noGrp="1" noRot="1" noChangeAspect="1"/>
+          </p:cNvSpPr>
+          <p:nvPr>
+            <p:ph type="sldImg"/>
+          </p:nvPr>
+        </p:nvSpPr>
+        <p:spPr/>
+      </p:sp>
+      <p:sp>
+        <p:nvSpPr>
+          <p:cNvPr id="3" name="Notes Placeholder 2">
+            <a:extLst>
+              <a:ext uri="{FF2B5EF4-FFF2-40B4-BE49-F238E27FC236}">
+                <a16:creationId xmlns:a16="http://schemas.microsoft.com/office/drawing/2014/main" id="{718DAE02-1AAB-2AC2-29D2-6A481069597F}"/>
+              </a:ext>
+            </a:extLst>
+          </p:cNvPr>
+          <p:cNvSpPr>
+            <a:spLocks noGrp="1"/>
+          </p:cNvSpPr>
+          <p:nvPr>
+            <p:ph type="body" idx="1"/>
+          </p:nvPr>
+        </p:nvSpPr>
+        <p:spPr/>
+        <p:txBody>
+          <a:bodyPr/>
+          <a:lstStyle/>
+          <a:p>
+            <a:r>
+              <a:rPr lang="en-US" b="1"/>
+              <a:t>Macht von Abnehmern|Kunden</a:t>
+            </a:r>
+            <a:endParaRPr lang="en-US"/>
+          </a:p>
+          <a:p>
+            <a:r>
+              <a:rPr lang="en-US"/>
+              <a:t>Kunden haben bei Massenmarkt-Autos viel Macht, weil sie leicht die günstigste Alternative wählen können. Bei Porsche greifen andere Mechanismen:</a:t>
+            </a:r>
+          </a:p>
+          <a:p>
+            <a:endParaRPr lang="en-US" b="0"/>
+          </a:p>
+          <a:p>
+            <a:r>
+              <a:rPr lang="en-US" b="1"/>
+              <a:t>Luxusstrategie: </a:t>
+            </a:r>
+            <a:r>
+              <a:rPr lang="en-US" b="0"/>
+              <a:t>Porsche-Kunden sind wenig preissensibel. Preiserhöhungen bei Ikonen wie dem 911er führen meist nicht zum Nachfrageeinbruch, sondern stärken die Exklusivität</a:t>
+            </a:r>
+          </a:p>
+          <a:p>
+            <a:endParaRPr lang="en-US" b="0"/>
+          </a:p>
+          <a:p>
+            <a:r>
+              <a:rPr lang="en-US" b="1"/>
+              <a:t>Individualisierung: </a:t>
+            </a:r>
+            <a:r>
+              <a:rPr lang="en-US" b="0"/>
+              <a:t>Wer sich in Porsche Exclusive Manufaktur sein hochgradig individuelles Traumauto konfiguriert, wechselt nicht wegen eines kleinen Preisvorteils zur Konkurrenz.</a:t>
+            </a:r>
+          </a:p>
+          <a:p>
+            <a:endParaRPr lang="en-US" b="0"/>
+          </a:p>
+          <a:p>
+            <a:r>
+              <a:rPr lang="en-US" b="1"/>
+              <a:t>Macht von Lieferanten (Mittel bis Hoch – Tendenz steigend)</a:t>
+            </a:r>
+          </a:p>
+          <a:p>
+            <a:r>
+              <a:rPr lang="en-US"/>
+              <a:t>Hier findet durch die technologische S-Kurve eine massive Machtverschiebung statt:</a:t>
+            </a:r>
+          </a:p>
+          <a:p>
+            <a:endParaRPr lang="en-US"/>
+          </a:p>
+          <a:p>
+            <a:r>
+              <a:rPr lang="en-US" b="1"/>
+              <a:t>Klassische Teile:</a:t>
+            </a:r>
+            <a:r>
+              <a:rPr lang="en-US"/>
+              <a:t> Bei Blechen, Sitzen oder Standardkomponenten hat Porsche als Teil des VW-Konzerns eine enorme Verhandlungsmacht und kann Preise diktiert.</a:t>
+            </a:r>
+          </a:p>
+          <a:p>
+            <a:endParaRPr lang="en-US"/>
+          </a:p>
+          <a:p>
+            <a:r>
+              <a:rPr lang="en-US" b="1"/>
+              <a:t>Software &amp; Batterien:</a:t>
+            </a:r>
+            <a:r>
+              <a:rPr lang="en-US"/>
+              <a:t> Bei Batteriezellen, Halbleitern und High-End-Chips (z. B. Nvidia, TSMC) sieht das anders aus. Diese Tech-Giganten sind wenige an der Zahl und extrem gefragt. Je mehr das Auto zum "Software-Defined Vehicle" wird, desto stärker wächst die Abhängigkeit und damit die Preismacht dieser wenigen Hightech-Lieferanten.</a:t>
+            </a:r>
+          </a:p>
+          <a:p>
+            <a:endParaRPr lang="en-US" b="1"/>
+          </a:p>
+        </p:txBody>
+      </p:sp>
+      <p:sp>
+        <p:nvSpPr>
+          <p:cNvPr id="4" name="Slide Number Placeholder 3">
+            <a:extLst>
+              <a:ext uri="{FF2B5EF4-FFF2-40B4-BE49-F238E27FC236}">
+                <a16:creationId xmlns:a16="http://schemas.microsoft.com/office/drawing/2014/main" id="{A5B67168-D908-C092-A756-E21E0CDBE57D}"/>
+              </a:ext>
+            </a:extLst>
+          </p:cNvPr>
+          <p:cNvSpPr>
+            <a:spLocks noGrp="1"/>
+          </p:cNvSpPr>
+          <p:nvPr>
+            <p:ph type="sldNum" sz="quarter" idx="5"/>
+          </p:nvPr>
+        </p:nvSpPr>
+        <p:spPr/>
+        <p:txBody>
+          <a:bodyPr/>
+          <a:lstStyle/>
+          <a:p>
+            <a:fld id="{5E9947BD-AC0A-9B48-9B0D-917726E2A866}" type="slidenum">
+              <a:rPr lang="de-DE" smtClean="0"/>
+              <a:t>12</a:t>
+            </a:fld>
+            <a:endParaRPr lang="de-DE"/>
+          </a:p>
+        </p:txBody>
+      </p:sp>
+    </p:spTree>
+    <p:extLst>
+      <p:ext uri="{BB962C8B-B14F-4D97-AF65-F5344CB8AC3E}">
+        <p14:creationId xmlns:p14="http://schemas.microsoft.com/office/powerpoint/2010/main" val="1352261237"/>
+      </p:ext>
+    </p:extLst>
+  </p:cSld>
+  <p:clrMapOvr>
+    <a:masterClrMapping/>
+  </p:clrMapOvr>
+</p:notes>
+</file>
+
+<file path=ppt/notesSlides/notesSlide9.xml><?xml version="1.0" encoding="utf-8"?>
+<p:notes xmlns:a="http://schemas.openxmlformats.org/drawingml/2006/main" xmlns:r="http://schemas.openxmlformats.org/officeDocument/2006/relationships" xmlns:p="http://schemas.openxmlformats.org/presentationml/2006/main">
+  <p:cSld>
+    <p:spTree>
+      <p:nvGrpSpPr>
+        <p:cNvPr id="1" name=""/>
+        <p:cNvGrpSpPr/>
+        <p:nvPr/>
+      </p:nvGrpSpPr>
+      <p:grpSpPr>
+        <a:xfrm>
+          <a:off x="0" y="0"/>
+          <a:ext cx="0" cy="0"/>
+          <a:chOff x="0" y="0"/>
+          <a:chExt cx="0" cy="0"/>
+        </a:xfrm>
+      </p:grpSpPr>
+      <p:sp>
+        <p:nvSpPr>
+          <p:cNvPr id="2" name="Slide Image Placeholder 1"/>
+          <p:cNvSpPr>
+            <a:spLocks noGrp="1" noRot="1" noChangeAspect="1"/>
+          </p:cNvSpPr>
+          <p:nvPr>
+            <p:ph type="sldImg"/>
+          </p:nvPr>
+        </p:nvSpPr>
+        <p:spPr/>
+      </p:sp>
+      <p:sp>
+        <p:nvSpPr>
+          <p:cNvPr id="3" name="Notes Placeholder 2"/>
+          <p:cNvSpPr>
+            <a:spLocks noGrp="1"/>
+          </p:cNvSpPr>
+          <p:nvPr>
+            <p:ph type="body" idx="1"/>
+          </p:nvPr>
+        </p:nvSpPr>
+        <p:spPr/>
+        <p:txBody>
+          <a:bodyPr/>
+          <a:lstStyle/>
+          <a:p>
+            <a:r>
+              <a:rPr lang="en-US" b="1" err="1"/>
+              <a:t>Unterstützungsaktivitäten</a:t>
+            </a:r>
+            <a:endParaRPr lang="en-US" b="1"/>
+          </a:p>
+          <a:p>
+            <a:r>
+              <a:rPr lang="en-US" b="1" err="1"/>
+              <a:t>Unternehmens-Infrastruktur</a:t>
+            </a:r>
+            <a:endParaRPr lang="en-US" b="1"/>
+          </a:p>
+          <a:p>
+            <a:r>
+              <a:rPr lang="en-US" err="1"/>
+              <a:t>Im</a:t>
+            </a:r>
+            <a:r>
+              <a:rPr lang="en-US"/>
+              <a:t> </a:t>
+            </a:r>
+            <a:r>
+              <a:rPr lang="en-US" err="1"/>
+              <a:t>oberen</a:t>
+            </a:r>
+            <a:r>
+              <a:rPr lang="en-US"/>
+              <a:t> </a:t>
+            </a:r>
+            <a:r>
+              <a:rPr lang="en-US" err="1"/>
+              <a:t>Bereich</a:t>
+            </a:r>
+            <a:r>
+              <a:rPr lang="en-US"/>
+              <a:t> </a:t>
+            </a:r>
+            <a:r>
+              <a:rPr lang="en-US" err="1"/>
+              <a:t>sehen</a:t>
+            </a:r>
+            <a:r>
+              <a:rPr lang="en-US"/>
+              <a:t> </a:t>
+            </a:r>
+            <a:r>
+              <a:rPr lang="en-US" err="1"/>
+              <a:t>wir</a:t>
+            </a:r>
+            <a:r>
+              <a:rPr lang="en-US"/>
+              <a:t> </a:t>
+            </a:r>
+            <a:r>
+              <a:rPr lang="en-US" err="1"/>
+              <a:t>zunächst</a:t>
+            </a:r>
+            <a:r>
+              <a:rPr lang="en-US"/>
+              <a:t> die </a:t>
+            </a:r>
+            <a:r>
+              <a:rPr lang="en-US" err="1"/>
+              <a:t>Unternehmensinfrastruktur</a:t>
+            </a:r>
+            <a:r>
+              <a:rPr lang="en-US"/>
+              <a:t>.</a:t>
+            </a:r>
+          </a:p>
+          <a:p>
+            <a:r>
+              <a:rPr lang="en-US"/>
+              <a:t>Dazu </a:t>
+            </a:r>
+            <a:r>
+              <a:rPr lang="en-US" err="1"/>
+              <a:t>gehören</a:t>
+            </a:r>
+            <a:r>
+              <a:rPr lang="en-US"/>
+              <a:t> Management, </a:t>
+            </a:r>
+            <a:r>
+              <a:rPr lang="en-US" err="1"/>
+              <a:t>Strategie</a:t>
+            </a:r>
+            <a:r>
+              <a:rPr lang="en-US"/>
+              <a:t>, </a:t>
+            </a:r>
+            <a:r>
+              <a:rPr lang="en-US" err="1"/>
+              <a:t>Finanzen</a:t>
+            </a:r>
+            <a:r>
+              <a:rPr lang="en-US"/>
+              <a:t> und </a:t>
+            </a:r>
+            <a:r>
+              <a:rPr lang="en-US" err="1"/>
+              <a:t>Qualitätsmanagement</a:t>
+            </a:r>
+            <a:r>
+              <a:rPr lang="en-US"/>
+              <a:t>.</a:t>
+            </a:r>
+          </a:p>
+          <a:p>
+            <a:r>
+              <a:rPr lang="en-US" err="1"/>
+              <a:t>Gerade</a:t>
+            </a:r>
+            <a:r>
+              <a:rPr lang="en-US"/>
+              <a:t> </a:t>
+            </a:r>
+            <a:r>
+              <a:rPr lang="en-US" err="1"/>
+              <a:t>bei</a:t>
+            </a:r>
+            <a:r>
+              <a:rPr lang="en-US"/>
+              <a:t> Porsche </a:t>
+            </a:r>
+            <a:r>
+              <a:rPr lang="en-US" err="1"/>
+              <a:t>ist</a:t>
+            </a:r>
+            <a:r>
+              <a:rPr lang="en-US"/>
+              <a:t> die </a:t>
+            </a:r>
+            <a:r>
+              <a:rPr lang="en-US" err="1"/>
+              <a:t>strategische</a:t>
+            </a:r>
+            <a:r>
+              <a:rPr lang="en-US"/>
+              <a:t> </a:t>
+            </a:r>
+            <a:r>
+              <a:rPr lang="en-US" err="1"/>
+              <a:t>Steuerung</a:t>
+            </a:r>
+            <a:r>
+              <a:rPr lang="en-US"/>
+              <a:t> </a:t>
+            </a:r>
+            <a:r>
+              <a:rPr lang="en-US" err="1"/>
+              <a:t>sehr</a:t>
+            </a:r>
+            <a:r>
+              <a:rPr lang="en-US"/>
+              <a:t> </a:t>
+            </a:r>
+            <a:r>
+              <a:rPr lang="en-US" err="1"/>
+              <a:t>wichtig</a:t>
+            </a:r>
+            <a:r>
+              <a:rPr lang="en-US"/>
+              <a:t>, da das </a:t>
+            </a:r>
+            <a:r>
+              <a:rPr lang="en-US" err="1"/>
+              <a:t>Unternehmen</a:t>
+            </a:r>
+            <a:r>
+              <a:rPr lang="en-US"/>
+              <a:t> stark auf </a:t>
+            </a:r>
+            <a:r>
+              <a:rPr lang="en-US" err="1"/>
+              <a:t>Premiumqualität</a:t>
+            </a:r>
+            <a:r>
+              <a:rPr lang="en-US"/>
+              <a:t> und </a:t>
+            </a:r>
+            <a:r>
+              <a:rPr lang="en-US" err="1"/>
+              <a:t>hohe</a:t>
+            </a:r>
+            <a:r>
+              <a:rPr lang="en-US"/>
+              <a:t> </a:t>
+            </a:r>
+            <a:r>
+              <a:rPr lang="en-US" err="1"/>
+              <a:t>Margen</a:t>
+            </a:r>
+            <a:r>
+              <a:rPr lang="en-US"/>
+              <a:t> </a:t>
+            </a:r>
+            <a:r>
+              <a:rPr lang="en-US" err="1"/>
+              <a:t>fokussiert</a:t>
+            </a:r>
+            <a:r>
+              <a:rPr lang="en-US"/>
+              <a:t> </a:t>
+            </a:r>
+            <a:r>
+              <a:rPr lang="en-US" err="1"/>
+              <a:t>ist</a:t>
+            </a:r>
+            <a:r>
+              <a:rPr lang="en-US"/>
+              <a:t>.</a:t>
+            </a:r>
+          </a:p>
+          <a:p>
+            <a:br>
+              <a:rPr lang="en-US"/>
+            </a:br>
+            <a:endParaRPr lang="en-US"/>
+          </a:p>
+          <a:p>
+            <a:r>
+              <a:rPr lang="en-US" b="1"/>
+              <a:t>Human Resource Management</a:t>
+            </a:r>
+          </a:p>
+          <a:p>
+            <a:r>
+              <a:rPr lang="en-US"/>
+              <a:t>Ein </a:t>
+            </a:r>
+            <a:r>
+              <a:rPr lang="en-US" err="1"/>
+              <a:t>weiterer</a:t>
+            </a:r>
+            <a:r>
+              <a:rPr lang="en-US"/>
+              <a:t> </a:t>
+            </a:r>
+            <a:r>
+              <a:rPr lang="en-US" err="1"/>
+              <a:t>wichtiger</a:t>
+            </a:r>
+            <a:r>
+              <a:rPr lang="en-US"/>
+              <a:t> </a:t>
+            </a:r>
+            <a:r>
+              <a:rPr lang="en-US" err="1"/>
+              <a:t>Punkt</a:t>
+            </a:r>
+            <a:r>
+              <a:rPr lang="en-US"/>
+              <a:t> </a:t>
+            </a:r>
+            <a:r>
+              <a:rPr lang="en-US" err="1"/>
+              <a:t>ist</a:t>
+            </a:r>
+            <a:r>
+              <a:rPr lang="en-US"/>
+              <a:t> das </a:t>
+            </a:r>
+            <a:r>
+              <a:rPr lang="en-US" err="1"/>
+              <a:t>Personalmanagement</a:t>
+            </a:r>
+            <a:r>
+              <a:rPr lang="en-US"/>
+              <a:t>.</a:t>
+            </a:r>
+          </a:p>
+          <a:p>
+            <a:r>
+              <a:rPr lang="en-US"/>
+              <a:t>Porsche </a:t>
+            </a:r>
+            <a:r>
+              <a:rPr lang="en-US" err="1"/>
+              <a:t>benötigt</a:t>
+            </a:r>
+            <a:r>
+              <a:rPr lang="en-US"/>
+              <a:t> </a:t>
+            </a:r>
+            <a:r>
+              <a:rPr lang="en-US" err="1"/>
+              <a:t>hochqualifizierte</a:t>
+            </a:r>
+            <a:r>
+              <a:rPr lang="en-US"/>
+              <a:t> </a:t>
+            </a:r>
+            <a:r>
+              <a:rPr lang="en-US" err="1"/>
+              <a:t>Fachkräfte</a:t>
+            </a:r>
+            <a:r>
+              <a:rPr lang="en-US"/>
+              <a:t>, </a:t>
+            </a:r>
+            <a:r>
+              <a:rPr lang="en-US" err="1"/>
+              <a:t>Ingenieure</a:t>
+            </a:r>
+            <a:r>
+              <a:rPr lang="en-US"/>
+              <a:t> und </a:t>
+            </a:r>
+            <a:r>
+              <a:rPr lang="en-US" err="1"/>
+              <a:t>Softwareentwickler</a:t>
+            </a:r>
+            <a:r>
+              <a:rPr lang="en-US"/>
+              <a:t>.</a:t>
+            </a:r>
+          </a:p>
+          <a:p>
+            <a:r>
+              <a:rPr lang="en-US" err="1"/>
+              <a:t>Dadurch</a:t>
+            </a:r>
+            <a:r>
+              <a:rPr lang="en-US"/>
+              <a:t> </a:t>
+            </a:r>
+            <a:r>
+              <a:rPr lang="en-US" err="1"/>
+              <a:t>kann</a:t>
+            </a:r>
+            <a:r>
+              <a:rPr lang="en-US"/>
+              <a:t> das </a:t>
+            </a:r>
+            <a:r>
+              <a:rPr lang="en-US" err="1"/>
+              <a:t>Unternehmen</a:t>
+            </a:r>
+            <a:r>
+              <a:rPr lang="en-US"/>
+              <a:t> innovative </a:t>
+            </a:r>
+            <a:r>
+              <a:rPr lang="en-US" err="1"/>
+              <a:t>Technologien</a:t>
+            </a:r>
+            <a:r>
+              <a:rPr lang="en-US"/>
+              <a:t> und </a:t>
+            </a:r>
+            <a:r>
+              <a:rPr lang="en-US" err="1"/>
+              <a:t>hohe</a:t>
+            </a:r>
+            <a:r>
+              <a:rPr lang="en-US"/>
+              <a:t> </a:t>
+            </a:r>
+            <a:r>
+              <a:rPr lang="en-US" err="1"/>
+              <a:t>Qualitätsstandards</a:t>
+            </a:r>
+            <a:r>
+              <a:rPr lang="en-US"/>
+              <a:t> </a:t>
+            </a:r>
+            <a:r>
+              <a:rPr lang="en-US" err="1"/>
+              <a:t>sicherstellen</a:t>
+            </a:r>
+            <a:r>
+              <a:rPr lang="en-US"/>
+              <a:t>.</a:t>
+            </a:r>
+          </a:p>
+          <a:p>
+            <a:br>
+              <a:rPr lang="en-US"/>
+            </a:br>
+            <a:endParaRPr lang="en-US"/>
+          </a:p>
+          <a:p>
+            <a:r>
+              <a:rPr lang="en-US" b="1"/>
+              <a:t>Technologie-</a:t>
+            </a:r>
+            <a:r>
+              <a:rPr lang="en-US" b="1" err="1"/>
+              <a:t>Entwicklung</a:t>
+            </a:r>
+            <a:endParaRPr lang="en-US" b="1"/>
+          </a:p>
+          <a:p>
+            <a:r>
+              <a:rPr lang="en-US" err="1"/>
+              <a:t>Besonders</a:t>
+            </a:r>
+            <a:r>
+              <a:rPr lang="en-US"/>
+              <a:t> </a:t>
+            </a:r>
+            <a:r>
+              <a:rPr lang="en-US" err="1"/>
+              <a:t>wichtig</a:t>
+            </a:r>
+            <a:r>
+              <a:rPr lang="en-US"/>
+              <a:t> für Porsche </a:t>
+            </a:r>
+            <a:r>
+              <a:rPr lang="en-US" err="1"/>
+              <a:t>ist</a:t>
+            </a:r>
+            <a:r>
+              <a:rPr lang="en-US"/>
+              <a:t> die </a:t>
+            </a:r>
+            <a:r>
+              <a:rPr lang="en-US" err="1"/>
+              <a:t>Technologieentwicklung</a:t>
+            </a:r>
+            <a:r>
+              <a:rPr lang="en-US"/>
+              <a:t>.</a:t>
+            </a:r>
+          </a:p>
+          <a:p>
+            <a:r>
+              <a:rPr lang="en-US"/>
+              <a:t>Hier </a:t>
+            </a:r>
+            <a:r>
+              <a:rPr lang="en-US" err="1"/>
+              <a:t>investiert</a:t>
+            </a:r>
+            <a:r>
+              <a:rPr lang="en-US"/>
+              <a:t> das </a:t>
+            </a:r>
+            <a:r>
+              <a:rPr lang="en-US" err="1"/>
+              <a:t>Unternehmen</a:t>
+            </a:r>
+            <a:r>
+              <a:rPr lang="en-US"/>
+              <a:t> stark in </a:t>
+            </a:r>
+            <a:r>
+              <a:rPr lang="en-US" err="1"/>
+              <a:t>Elektromobilität</a:t>
+            </a:r>
+            <a:r>
+              <a:rPr lang="en-US"/>
+              <a:t>, </a:t>
+            </a:r>
+            <a:r>
+              <a:rPr lang="en-US" err="1"/>
+              <a:t>Batterietechnik</a:t>
+            </a:r>
+            <a:r>
+              <a:rPr lang="en-US"/>
+              <a:t>, Software und </a:t>
+            </a:r>
+            <a:r>
+              <a:rPr lang="en-US" err="1"/>
+              <a:t>digitale</a:t>
+            </a:r>
+            <a:r>
+              <a:rPr lang="en-US"/>
+              <a:t> Systeme.</a:t>
+            </a:r>
+          </a:p>
+          <a:p>
+            <a:r>
+              <a:rPr lang="en-US" err="1"/>
+              <a:t>Diese</a:t>
+            </a:r>
+            <a:r>
+              <a:rPr lang="en-US"/>
+              <a:t> </a:t>
+            </a:r>
+            <a:r>
+              <a:rPr lang="en-US" err="1"/>
+              <a:t>Innovationen</a:t>
+            </a:r>
+            <a:r>
+              <a:rPr lang="en-US"/>
+              <a:t> </a:t>
+            </a:r>
+            <a:r>
+              <a:rPr lang="en-US" err="1"/>
+              <a:t>sind</a:t>
+            </a:r>
+            <a:r>
+              <a:rPr lang="en-US"/>
+              <a:t> </a:t>
+            </a:r>
+            <a:r>
+              <a:rPr lang="en-US" err="1"/>
+              <a:t>entscheidend</a:t>
+            </a:r>
+            <a:r>
+              <a:rPr lang="en-US"/>
+              <a:t>, um </a:t>
+            </a:r>
+            <a:r>
+              <a:rPr lang="en-US" err="1"/>
+              <a:t>langfristig</a:t>
+            </a:r>
+            <a:r>
+              <a:rPr lang="en-US"/>
+              <a:t> </a:t>
+            </a:r>
+            <a:r>
+              <a:rPr lang="en-US" err="1"/>
+              <a:t>wettbewerbsfähig</a:t>
+            </a:r>
+            <a:r>
+              <a:rPr lang="en-US"/>
+              <a:t> </a:t>
+            </a:r>
+            <a:r>
+              <a:rPr lang="en-US" err="1"/>
+              <a:t>zu</a:t>
+            </a:r>
+            <a:r>
+              <a:rPr lang="en-US"/>
+              <a:t> </a:t>
+            </a:r>
+            <a:r>
+              <a:rPr lang="en-US" err="1"/>
+              <a:t>bleiben</a:t>
+            </a:r>
+            <a:r>
+              <a:rPr lang="en-US"/>
+              <a:t>.</a:t>
+            </a:r>
+          </a:p>
+          <a:p>
+            <a:br>
+              <a:rPr lang="en-US"/>
+            </a:br>
+            <a:endParaRPr lang="en-US"/>
+          </a:p>
+          <a:p>
+            <a:r>
+              <a:rPr lang="en-US" b="1" err="1"/>
+              <a:t>Beschaffung</a:t>
+            </a:r>
+            <a:endParaRPr lang="en-US" b="1"/>
+          </a:p>
+          <a:p>
+            <a:r>
+              <a:rPr lang="en-US"/>
+              <a:t>Die </a:t>
+            </a:r>
+            <a:r>
+              <a:rPr lang="en-US" err="1"/>
+              <a:t>Beschaffung</a:t>
+            </a:r>
+            <a:r>
+              <a:rPr lang="en-US"/>
+              <a:t> </a:t>
+            </a:r>
+            <a:r>
+              <a:rPr lang="en-US" err="1"/>
+              <a:t>sorgt</a:t>
+            </a:r>
+            <a:r>
+              <a:rPr lang="en-US"/>
+              <a:t> </a:t>
+            </a:r>
+            <a:r>
+              <a:rPr lang="en-US" err="1"/>
+              <a:t>dafür</a:t>
+            </a:r>
+            <a:r>
+              <a:rPr lang="en-US"/>
+              <a:t>, </a:t>
+            </a:r>
+            <a:r>
+              <a:rPr lang="en-US" err="1"/>
+              <a:t>dass</a:t>
+            </a:r>
+            <a:r>
+              <a:rPr lang="en-US"/>
+              <a:t> </a:t>
+            </a:r>
+            <a:r>
+              <a:rPr lang="en-US" err="1"/>
+              <a:t>wichtige</a:t>
+            </a:r>
+            <a:r>
+              <a:rPr lang="en-US"/>
+              <a:t> </a:t>
+            </a:r>
+            <a:r>
+              <a:rPr lang="en-US" err="1"/>
+              <a:t>Komponenten</a:t>
+            </a:r>
+            <a:r>
+              <a:rPr lang="en-US"/>
+              <a:t> </a:t>
+            </a:r>
+            <a:r>
+              <a:rPr lang="en-US" err="1"/>
+              <a:t>wie</a:t>
+            </a:r>
+            <a:r>
+              <a:rPr lang="en-US"/>
+              <a:t> </a:t>
+            </a:r>
+            <a:r>
+              <a:rPr lang="en-US" err="1"/>
+              <a:t>Batterien</a:t>
+            </a:r>
+            <a:r>
+              <a:rPr lang="en-US"/>
+              <a:t>, </a:t>
+            </a:r>
+            <a:r>
+              <a:rPr lang="en-US" err="1"/>
+              <a:t>Halbleiter</a:t>
+            </a:r>
+            <a:r>
+              <a:rPr lang="en-US"/>
+              <a:t> und </a:t>
+            </a:r>
+            <a:r>
+              <a:rPr lang="en-US" err="1"/>
+              <a:t>Rohstoffe</a:t>
+            </a:r>
+            <a:r>
+              <a:rPr lang="en-US"/>
+              <a:t> </a:t>
+            </a:r>
+            <a:r>
+              <a:rPr lang="en-US" err="1"/>
+              <a:t>verfügbar</a:t>
+            </a:r>
+            <a:r>
+              <a:rPr lang="en-US"/>
+              <a:t> </a:t>
+            </a:r>
+            <a:r>
+              <a:rPr lang="en-US" err="1"/>
+              <a:t>sind</a:t>
+            </a:r>
+            <a:r>
+              <a:rPr lang="en-US"/>
+              <a:t>.</a:t>
+            </a:r>
+          </a:p>
+          <a:p>
+            <a:r>
+              <a:rPr lang="en-US"/>
+              <a:t>Vor </a:t>
+            </a:r>
+            <a:r>
+              <a:rPr lang="en-US" err="1"/>
+              <a:t>allem</a:t>
+            </a:r>
+            <a:r>
+              <a:rPr lang="en-US"/>
+              <a:t> </a:t>
+            </a:r>
+            <a:r>
+              <a:rPr lang="en-US" err="1"/>
+              <a:t>bei</a:t>
+            </a:r>
+            <a:r>
+              <a:rPr lang="en-US"/>
+              <a:t> </a:t>
+            </a:r>
+            <a:r>
+              <a:rPr lang="en-US" err="1"/>
+              <a:t>Elektrofahrzeugen</a:t>
+            </a:r>
+            <a:r>
+              <a:rPr lang="en-US"/>
+              <a:t> </a:t>
+            </a:r>
+            <a:r>
+              <a:rPr lang="en-US" err="1"/>
+              <a:t>ist</a:t>
+            </a:r>
+            <a:r>
+              <a:rPr lang="en-US"/>
+              <a:t> die </a:t>
+            </a:r>
+            <a:r>
+              <a:rPr lang="en-US" err="1"/>
+              <a:t>Versorgung</a:t>
+            </a:r>
+            <a:r>
+              <a:rPr lang="en-US"/>
+              <a:t> </a:t>
+            </a:r>
+            <a:r>
+              <a:rPr lang="en-US" err="1"/>
+              <a:t>mit</a:t>
+            </a:r>
+            <a:r>
+              <a:rPr lang="en-US"/>
+              <a:t> </a:t>
+            </a:r>
+            <a:r>
+              <a:rPr lang="en-US" err="1"/>
+              <a:t>Batterien</a:t>
+            </a:r>
+            <a:r>
+              <a:rPr lang="en-US"/>
+              <a:t> und Chips </a:t>
+            </a:r>
+            <a:r>
+              <a:rPr lang="en-US" err="1"/>
+              <a:t>mittlerweile</a:t>
+            </a:r>
+            <a:r>
+              <a:rPr lang="en-US"/>
+              <a:t> </a:t>
+            </a:r>
+            <a:r>
+              <a:rPr lang="en-US" err="1"/>
+              <a:t>ein</a:t>
+            </a:r>
+            <a:r>
+              <a:rPr lang="en-US"/>
+              <a:t> </a:t>
+            </a:r>
+            <a:r>
+              <a:rPr lang="en-US" err="1"/>
+              <a:t>zentraler</a:t>
+            </a:r>
+            <a:r>
+              <a:rPr lang="en-US"/>
+              <a:t> </a:t>
+            </a:r>
+            <a:r>
+              <a:rPr lang="en-US" err="1"/>
+              <a:t>Wettbewerbsfaktor</a:t>
+            </a:r>
+            <a:r>
+              <a:rPr lang="en-US"/>
+              <a:t>.</a:t>
+            </a:r>
+          </a:p>
+          <a:p>
+            <a:br>
+              <a:rPr lang="en-US"/>
+            </a:br>
+            <a:endParaRPr lang="en-US"/>
+          </a:p>
+          <a:p>
+            <a:r>
+              <a:rPr lang="en-US" b="1" err="1"/>
+              <a:t>Primäraktivitäten</a:t>
+            </a:r>
+            <a:endParaRPr lang="en-US" b="1"/>
+          </a:p>
+          <a:p>
+            <a:r>
+              <a:rPr lang="en-US" b="1"/>
+              <a:t>Interne Logistik</a:t>
+            </a:r>
+          </a:p>
+          <a:p>
+            <a:r>
+              <a:rPr lang="en-US"/>
+              <a:t>Die </a:t>
+            </a:r>
+            <a:r>
+              <a:rPr lang="en-US" err="1"/>
+              <a:t>Wertschöpfung</a:t>
+            </a:r>
+            <a:r>
+              <a:rPr lang="en-US"/>
+              <a:t> </a:t>
+            </a:r>
+            <a:r>
+              <a:rPr lang="en-US" err="1"/>
+              <a:t>beginnt</a:t>
+            </a:r>
+            <a:r>
+              <a:rPr lang="en-US"/>
+              <a:t> </a:t>
+            </a:r>
+            <a:r>
+              <a:rPr lang="en-US" err="1"/>
+              <a:t>mit</a:t>
+            </a:r>
+            <a:r>
+              <a:rPr lang="en-US"/>
+              <a:t> der </a:t>
+            </a:r>
+            <a:r>
+              <a:rPr lang="en-US" err="1"/>
+              <a:t>internen</a:t>
+            </a:r>
+            <a:r>
+              <a:rPr lang="en-US"/>
+              <a:t> Logistik.</a:t>
+            </a:r>
+          </a:p>
+          <a:p>
+            <a:r>
+              <a:rPr lang="en-US"/>
+              <a:t>Hier </a:t>
+            </a:r>
+            <a:r>
+              <a:rPr lang="en-US" err="1"/>
+              <a:t>werden</a:t>
+            </a:r>
+            <a:r>
+              <a:rPr lang="en-US"/>
+              <a:t> </a:t>
+            </a:r>
+            <a:r>
+              <a:rPr lang="en-US" err="1"/>
+              <a:t>Materialien</a:t>
+            </a:r>
+            <a:r>
+              <a:rPr lang="en-US"/>
+              <a:t>, </a:t>
+            </a:r>
+            <a:r>
+              <a:rPr lang="en-US" err="1"/>
+              <a:t>Bauteile</a:t>
+            </a:r>
+            <a:r>
+              <a:rPr lang="en-US"/>
+              <a:t> und </a:t>
+            </a:r>
+            <a:r>
+              <a:rPr lang="en-US" err="1"/>
+              <a:t>Lieferanten</a:t>
+            </a:r>
+            <a:r>
+              <a:rPr lang="en-US"/>
+              <a:t> </a:t>
+            </a:r>
+            <a:r>
+              <a:rPr lang="en-US" err="1"/>
+              <a:t>organisiert</a:t>
+            </a:r>
+            <a:r>
+              <a:rPr lang="en-US"/>
+              <a:t>.</a:t>
+            </a:r>
+          </a:p>
+          <a:p>
+            <a:br>
+              <a:rPr lang="en-US"/>
+            </a:br>
+            <a:endParaRPr lang="en-US"/>
+          </a:p>
+          <a:p>
+            <a:r>
+              <a:rPr lang="en-US" b="1"/>
+              <a:t>Produktion</a:t>
+            </a:r>
+          </a:p>
+          <a:p>
+            <a:r>
+              <a:rPr lang="en-US"/>
+              <a:t>Danach </a:t>
+            </a:r>
+            <a:r>
+              <a:rPr lang="en-US" err="1"/>
+              <a:t>folgt</a:t>
+            </a:r>
+            <a:r>
+              <a:rPr lang="en-US"/>
+              <a:t> die Produktion </a:t>
+            </a:r>
+            <a:r>
+              <a:rPr lang="en-US" err="1"/>
+              <a:t>mit</a:t>
+            </a:r>
+            <a:r>
+              <a:rPr lang="en-US"/>
+              <a:t> </a:t>
+            </a:r>
+            <a:r>
+              <a:rPr lang="en-US" err="1"/>
+              <a:t>Fahrzeugfertigung</a:t>
+            </a:r>
+            <a:r>
+              <a:rPr lang="en-US"/>
+              <a:t>, </a:t>
+            </a:r>
+            <a:r>
+              <a:rPr lang="en-US" err="1"/>
+              <a:t>Lackierung</a:t>
+            </a:r>
+            <a:r>
+              <a:rPr lang="en-US"/>
+              <a:t> und </a:t>
+            </a:r>
+            <a:r>
+              <a:rPr lang="en-US" err="1"/>
+              <a:t>Qualitätskontrolle</a:t>
+            </a:r>
+            <a:r>
+              <a:rPr lang="en-US"/>
+              <a:t>.</a:t>
+            </a:r>
+          </a:p>
+          <a:p>
+            <a:r>
+              <a:rPr lang="en-US"/>
+              <a:t>Porsche </a:t>
+            </a:r>
+            <a:r>
+              <a:rPr lang="en-US" err="1"/>
+              <a:t>setzt</a:t>
+            </a:r>
+            <a:r>
+              <a:rPr lang="en-US"/>
+              <a:t> </a:t>
+            </a:r>
+            <a:r>
+              <a:rPr lang="en-US" err="1"/>
+              <a:t>dabei</a:t>
+            </a:r>
+            <a:r>
+              <a:rPr lang="en-US"/>
+              <a:t> </a:t>
+            </a:r>
+            <a:r>
+              <a:rPr lang="en-US" err="1"/>
+              <a:t>besonders</a:t>
+            </a:r>
+            <a:r>
+              <a:rPr lang="en-US"/>
+              <a:t> auf </a:t>
+            </a:r>
+            <a:r>
+              <a:rPr lang="en-US" err="1"/>
+              <a:t>hohe</a:t>
+            </a:r>
+            <a:r>
+              <a:rPr lang="en-US"/>
+              <a:t> </a:t>
+            </a:r>
+            <a:r>
+              <a:rPr lang="en-US" err="1"/>
+              <a:t>Qualität</a:t>
+            </a:r>
+            <a:r>
+              <a:rPr lang="en-US"/>
+              <a:t> und </a:t>
+            </a:r>
+            <a:r>
+              <a:rPr lang="en-US" err="1"/>
+              <a:t>Präzision</a:t>
+            </a:r>
+            <a:r>
+              <a:rPr lang="en-US"/>
+              <a:t>.</a:t>
+            </a:r>
+          </a:p>
+          <a:p>
+            <a:br>
+              <a:rPr lang="en-US"/>
+            </a:br>
+            <a:endParaRPr lang="en-US"/>
+          </a:p>
+          <a:p>
+            <a:r>
+              <a:rPr lang="en-US" b="1"/>
+              <a:t>Externe Logistik</a:t>
+            </a:r>
+          </a:p>
+          <a:p>
+            <a:r>
+              <a:rPr lang="en-US"/>
+              <a:t>Die externe Logistik </a:t>
+            </a:r>
+            <a:r>
+              <a:rPr lang="en-US" err="1"/>
+              <a:t>übernimmt</a:t>
+            </a:r>
+            <a:r>
+              <a:rPr lang="en-US"/>
+              <a:t> </a:t>
+            </a:r>
+            <a:r>
+              <a:rPr lang="en-US" err="1"/>
+              <a:t>anschließend</a:t>
+            </a:r>
+            <a:r>
+              <a:rPr lang="en-US"/>
+              <a:t> den </a:t>
+            </a:r>
+            <a:r>
+              <a:rPr lang="en-US" err="1"/>
+              <a:t>weltweiten</a:t>
+            </a:r>
+            <a:r>
+              <a:rPr lang="en-US"/>
+              <a:t> Transport und die Auslieferung der </a:t>
+            </a:r>
+            <a:r>
+              <a:rPr lang="en-US" err="1"/>
+              <a:t>Fahrzeuge</a:t>
+            </a:r>
+            <a:r>
+              <a:rPr lang="en-US"/>
+              <a:t>.</a:t>
+            </a:r>
+          </a:p>
+          <a:p>
+            <a:br>
+              <a:rPr lang="en-US"/>
+            </a:br>
+            <a:endParaRPr lang="en-US"/>
+          </a:p>
+          <a:p>
+            <a:r>
+              <a:rPr lang="en-US" b="1"/>
+              <a:t>Marketing &amp; </a:t>
+            </a:r>
+            <a:r>
+              <a:rPr lang="en-US" b="1" err="1"/>
+              <a:t>Verkauf</a:t>
+            </a:r>
+            <a:endParaRPr lang="en-US" b="1"/>
+          </a:p>
+          <a:p>
+            <a:r>
+              <a:rPr lang="en-US" err="1"/>
+              <a:t>Im</a:t>
+            </a:r>
+            <a:r>
+              <a:rPr lang="en-US"/>
+              <a:t> Marketing </a:t>
+            </a:r>
+            <a:r>
+              <a:rPr lang="en-US" err="1"/>
+              <a:t>konzentriert</a:t>
+            </a:r>
+            <a:r>
+              <a:rPr lang="en-US"/>
+              <a:t> </a:t>
+            </a:r>
+            <a:r>
+              <a:rPr lang="en-US" err="1"/>
+              <a:t>sich</a:t>
+            </a:r>
+            <a:r>
+              <a:rPr lang="en-US"/>
+              <a:t> Porsche stark auf </a:t>
+            </a:r>
+            <a:r>
+              <a:rPr lang="en-US" err="1"/>
+              <a:t>Exklusivität</a:t>
+            </a:r>
+            <a:r>
+              <a:rPr lang="en-US"/>
+              <a:t>, </a:t>
+            </a:r>
+            <a:r>
+              <a:rPr lang="en-US" err="1"/>
+              <a:t>Emotionen</a:t>
+            </a:r>
+            <a:r>
+              <a:rPr lang="en-US"/>
+              <a:t> und </a:t>
+            </a:r>
+            <a:r>
+              <a:rPr lang="en-US" err="1"/>
+              <a:t>Markenimage</a:t>
+            </a:r>
+            <a:r>
+              <a:rPr lang="en-US"/>
+              <a:t>.</a:t>
+            </a:r>
+          </a:p>
+          <a:p>
+            <a:r>
+              <a:rPr lang="en-US" err="1"/>
+              <a:t>Dadurch</a:t>
+            </a:r>
+            <a:r>
+              <a:rPr lang="en-US"/>
+              <a:t> </a:t>
+            </a:r>
+            <a:r>
+              <a:rPr lang="en-US" err="1"/>
+              <a:t>kann</a:t>
+            </a:r>
+            <a:r>
+              <a:rPr lang="en-US"/>
+              <a:t> das </a:t>
+            </a:r>
+            <a:r>
+              <a:rPr lang="en-US" err="1"/>
+              <a:t>Unternehmen</a:t>
+            </a:r>
+            <a:r>
+              <a:rPr lang="en-US"/>
+              <a:t> </a:t>
+            </a:r>
+            <a:r>
+              <a:rPr lang="en-US" err="1"/>
+              <a:t>hohe</a:t>
+            </a:r>
+            <a:r>
+              <a:rPr lang="en-US"/>
+              <a:t> </a:t>
+            </a:r>
+            <a:r>
+              <a:rPr lang="en-US" err="1"/>
+              <a:t>Preise</a:t>
+            </a:r>
+            <a:r>
+              <a:rPr lang="en-US"/>
+              <a:t> und </a:t>
+            </a:r>
+            <a:r>
+              <a:rPr lang="en-US" err="1"/>
+              <a:t>starke</a:t>
+            </a:r>
+            <a:r>
+              <a:rPr lang="en-US"/>
+              <a:t> </a:t>
+            </a:r>
+            <a:r>
+              <a:rPr lang="en-US" err="1"/>
+              <a:t>Kundenbindungen</a:t>
+            </a:r>
+            <a:r>
+              <a:rPr lang="en-US"/>
+              <a:t> </a:t>
+            </a:r>
+            <a:r>
+              <a:rPr lang="en-US" err="1"/>
+              <a:t>erzielen</a:t>
+            </a:r>
+            <a:r>
+              <a:rPr lang="en-US"/>
+              <a:t>.</a:t>
+            </a:r>
+          </a:p>
+          <a:p>
+            <a:br>
+              <a:rPr lang="en-US"/>
+            </a:br>
+            <a:endParaRPr lang="en-US"/>
+          </a:p>
+          <a:p>
+            <a:r>
+              <a:rPr lang="en-US" b="1"/>
+              <a:t>Service</a:t>
+            </a:r>
+          </a:p>
+          <a:p>
+            <a:r>
+              <a:rPr lang="en-US"/>
+              <a:t>Der </a:t>
+            </a:r>
+            <a:r>
+              <a:rPr lang="en-US" err="1"/>
+              <a:t>Servicebereich</a:t>
+            </a:r>
+            <a:r>
+              <a:rPr lang="en-US"/>
+              <a:t> </a:t>
+            </a:r>
+            <a:r>
+              <a:rPr lang="en-US" err="1"/>
+              <a:t>umfasst</a:t>
+            </a:r>
+            <a:r>
+              <a:rPr lang="en-US"/>
+              <a:t> </a:t>
+            </a:r>
+            <a:r>
+              <a:rPr lang="en-US" err="1"/>
+              <a:t>Wartung</a:t>
+            </a:r>
+            <a:r>
+              <a:rPr lang="en-US"/>
+              <a:t>, </a:t>
+            </a:r>
+            <a:r>
+              <a:rPr lang="en-US" err="1"/>
+              <a:t>Ersatzteile</a:t>
+            </a:r>
+            <a:r>
+              <a:rPr lang="en-US"/>
+              <a:t>, </a:t>
+            </a:r>
+            <a:r>
+              <a:rPr lang="en-US" err="1"/>
+              <a:t>Finanzierung</a:t>
+            </a:r>
+            <a:r>
+              <a:rPr lang="en-US"/>
+              <a:t> und </a:t>
+            </a:r>
+            <a:r>
+              <a:rPr lang="en-US" err="1"/>
+              <a:t>digitale</a:t>
+            </a:r>
+            <a:r>
+              <a:rPr lang="en-US"/>
+              <a:t> </a:t>
+            </a:r>
+            <a:r>
+              <a:rPr lang="en-US" err="1"/>
+              <a:t>Dienste</a:t>
+            </a:r>
+            <a:r>
+              <a:rPr lang="en-US"/>
+              <a:t> </a:t>
+            </a:r>
+            <a:r>
+              <a:rPr lang="en-US" err="1"/>
+              <a:t>wie</a:t>
+            </a:r>
+            <a:r>
+              <a:rPr lang="en-US"/>
+              <a:t> Porsche Connect.</a:t>
+            </a:r>
+          </a:p>
+          <a:p>
+            <a:r>
+              <a:rPr lang="en-US"/>
+              <a:t>Auch </a:t>
+            </a:r>
+            <a:r>
+              <a:rPr lang="en-US" err="1"/>
+              <a:t>nach</a:t>
+            </a:r>
+            <a:r>
+              <a:rPr lang="en-US"/>
+              <a:t> dem </a:t>
+            </a:r>
+            <a:r>
+              <a:rPr lang="en-US" err="1"/>
+              <a:t>Fahrzeugverkauf</a:t>
+            </a:r>
+            <a:r>
+              <a:rPr lang="en-US"/>
+              <a:t> </a:t>
+            </a:r>
+            <a:r>
+              <a:rPr lang="en-US" err="1"/>
+              <a:t>erzielt</a:t>
+            </a:r>
+            <a:r>
+              <a:rPr lang="en-US"/>
+              <a:t> Porsche </a:t>
+            </a:r>
+            <a:r>
+              <a:rPr lang="en-US" err="1"/>
+              <a:t>dadurch</a:t>
+            </a:r>
+            <a:r>
+              <a:rPr lang="en-US"/>
+              <a:t> </a:t>
+            </a:r>
+            <a:r>
+              <a:rPr lang="en-US" err="1"/>
+              <a:t>langfristige</a:t>
+            </a:r>
+            <a:r>
+              <a:rPr lang="en-US"/>
+              <a:t> </a:t>
+            </a:r>
+            <a:r>
+              <a:rPr lang="en-US" err="1"/>
+              <a:t>Umsätze</a:t>
+            </a:r>
+            <a:r>
+              <a:rPr lang="en-US"/>
+              <a:t>.</a:t>
+            </a:r>
+          </a:p>
+        </p:txBody>
+      </p:sp>
+      <p:sp>
+        <p:nvSpPr>
+          <p:cNvPr id="4" name="Slide Number Placeholder 3"/>
+          <p:cNvSpPr>
+            <a:spLocks noGrp="1"/>
+          </p:cNvSpPr>
+          <p:nvPr>
+            <p:ph type="sldNum" sz="quarter" idx="5"/>
+          </p:nvPr>
+        </p:nvSpPr>
+        <p:spPr/>
+        <p:txBody>
+          <a:bodyPr/>
+          <a:lstStyle/>
+          <a:p>
+            <a:fld id="{5E9947BD-AC0A-9B48-9B0D-917726E2A866}" type="slidenum">
+              <a:rPr lang="de-DE" smtClean="0"/>
+              <a:t>13</a:t>
+            </a:fld>
+            <a:endParaRPr lang="de-DE"/>
+          </a:p>
+        </p:txBody>
+      </p:sp>
+    </p:spTree>
+    <p:extLst>
+      <p:ext uri="{BB962C8B-B14F-4D97-AF65-F5344CB8AC3E}">
+        <p14:creationId xmlns:p14="http://schemas.microsoft.com/office/powerpoint/2010/main" val="2906553177"/>
       </p:ext>
     </p:extLst>
   </p:cSld>
@@ -12956,7 +14846,7 @@
           <a:p>
             <a:fld id="{E6908975-BF0A-7B44-92E1-7652B37C0A9E}" type="datetime1">
               <a:rPr lang="de-DE" smtClean="0"/>
-              <a:t>04.05.26</a:t>
+              <a:t>17.05.26</a:t>
             </a:fld>
             <a:endParaRPr lang="de-DE"/>
           </a:p>
@@ -14302,7 +16192,7 @@
           <a:p>
             <a:fld id="{6286E517-27FD-724C-8CDA-B9CAAB2FEEB1}" type="datetime1">
               <a:rPr lang="de-DE" smtClean="0"/>
-              <a:t>04.05.26</a:t>
+              <a:t>17.05.26</a:t>
             </a:fld>
             <a:endParaRPr lang="de-DE"/>
           </a:p>
@@ -14808,7 +16698,7 @@
           <a:p>
             <a:fld id="{3DE585E0-48C3-384E-8A1D-33D83C2E17AD}" type="datetime1">
               <a:rPr lang="de-DE" smtClean="0"/>
-              <a:t>04.05.26</a:t>
+              <a:t>17.05.26</a:t>
             </a:fld>
             <a:endParaRPr lang="de-DE"/>
           </a:p>
@@ -15209,7 +17099,7 @@
           <a:p>
             <a:fld id="{E6908975-BF0A-7B44-92E1-7652B37C0A9E}" type="datetime1">
               <a:rPr lang="de-DE" smtClean="0"/>
-              <a:t>04.05.26</a:t>
+              <a:t>17.05.26</a:t>
             </a:fld>
             <a:endParaRPr lang="de-DE"/>
           </a:p>
@@ -15446,7 +17336,7 @@
           <a:p>
             <a:fld id="{810CFF0C-8F05-5B4F-958E-2D3A512F7134}" type="datetime1">
               <a:rPr lang="de-DE" smtClean="0"/>
-              <a:t>04.05.26</a:t>
+              <a:t>17.05.26</a:t>
             </a:fld>
             <a:endParaRPr lang="de-DE"/>
           </a:p>
@@ -15754,7 +17644,7 @@
           <a:p>
             <a:fld id="{86960C1A-4C90-2E4A-9FBA-73421506A88D}" type="datetime1">
               <a:rPr lang="de-DE" smtClean="0"/>
-              <a:t>04.05.26</a:t>
+              <a:t>17.05.26</a:t>
             </a:fld>
             <a:endParaRPr lang="de-DE"/>
           </a:p>
@@ -16046,7 +17936,7 @@
           <a:p>
             <a:fld id="{E56552F4-6F3B-C44D-96F7-080D1640F3B7}" type="datetime1">
               <a:rPr lang="de-DE" smtClean="0"/>
-              <a:t>04.05.26</a:t>
+              <a:t>17.05.26</a:t>
             </a:fld>
             <a:endParaRPr lang="de-DE"/>
           </a:p>
@@ -16413,7 +18303,7 @@
           <a:p>
             <a:fld id="{9DA0C23B-F603-0B4F-8B62-A0A61135CA55}" type="datetime1">
               <a:rPr lang="de-DE" smtClean="0"/>
-              <a:t>04.05.26</a:t>
+              <a:t>17.05.26</a:t>
             </a:fld>
             <a:endParaRPr lang="de-DE"/>
           </a:p>
@@ -16656,7 +18546,7 @@
           <a:p>
             <a:fld id="{320A95A9-9D15-B549-B5F5-E03914B12E3F}" type="datetime1">
               <a:rPr lang="de-DE" smtClean="0"/>
-              <a:t>04.05.26</a:t>
+              <a:t>17.05.26</a:t>
             </a:fld>
             <a:endParaRPr lang="de-DE"/>
           </a:p>
@@ -16962,7 +18852,7 @@
           <a:p>
             <a:fld id="{A4CD6FDA-B7F6-5047-985E-6A0FD4BA3661}" type="datetime1">
               <a:rPr lang="de-DE" smtClean="0"/>
-              <a:t>04.05.26</a:t>
+              <a:t>17.05.26</a:t>
             </a:fld>
             <a:endParaRPr lang="de-DE"/>
           </a:p>
@@ -17198,7 +19088,7 @@
           <a:p>
             <a:fld id="{5E347064-846C-BF4C-B56D-8A607B294559}" type="datetime1">
               <a:rPr lang="de-DE" smtClean="0"/>
-              <a:t>04.05.26</a:t>
+              <a:t>17.05.26</a:t>
             </a:fld>
             <a:endParaRPr lang="de-DE"/>
           </a:p>
@@ -17580,7 +19470,7 @@
             <a:fld id="{0D9EADE5-CDD8-3D49-9A13-7C2A5618FC37}" type="datetime1">
               <a:rPr lang="de-DE" smtClean="0"/>
               <a:pPr/>
-              <a:t>04.05.26</a:t>
+              <a:t>17.05.26</a:t>
             </a:fld>
             <a:endParaRPr lang="de-DE"/>
           </a:p>
@@ -18099,7 +19989,7 @@
           <a:p>
             <a:fld id="{73FCC4D2-B752-7842-BC54-29CA897C7A0B}" type="datetime1">
               <a:rPr lang="en-US" noProof="1" smtClean="0"/>
-              <a:t>5/4/26</a:t>
+              <a:t>5/17/26</a:t>
             </a:fld>
             <a:endParaRPr lang="de-DE" noProof="1"/>
           </a:p>
@@ -18254,7 +20144,7 @@
           <a:p>
             <a:fld id="{0CDD18DE-507E-E942-97F5-EF162F1CDDF4}" type="datetime1">
               <a:rPr lang="en-US" noProof="1" smtClean="0"/>
-              <a:t>5/4/26</a:t>
+              <a:t>5/17/26</a:t>
             </a:fld>
             <a:endParaRPr lang="de-DE" noProof="1"/>
           </a:p>
@@ -18455,6 +20345,5106 @@
 </file>
 
 <file path=ppt/slides/slide11.xml><?xml version="1.0" encoding="utf-8"?>
+<p:sld xmlns:a="http://schemas.openxmlformats.org/drawingml/2006/main" xmlns:r="http://schemas.openxmlformats.org/officeDocument/2006/relationships" xmlns:p="http://schemas.openxmlformats.org/presentationml/2006/main">
+  <p:cSld>
+    <p:spTree>
+      <p:nvGrpSpPr>
+        <p:cNvPr id="1" name="">
+          <a:extLst>
+            <a:ext uri="{FF2B5EF4-FFF2-40B4-BE49-F238E27FC236}">
+              <a16:creationId xmlns:a16="http://schemas.microsoft.com/office/drawing/2014/main" id="{660F18A8-0685-C5B2-DBC8-52A351753CBD}"/>
+            </a:ext>
+          </a:extLst>
+        </p:cNvPr>
+        <p:cNvGrpSpPr/>
+        <p:nvPr/>
+      </p:nvGrpSpPr>
+      <p:grpSpPr>
+        <a:xfrm>
+          <a:off x="0" y="0"/>
+          <a:ext cx="0" cy="0"/>
+          <a:chOff x="0" y="0"/>
+          <a:chExt cx="0" cy="0"/>
+        </a:xfrm>
+      </p:grpSpPr>
+      <p:sp>
+        <p:nvSpPr>
+          <p:cNvPr id="6" name="Titel 5">
+            <a:extLst>
+              <a:ext uri="{FF2B5EF4-FFF2-40B4-BE49-F238E27FC236}">
+                <a16:creationId xmlns:a16="http://schemas.microsoft.com/office/drawing/2014/main" id="{B13D5B62-C238-19C9-461E-04D978489123}"/>
+              </a:ext>
+            </a:extLst>
+          </p:cNvPr>
+          <p:cNvSpPr>
+            <a:spLocks noGrp="1"/>
+          </p:cNvSpPr>
+          <p:nvPr>
+            <p:ph type="title"/>
+          </p:nvPr>
+        </p:nvSpPr>
+        <p:spPr/>
+        <p:txBody>
+          <a:bodyPr>
+            <a:normAutofit/>
+          </a:bodyPr>
+          <a:lstStyle/>
+          <a:p>
+            <a:pPr algn="just"/>
+            <a:r>
+              <a:rPr lang="de-DE" b="1" noProof="1"/>
+              <a:t>Analyse der 5 Wettbewerbskräfte</a:t>
+            </a:r>
+          </a:p>
+        </p:txBody>
+      </p:sp>
+      <p:sp>
+        <p:nvSpPr>
+          <p:cNvPr id="7" name="Inhaltsplatzhalter 6">
+            <a:extLst>
+              <a:ext uri="{FF2B5EF4-FFF2-40B4-BE49-F238E27FC236}">
+                <a16:creationId xmlns:a16="http://schemas.microsoft.com/office/drawing/2014/main" id="{44F9BC6E-E26B-0AC3-010F-AF7D9A8B61D4}"/>
+              </a:ext>
+            </a:extLst>
+          </p:cNvPr>
+          <p:cNvSpPr>
+            <a:spLocks noGrp="1"/>
+          </p:cNvSpPr>
+          <p:nvPr>
+            <p:ph idx="1"/>
+          </p:nvPr>
+        </p:nvSpPr>
+        <p:spPr>
+          <a:xfrm>
+            <a:off x="543910" y="1558189"/>
+            <a:ext cx="11104177" cy="4573586"/>
+          </a:xfrm>
+        </p:spPr>
+        <p:txBody>
+          <a:bodyPr/>
+          <a:lstStyle/>
+          <a:p>
+            <a:pPr lvl="0"/>
+            <a:r>
+              <a:rPr lang="de-DE"/>
+              <a:t>Wettbewerb im Premium- &amp; Luxussegment ist hoch und spielt auf 2 Fronten</a:t>
+            </a:r>
+            <a:endParaRPr lang="en-US"/>
+          </a:p>
+          <a:p>
+            <a:pPr lvl="1"/>
+            <a:r>
+              <a:rPr lang="de-DE"/>
+              <a:t>Die Traditionelle Front: Verbrenner, Performance, Emotionen</a:t>
+            </a:r>
+            <a:endParaRPr lang="en-US"/>
+          </a:p>
+          <a:p>
+            <a:pPr lvl="1"/>
+            <a:r>
+              <a:rPr lang="de-DE"/>
+              <a:t>Die Neue Front E-Autos: Unterhaltskosten, Umweltvorteile</a:t>
+            </a:r>
+            <a:endParaRPr lang="en-US"/>
+          </a:p>
+          <a:p>
+            <a:pPr lvl="0"/>
+            <a:r>
+              <a:rPr lang="de-DE"/>
+              <a:t>Bedrohung durch Ersatzprodukte niedrig</a:t>
+            </a:r>
+            <a:endParaRPr lang="en-US"/>
+          </a:p>
+          <a:p>
+            <a:pPr lvl="1"/>
+            <a:r>
+              <a:rPr lang="de-DE"/>
+              <a:t>Status vs Mobilität: Ginge es nur um Transport würde Porsche in den nächsten Jahren ersetzt werden</a:t>
+            </a:r>
+            <a:endParaRPr lang="en-US"/>
+          </a:p>
+          <a:p>
+            <a:pPr lvl="1"/>
+            <a:r>
+              <a:rPr lang="de-DE"/>
+              <a:t>Emotionale Bindung: Kauf nach Emotionen, Fahrspaß, Statussymbol</a:t>
+            </a:r>
+          </a:p>
+          <a:p>
+            <a:r>
+              <a:rPr lang="de-DE"/>
+              <a:t>Historisch: Gefahr von Markteintritten niedrig, durch hohen Kapitalbedarf &amp; komplexen Motorbau</a:t>
+            </a:r>
+            <a:endParaRPr lang="en-US"/>
+          </a:p>
+          <a:p>
+            <a:pPr lvl="1"/>
+            <a:r>
+              <a:rPr lang="de-DE"/>
+              <a:t>Elektromotor einfacher zu bauen, als komplexer Hochleistungsverbrenner</a:t>
+            </a:r>
+            <a:endParaRPr lang="en-US"/>
+          </a:p>
+          <a:p>
+            <a:pPr lvl="1"/>
+            <a:r>
+              <a:rPr lang="de-DE"/>
+              <a:t>Gewissen „Schutz“ durch Markenheritage</a:t>
+            </a:r>
+            <a:endParaRPr lang="en-US"/>
+          </a:p>
+          <a:p>
+            <a:pPr lvl="1"/>
+            <a:endParaRPr lang="en-US"/>
+          </a:p>
+          <a:p>
+            <a:pPr lvl="1"/>
+            <a:endParaRPr lang="de-DE" noProof="1"/>
+          </a:p>
+          <a:p>
+            <a:pPr marL="0" indent="0">
+              <a:buNone/>
+            </a:pPr>
+            <a:endParaRPr lang="de-DE" noProof="1"/>
+          </a:p>
+        </p:txBody>
+      </p:sp>
+      <p:sp>
+        <p:nvSpPr>
+          <p:cNvPr id="5" name="Datumsplatzhalter 4">
+            <a:extLst>
+              <a:ext uri="{FF2B5EF4-FFF2-40B4-BE49-F238E27FC236}">
+                <a16:creationId xmlns:a16="http://schemas.microsoft.com/office/drawing/2014/main" id="{9CB7D117-0FF1-3820-7CB2-B7145E4CB7FD}"/>
+              </a:ext>
+            </a:extLst>
+          </p:cNvPr>
+          <p:cNvSpPr>
+            <a:spLocks noGrp="1"/>
+          </p:cNvSpPr>
+          <p:nvPr>
+            <p:ph type="dt" sz="half" idx="14"/>
+          </p:nvPr>
+        </p:nvSpPr>
+        <p:spPr/>
+        <p:txBody>
+          <a:bodyPr/>
+          <a:lstStyle/>
+          <a:p>
+            <a:fld id="{078773AF-2259-0B42-AEF5-3C6C7EBEB81F}" type="datetime1">
+              <a:rPr lang="en-US" noProof="1" smtClean="0"/>
+              <a:t>5/17/26</a:t>
+            </a:fld>
+            <a:endParaRPr lang="de-DE" noProof="1"/>
+          </a:p>
+        </p:txBody>
+      </p:sp>
+      <p:sp>
+        <p:nvSpPr>
+          <p:cNvPr id="12" name="Foliennummernplatzhalter 11">
+            <a:extLst>
+              <a:ext uri="{FF2B5EF4-FFF2-40B4-BE49-F238E27FC236}">
+                <a16:creationId xmlns:a16="http://schemas.microsoft.com/office/drawing/2014/main" id="{4AB16D47-324E-DC63-6517-8D352554176F}"/>
+              </a:ext>
+            </a:extLst>
+          </p:cNvPr>
+          <p:cNvSpPr>
+            <a:spLocks noGrp="1"/>
+          </p:cNvSpPr>
+          <p:nvPr>
+            <p:ph type="sldNum" sz="quarter" idx="16"/>
+          </p:nvPr>
+        </p:nvSpPr>
+        <p:spPr/>
+        <p:txBody>
+          <a:bodyPr/>
+          <a:lstStyle/>
+          <a:p>
+            <a:fld id="{006C6BFE-10C3-7B49-A3EE-08AD7A863B95}" type="slidenum">
+              <a:rPr lang="de-DE" noProof="1" smtClean="0"/>
+              <a:pPr/>
+              <a:t>11</a:t>
+            </a:fld>
+            <a:endParaRPr lang="de-DE" noProof="1"/>
+          </a:p>
+        </p:txBody>
+      </p:sp>
+      <p:sp>
+        <p:nvSpPr>
+          <p:cNvPr id="3" name="Fußzeilenplatzhalter 4">
+            <a:extLst>
+              <a:ext uri="{FF2B5EF4-FFF2-40B4-BE49-F238E27FC236}">
+                <a16:creationId xmlns:a16="http://schemas.microsoft.com/office/drawing/2014/main" id="{E6EE1D55-9A31-94AC-5A8B-0357C7BBEE3C}"/>
+              </a:ext>
+            </a:extLst>
+          </p:cNvPr>
+          <p:cNvSpPr txBox="1">
+            <a:spLocks/>
+          </p:cNvSpPr>
+          <p:nvPr/>
+        </p:nvSpPr>
+        <p:spPr>
+          <a:xfrm>
+            <a:off x="6417733" y="6356239"/>
+            <a:ext cx="5291667" cy="365125"/>
+          </a:xfrm>
+          <a:prstGeom prst="rect">
+            <a:avLst/>
+          </a:prstGeom>
+        </p:spPr>
+        <p:txBody>
+          <a:bodyPr vert="horz" lIns="91440" tIns="45720" rIns="91440" bIns="45720" rtlCol="0" anchor="ctr">
+            <a:normAutofit/>
+          </a:bodyPr>
+          <a:lstStyle>
+            <a:defPPr>
+              <a:defRPr lang="de-DE"/>
+            </a:defPPr>
+            <a:lvl1pPr marL="0" algn="l" defTabSz="914400" rtl="0" eaLnBrk="1" latinLnBrk="0" hangingPunct="1">
+              <a:defRPr sz="1000" kern="1200">
+                <a:solidFill>
+                  <a:schemeClr val="bg2">
+                    <a:lumMod val="90000"/>
+                  </a:schemeClr>
+                </a:solidFill>
+                <a:latin typeface="Arial" panose="020B0604020202020204" pitchFamily="34" charset="0"/>
+                <a:ea typeface="+mn-ea"/>
+                <a:cs typeface="Arial" panose="020B0604020202020204" pitchFamily="34" charset="0"/>
+              </a:defRPr>
+            </a:lvl1pPr>
+            <a:lvl2pPr marL="457200" algn="l" defTabSz="914400" rtl="0" eaLnBrk="1" latinLnBrk="0" hangingPunct="1">
+              <a:defRPr sz="1800" kern="1200">
+                <a:solidFill>
+                  <a:schemeClr val="tx1"/>
+                </a:solidFill>
+                <a:latin typeface="+mn-lt"/>
+                <a:ea typeface="+mn-ea"/>
+                <a:cs typeface="+mn-cs"/>
+              </a:defRPr>
+            </a:lvl2pPr>
+            <a:lvl3pPr marL="914400" algn="l" defTabSz="914400" rtl="0" eaLnBrk="1" latinLnBrk="0" hangingPunct="1">
+              <a:defRPr sz="1800" kern="1200">
+                <a:solidFill>
+                  <a:schemeClr val="tx1"/>
+                </a:solidFill>
+                <a:latin typeface="+mn-lt"/>
+                <a:ea typeface="+mn-ea"/>
+                <a:cs typeface="+mn-cs"/>
+              </a:defRPr>
+            </a:lvl3pPr>
+            <a:lvl4pPr marL="1371600" algn="l" defTabSz="914400" rtl="0" eaLnBrk="1" latinLnBrk="0" hangingPunct="1">
+              <a:defRPr sz="1800" kern="1200">
+                <a:solidFill>
+                  <a:schemeClr val="tx1"/>
+                </a:solidFill>
+                <a:latin typeface="+mn-lt"/>
+                <a:ea typeface="+mn-ea"/>
+                <a:cs typeface="+mn-cs"/>
+              </a:defRPr>
+            </a:lvl4pPr>
+            <a:lvl5pPr marL="1828800" algn="l" defTabSz="914400" rtl="0" eaLnBrk="1" latinLnBrk="0" hangingPunct="1">
+              <a:defRPr sz="1800" kern="1200">
+                <a:solidFill>
+                  <a:schemeClr val="tx1"/>
+                </a:solidFill>
+                <a:latin typeface="+mn-lt"/>
+                <a:ea typeface="+mn-ea"/>
+                <a:cs typeface="+mn-cs"/>
+              </a:defRPr>
+            </a:lvl5pPr>
+            <a:lvl6pPr marL="2286000" algn="l" defTabSz="914400" rtl="0" eaLnBrk="1" latinLnBrk="0" hangingPunct="1">
+              <a:defRPr sz="1800" kern="1200">
+                <a:solidFill>
+                  <a:schemeClr val="tx1"/>
+                </a:solidFill>
+                <a:latin typeface="+mn-lt"/>
+                <a:ea typeface="+mn-ea"/>
+                <a:cs typeface="+mn-cs"/>
+              </a:defRPr>
+            </a:lvl6pPr>
+            <a:lvl7pPr marL="2743200" algn="l" defTabSz="914400" rtl="0" eaLnBrk="1" latinLnBrk="0" hangingPunct="1">
+              <a:defRPr sz="1800" kern="1200">
+                <a:solidFill>
+                  <a:schemeClr val="tx1"/>
+                </a:solidFill>
+                <a:latin typeface="+mn-lt"/>
+                <a:ea typeface="+mn-ea"/>
+                <a:cs typeface="+mn-cs"/>
+              </a:defRPr>
+            </a:lvl7pPr>
+            <a:lvl8pPr marL="3200400" algn="l" defTabSz="914400" rtl="0" eaLnBrk="1" latinLnBrk="0" hangingPunct="1">
+              <a:defRPr sz="1800" kern="1200">
+                <a:solidFill>
+                  <a:schemeClr val="tx1"/>
+                </a:solidFill>
+                <a:latin typeface="+mn-lt"/>
+                <a:ea typeface="+mn-ea"/>
+                <a:cs typeface="+mn-cs"/>
+              </a:defRPr>
+            </a:lvl8pPr>
+            <a:lvl9pPr marL="3657600" algn="l" defTabSz="914400" rtl="0" eaLnBrk="1" latinLnBrk="0" hangingPunct="1">
+              <a:defRPr sz="1800" kern="1200">
+                <a:solidFill>
+                  <a:schemeClr val="tx1"/>
+                </a:solidFill>
+                <a:latin typeface="+mn-lt"/>
+                <a:ea typeface="+mn-ea"/>
+                <a:cs typeface="+mn-cs"/>
+              </a:defRPr>
+            </a:lvl9pPr>
+          </a:lstStyle>
+          <a:p>
+            <a:pPr>
+              <a:defRPr/>
+            </a:pPr>
+            <a:r>
+              <a:rPr lang="de-DE" noProof="1">
+                <a:solidFill>
+                  <a:srgbClr val="C4B9C8"/>
+                </a:solidFill>
+                <a:latin typeface="Arial"/>
+                <a:ea typeface="Calibri"/>
+                <a:cs typeface="Arial"/>
+              </a:rPr>
+              <a:t>Technology Management</a:t>
+            </a:r>
+            <a:endParaRPr lang="de-DE" noProof="1">
+              <a:solidFill>
+                <a:schemeClr val="tx1">
+                  <a:lumMod val="75000"/>
+                  <a:lumOff val="25000"/>
+                </a:schemeClr>
+              </a:solidFill>
+              <a:latin typeface="Arial"/>
+              <a:ea typeface="Calibri"/>
+              <a:cs typeface="Arial"/>
+            </a:endParaRPr>
+          </a:p>
+        </p:txBody>
+      </p:sp>
+      <p:sp>
+        <p:nvSpPr>
+          <p:cNvPr id="8" name="TextBox 7">
+            <a:extLst>
+              <a:ext uri="{FF2B5EF4-FFF2-40B4-BE49-F238E27FC236}">
+                <a16:creationId xmlns:a16="http://schemas.microsoft.com/office/drawing/2014/main" id="{9AB94197-2690-174E-0061-A4B485D38ED5}"/>
+              </a:ext>
+            </a:extLst>
+          </p:cNvPr>
+          <p:cNvSpPr txBox="1"/>
+          <p:nvPr/>
+        </p:nvSpPr>
+        <p:spPr>
+          <a:xfrm>
+            <a:off x="2115879" y="2753833"/>
+            <a:ext cx="184731" cy="369332"/>
+          </a:xfrm>
+          <a:prstGeom prst="rect">
+            <a:avLst/>
+          </a:prstGeom>
+          <a:noFill/>
+        </p:spPr>
+        <p:txBody>
+          <a:bodyPr wrap="none" rtlCol="0">
+            <a:spAutoFit/>
+          </a:bodyPr>
+          <a:lstStyle/>
+          <a:p>
+            <a:endParaRPr lang="en-US"/>
+          </a:p>
+        </p:txBody>
+      </p:sp>
+    </p:spTree>
+    <p:extLst>
+      <p:ext uri="{BB962C8B-B14F-4D97-AF65-F5344CB8AC3E}">
+        <p14:creationId xmlns:p14="http://schemas.microsoft.com/office/powerpoint/2010/main" val="1488310009"/>
+      </p:ext>
+    </p:extLst>
+  </p:cSld>
+  <p:clrMapOvr>
+    <a:masterClrMapping/>
+  </p:clrMapOvr>
+</p:sld>
+</file>
+
+<file path=ppt/slides/slide12.xml><?xml version="1.0" encoding="utf-8"?>
+<p:sld xmlns:a="http://schemas.openxmlformats.org/drawingml/2006/main" xmlns:r="http://schemas.openxmlformats.org/officeDocument/2006/relationships" xmlns:p="http://schemas.openxmlformats.org/presentationml/2006/main">
+  <p:cSld>
+    <p:spTree>
+      <p:nvGrpSpPr>
+        <p:cNvPr id="1" name="">
+          <a:extLst>
+            <a:ext uri="{FF2B5EF4-FFF2-40B4-BE49-F238E27FC236}">
+              <a16:creationId xmlns:a16="http://schemas.microsoft.com/office/drawing/2014/main" id="{B28190DC-D4A9-0B5D-80D7-1AD2755C50E2}"/>
+            </a:ext>
+          </a:extLst>
+        </p:cNvPr>
+        <p:cNvGrpSpPr/>
+        <p:nvPr/>
+      </p:nvGrpSpPr>
+      <p:grpSpPr>
+        <a:xfrm>
+          <a:off x="0" y="0"/>
+          <a:ext cx="0" cy="0"/>
+          <a:chOff x="0" y="0"/>
+          <a:chExt cx="0" cy="0"/>
+        </a:xfrm>
+      </p:grpSpPr>
+      <p:sp>
+        <p:nvSpPr>
+          <p:cNvPr id="6" name="Titel 5">
+            <a:extLst>
+              <a:ext uri="{FF2B5EF4-FFF2-40B4-BE49-F238E27FC236}">
+                <a16:creationId xmlns:a16="http://schemas.microsoft.com/office/drawing/2014/main" id="{EAEFAA50-3367-67ED-AE64-461954D0A0FB}"/>
+              </a:ext>
+            </a:extLst>
+          </p:cNvPr>
+          <p:cNvSpPr>
+            <a:spLocks noGrp="1"/>
+          </p:cNvSpPr>
+          <p:nvPr>
+            <p:ph type="title"/>
+          </p:nvPr>
+        </p:nvSpPr>
+        <p:spPr/>
+        <p:txBody>
+          <a:bodyPr>
+            <a:normAutofit/>
+          </a:bodyPr>
+          <a:lstStyle/>
+          <a:p>
+            <a:pPr algn="just"/>
+            <a:r>
+              <a:rPr lang="de-DE" b="1" noProof="1"/>
+              <a:t>Analyse der 5 Wettbewerbskräfte</a:t>
+            </a:r>
+          </a:p>
+        </p:txBody>
+      </p:sp>
+      <p:sp>
+        <p:nvSpPr>
+          <p:cNvPr id="7" name="Inhaltsplatzhalter 6">
+            <a:extLst>
+              <a:ext uri="{FF2B5EF4-FFF2-40B4-BE49-F238E27FC236}">
+                <a16:creationId xmlns:a16="http://schemas.microsoft.com/office/drawing/2014/main" id="{AFD7FF6D-2889-35B3-8AD8-8A1FF47287F6}"/>
+              </a:ext>
+            </a:extLst>
+          </p:cNvPr>
+          <p:cNvSpPr>
+            <a:spLocks noGrp="1"/>
+          </p:cNvSpPr>
+          <p:nvPr>
+            <p:ph idx="1"/>
+          </p:nvPr>
+        </p:nvSpPr>
+        <p:spPr>
+          <a:xfrm>
+            <a:off x="543910" y="1558189"/>
+            <a:ext cx="11104177" cy="4573586"/>
+          </a:xfrm>
+        </p:spPr>
+        <p:txBody>
+          <a:bodyPr/>
+          <a:lstStyle/>
+          <a:p>
+            <a:r>
+              <a:rPr lang="de-DE" noProof="1"/>
+              <a:t>Macht von Abnehmern </a:t>
+            </a:r>
+          </a:p>
+          <a:p>
+            <a:pPr lvl="1"/>
+            <a:r>
+              <a:rPr lang="de-DE" noProof="1"/>
+              <a:t>Porsche Kunden wenig preissensibel, höhere Preise stärken die Exklusivität</a:t>
+            </a:r>
+          </a:p>
+          <a:p>
+            <a:pPr lvl="1"/>
+            <a:r>
+              <a:rPr lang="de-DE" noProof="1"/>
+              <a:t>Individualisierung: Traumautokonfiguration (Porsche Exclusive Manufaktur) bindet Kunden stärker an die Marke</a:t>
+            </a:r>
+          </a:p>
+          <a:p>
+            <a:r>
+              <a:rPr lang="de-DE" noProof="1"/>
+              <a:t>Macht von Lieferanten</a:t>
+            </a:r>
+          </a:p>
+          <a:p>
+            <a:pPr lvl="1"/>
+            <a:r>
+              <a:rPr lang="de-DE" noProof="1"/>
+              <a:t>Klassische Autoteile hat Porsche enorme Verhandlungsmacht als Teil des VW-Konzerns</a:t>
+            </a:r>
+          </a:p>
+          <a:p>
+            <a:pPr lvl="1"/>
+            <a:r>
+              <a:rPr lang="de-DE" noProof="1"/>
+              <a:t>Bei Software &amp; Batterien für Elektromobilität, erhöhte Abhängigkeit von Hightech-Lieferanten</a:t>
+            </a:r>
+          </a:p>
+          <a:p>
+            <a:pPr lvl="1"/>
+            <a:endParaRPr lang="de-DE" noProof="1"/>
+          </a:p>
+          <a:p>
+            <a:pPr marL="0" indent="0">
+              <a:buNone/>
+            </a:pPr>
+            <a:endParaRPr lang="de-DE" noProof="1"/>
+          </a:p>
+        </p:txBody>
+      </p:sp>
+      <p:sp>
+        <p:nvSpPr>
+          <p:cNvPr id="5" name="Datumsplatzhalter 4">
+            <a:extLst>
+              <a:ext uri="{FF2B5EF4-FFF2-40B4-BE49-F238E27FC236}">
+                <a16:creationId xmlns:a16="http://schemas.microsoft.com/office/drawing/2014/main" id="{106EFA28-8AB4-BB18-1FA6-1822FFA30E90}"/>
+              </a:ext>
+            </a:extLst>
+          </p:cNvPr>
+          <p:cNvSpPr>
+            <a:spLocks noGrp="1"/>
+          </p:cNvSpPr>
+          <p:nvPr>
+            <p:ph type="dt" sz="half" idx="14"/>
+          </p:nvPr>
+        </p:nvSpPr>
+        <p:spPr/>
+        <p:txBody>
+          <a:bodyPr/>
+          <a:lstStyle/>
+          <a:p>
+            <a:fld id="{078773AF-2259-0B42-AEF5-3C6C7EBEB81F}" type="datetime1">
+              <a:rPr lang="en-US" noProof="1" smtClean="0"/>
+              <a:pPr/>
+              <a:t>5/17/26</a:t>
+            </a:fld>
+            <a:r>
+              <a:rPr lang="en-US" noProof="1"/>
+              <a:t>        </a:t>
+            </a:r>
+            <a:endParaRPr lang="de-DE" noProof="1"/>
+          </a:p>
+        </p:txBody>
+      </p:sp>
+      <p:sp>
+        <p:nvSpPr>
+          <p:cNvPr id="12" name="Foliennummernplatzhalter 11">
+            <a:extLst>
+              <a:ext uri="{FF2B5EF4-FFF2-40B4-BE49-F238E27FC236}">
+                <a16:creationId xmlns:a16="http://schemas.microsoft.com/office/drawing/2014/main" id="{97950812-5881-D2E5-E170-298A3CB6B556}"/>
+              </a:ext>
+            </a:extLst>
+          </p:cNvPr>
+          <p:cNvSpPr>
+            <a:spLocks noGrp="1"/>
+          </p:cNvSpPr>
+          <p:nvPr>
+            <p:ph type="sldNum" sz="quarter" idx="16"/>
+          </p:nvPr>
+        </p:nvSpPr>
+        <p:spPr/>
+        <p:txBody>
+          <a:bodyPr/>
+          <a:lstStyle/>
+          <a:p>
+            <a:fld id="{006C6BFE-10C3-7B49-A3EE-08AD7A863B95}" type="slidenum">
+              <a:rPr lang="de-DE" noProof="1" smtClean="0"/>
+              <a:pPr/>
+              <a:t>12</a:t>
+            </a:fld>
+            <a:endParaRPr lang="de-DE" noProof="1"/>
+          </a:p>
+        </p:txBody>
+      </p:sp>
+      <p:sp>
+        <p:nvSpPr>
+          <p:cNvPr id="3" name="Fußzeilenplatzhalter 4">
+            <a:extLst>
+              <a:ext uri="{FF2B5EF4-FFF2-40B4-BE49-F238E27FC236}">
+                <a16:creationId xmlns:a16="http://schemas.microsoft.com/office/drawing/2014/main" id="{D8A12B1C-5A45-E91B-9CE3-65EC4C160769}"/>
+              </a:ext>
+            </a:extLst>
+          </p:cNvPr>
+          <p:cNvSpPr txBox="1">
+            <a:spLocks/>
+          </p:cNvSpPr>
+          <p:nvPr/>
+        </p:nvSpPr>
+        <p:spPr>
+          <a:xfrm>
+            <a:off x="6417733" y="6356239"/>
+            <a:ext cx="5291667" cy="365125"/>
+          </a:xfrm>
+          <a:prstGeom prst="rect">
+            <a:avLst/>
+          </a:prstGeom>
+        </p:spPr>
+        <p:txBody>
+          <a:bodyPr vert="horz" lIns="91440" tIns="45720" rIns="91440" bIns="45720" rtlCol="0" anchor="ctr">
+            <a:normAutofit/>
+          </a:bodyPr>
+          <a:lstStyle>
+            <a:defPPr>
+              <a:defRPr lang="de-DE"/>
+            </a:defPPr>
+            <a:lvl1pPr marL="0" algn="l" defTabSz="914400" rtl="0" eaLnBrk="1" latinLnBrk="0" hangingPunct="1">
+              <a:defRPr sz="1000" kern="1200">
+                <a:solidFill>
+                  <a:schemeClr val="bg2">
+                    <a:lumMod val="90000"/>
+                  </a:schemeClr>
+                </a:solidFill>
+                <a:latin typeface="Arial" panose="020B0604020202020204" pitchFamily="34" charset="0"/>
+                <a:ea typeface="+mn-ea"/>
+                <a:cs typeface="Arial" panose="020B0604020202020204" pitchFamily="34" charset="0"/>
+              </a:defRPr>
+            </a:lvl1pPr>
+            <a:lvl2pPr marL="457200" algn="l" defTabSz="914400" rtl="0" eaLnBrk="1" latinLnBrk="0" hangingPunct="1">
+              <a:defRPr sz="1800" kern="1200">
+                <a:solidFill>
+                  <a:schemeClr val="tx1"/>
+                </a:solidFill>
+                <a:latin typeface="+mn-lt"/>
+                <a:ea typeface="+mn-ea"/>
+                <a:cs typeface="+mn-cs"/>
+              </a:defRPr>
+            </a:lvl2pPr>
+            <a:lvl3pPr marL="914400" algn="l" defTabSz="914400" rtl="0" eaLnBrk="1" latinLnBrk="0" hangingPunct="1">
+              <a:defRPr sz="1800" kern="1200">
+                <a:solidFill>
+                  <a:schemeClr val="tx1"/>
+                </a:solidFill>
+                <a:latin typeface="+mn-lt"/>
+                <a:ea typeface="+mn-ea"/>
+                <a:cs typeface="+mn-cs"/>
+              </a:defRPr>
+            </a:lvl3pPr>
+            <a:lvl4pPr marL="1371600" algn="l" defTabSz="914400" rtl="0" eaLnBrk="1" latinLnBrk="0" hangingPunct="1">
+              <a:defRPr sz="1800" kern="1200">
+                <a:solidFill>
+                  <a:schemeClr val="tx1"/>
+                </a:solidFill>
+                <a:latin typeface="+mn-lt"/>
+                <a:ea typeface="+mn-ea"/>
+                <a:cs typeface="+mn-cs"/>
+              </a:defRPr>
+            </a:lvl4pPr>
+            <a:lvl5pPr marL="1828800" algn="l" defTabSz="914400" rtl="0" eaLnBrk="1" latinLnBrk="0" hangingPunct="1">
+              <a:defRPr sz="1800" kern="1200">
+                <a:solidFill>
+                  <a:schemeClr val="tx1"/>
+                </a:solidFill>
+                <a:latin typeface="+mn-lt"/>
+                <a:ea typeface="+mn-ea"/>
+                <a:cs typeface="+mn-cs"/>
+              </a:defRPr>
+            </a:lvl5pPr>
+            <a:lvl6pPr marL="2286000" algn="l" defTabSz="914400" rtl="0" eaLnBrk="1" latinLnBrk="0" hangingPunct="1">
+              <a:defRPr sz="1800" kern="1200">
+                <a:solidFill>
+                  <a:schemeClr val="tx1"/>
+                </a:solidFill>
+                <a:latin typeface="+mn-lt"/>
+                <a:ea typeface="+mn-ea"/>
+                <a:cs typeface="+mn-cs"/>
+              </a:defRPr>
+            </a:lvl6pPr>
+            <a:lvl7pPr marL="2743200" algn="l" defTabSz="914400" rtl="0" eaLnBrk="1" latinLnBrk="0" hangingPunct="1">
+              <a:defRPr sz="1800" kern="1200">
+                <a:solidFill>
+                  <a:schemeClr val="tx1"/>
+                </a:solidFill>
+                <a:latin typeface="+mn-lt"/>
+                <a:ea typeface="+mn-ea"/>
+                <a:cs typeface="+mn-cs"/>
+              </a:defRPr>
+            </a:lvl7pPr>
+            <a:lvl8pPr marL="3200400" algn="l" defTabSz="914400" rtl="0" eaLnBrk="1" latinLnBrk="0" hangingPunct="1">
+              <a:defRPr sz="1800" kern="1200">
+                <a:solidFill>
+                  <a:schemeClr val="tx1"/>
+                </a:solidFill>
+                <a:latin typeface="+mn-lt"/>
+                <a:ea typeface="+mn-ea"/>
+                <a:cs typeface="+mn-cs"/>
+              </a:defRPr>
+            </a:lvl8pPr>
+            <a:lvl9pPr marL="3657600" algn="l" defTabSz="914400" rtl="0" eaLnBrk="1" latinLnBrk="0" hangingPunct="1">
+              <a:defRPr sz="1800" kern="1200">
+                <a:solidFill>
+                  <a:schemeClr val="tx1"/>
+                </a:solidFill>
+                <a:latin typeface="+mn-lt"/>
+                <a:ea typeface="+mn-ea"/>
+                <a:cs typeface="+mn-cs"/>
+              </a:defRPr>
+            </a:lvl9pPr>
+          </a:lstStyle>
+          <a:p>
+            <a:pPr>
+              <a:defRPr/>
+            </a:pPr>
+            <a:endParaRPr lang="de-DE" noProof="1">
+              <a:solidFill>
+                <a:schemeClr val="tx1">
+                  <a:lumMod val="75000"/>
+                  <a:lumOff val="25000"/>
+                </a:schemeClr>
+              </a:solidFill>
+              <a:latin typeface="Arial"/>
+              <a:ea typeface="Calibri"/>
+              <a:cs typeface="Arial"/>
+            </a:endParaRPr>
+          </a:p>
+        </p:txBody>
+      </p:sp>
+      <p:sp>
+        <p:nvSpPr>
+          <p:cNvPr id="8" name="TextBox 7">
+            <a:extLst>
+              <a:ext uri="{FF2B5EF4-FFF2-40B4-BE49-F238E27FC236}">
+                <a16:creationId xmlns:a16="http://schemas.microsoft.com/office/drawing/2014/main" id="{03108858-32EC-C2CC-C3CE-83694228F929}"/>
+              </a:ext>
+            </a:extLst>
+          </p:cNvPr>
+          <p:cNvSpPr txBox="1"/>
+          <p:nvPr/>
+        </p:nvSpPr>
+        <p:spPr>
+          <a:xfrm>
+            <a:off x="2115879" y="2753833"/>
+            <a:ext cx="184731" cy="369332"/>
+          </a:xfrm>
+          <a:prstGeom prst="rect">
+            <a:avLst/>
+          </a:prstGeom>
+          <a:noFill/>
+        </p:spPr>
+        <p:txBody>
+          <a:bodyPr wrap="none" rtlCol="0">
+            <a:spAutoFit/>
+          </a:bodyPr>
+          <a:lstStyle/>
+          <a:p>
+            <a:endParaRPr lang="en-US"/>
+          </a:p>
+        </p:txBody>
+      </p:sp>
+      <p:sp>
+        <p:nvSpPr>
+          <p:cNvPr id="4" name="Fußzeilenplatzhalter 4">
+            <a:extLst>
+              <a:ext uri="{FF2B5EF4-FFF2-40B4-BE49-F238E27FC236}">
+                <a16:creationId xmlns:a16="http://schemas.microsoft.com/office/drawing/2014/main" id="{DA52F8DF-F0A8-A0CA-72ED-F8EBCEC08D5D}"/>
+              </a:ext>
+            </a:extLst>
+          </p:cNvPr>
+          <p:cNvSpPr txBox="1">
+            <a:spLocks/>
+          </p:cNvSpPr>
+          <p:nvPr/>
+        </p:nvSpPr>
+        <p:spPr>
+          <a:xfrm>
+            <a:off x="6570133" y="6508639"/>
+            <a:ext cx="5291667" cy="365125"/>
+          </a:xfrm>
+          <a:prstGeom prst="rect">
+            <a:avLst/>
+          </a:prstGeom>
+        </p:spPr>
+        <p:txBody>
+          <a:bodyPr vert="horz" lIns="91440" tIns="45720" rIns="91440" bIns="45720" rtlCol="0" anchor="ctr">
+            <a:normAutofit/>
+          </a:bodyPr>
+          <a:lstStyle>
+            <a:defPPr>
+              <a:defRPr lang="de-DE"/>
+            </a:defPPr>
+            <a:lvl1pPr marL="0" algn="l" defTabSz="914400" rtl="0" eaLnBrk="1" latinLnBrk="0" hangingPunct="1">
+              <a:defRPr sz="1000" kern="1200">
+                <a:solidFill>
+                  <a:schemeClr val="bg2">
+                    <a:lumMod val="90000"/>
+                  </a:schemeClr>
+                </a:solidFill>
+                <a:latin typeface="Arial" panose="020B0604020202020204" pitchFamily="34" charset="0"/>
+                <a:ea typeface="+mn-ea"/>
+                <a:cs typeface="Arial" panose="020B0604020202020204" pitchFamily="34" charset="0"/>
+              </a:defRPr>
+            </a:lvl1pPr>
+            <a:lvl2pPr marL="457200" algn="l" defTabSz="914400" rtl="0" eaLnBrk="1" latinLnBrk="0" hangingPunct="1">
+              <a:defRPr sz="1800" kern="1200">
+                <a:solidFill>
+                  <a:schemeClr val="tx1"/>
+                </a:solidFill>
+                <a:latin typeface="+mn-lt"/>
+                <a:ea typeface="+mn-ea"/>
+                <a:cs typeface="+mn-cs"/>
+              </a:defRPr>
+            </a:lvl2pPr>
+            <a:lvl3pPr marL="914400" algn="l" defTabSz="914400" rtl="0" eaLnBrk="1" latinLnBrk="0" hangingPunct="1">
+              <a:defRPr sz="1800" kern="1200">
+                <a:solidFill>
+                  <a:schemeClr val="tx1"/>
+                </a:solidFill>
+                <a:latin typeface="+mn-lt"/>
+                <a:ea typeface="+mn-ea"/>
+                <a:cs typeface="+mn-cs"/>
+              </a:defRPr>
+            </a:lvl3pPr>
+            <a:lvl4pPr marL="1371600" algn="l" defTabSz="914400" rtl="0" eaLnBrk="1" latinLnBrk="0" hangingPunct="1">
+              <a:defRPr sz="1800" kern="1200">
+                <a:solidFill>
+                  <a:schemeClr val="tx1"/>
+                </a:solidFill>
+                <a:latin typeface="+mn-lt"/>
+                <a:ea typeface="+mn-ea"/>
+                <a:cs typeface="+mn-cs"/>
+              </a:defRPr>
+            </a:lvl4pPr>
+            <a:lvl5pPr marL="1828800" algn="l" defTabSz="914400" rtl="0" eaLnBrk="1" latinLnBrk="0" hangingPunct="1">
+              <a:defRPr sz="1800" kern="1200">
+                <a:solidFill>
+                  <a:schemeClr val="tx1"/>
+                </a:solidFill>
+                <a:latin typeface="+mn-lt"/>
+                <a:ea typeface="+mn-ea"/>
+                <a:cs typeface="+mn-cs"/>
+              </a:defRPr>
+            </a:lvl5pPr>
+            <a:lvl6pPr marL="2286000" algn="l" defTabSz="914400" rtl="0" eaLnBrk="1" latinLnBrk="0" hangingPunct="1">
+              <a:defRPr sz="1800" kern="1200">
+                <a:solidFill>
+                  <a:schemeClr val="tx1"/>
+                </a:solidFill>
+                <a:latin typeface="+mn-lt"/>
+                <a:ea typeface="+mn-ea"/>
+                <a:cs typeface="+mn-cs"/>
+              </a:defRPr>
+            </a:lvl6pPr>
+            <a:lvl7pPr marL="2743200" algn="l" defTabSz="914400" rtl="0" eaLnBrk="1" latinLnBrk="0" hangingPunct="1">
+              <a:defRPr sz="1800" kern="1200">
+                <a:solidFill>
+                  <a:schemeClr val="tx1"/>
+                </a:solidFill>
+                <a:latin typeface="+mn-lt"/>
+                <a:ea typeface="+mn-ea"/>
+                <a:cs typeface="+mn-cs"/>
+              </a:defRPr>
+            </a:lvl7pPr>
+            <a:lvl8pPr marL="3200400" algn="l" defTabSz="914400" rtl="0" eaLnBrk="1" latinLnBrk="0" hangingPunct="1">
+              <a:defRPr sz="1800" kern="1200">
+                <a:solidFill>
+                  <a:schemeClr val="tx1"/>
+                </a:solidFill>
+                <a:latin typeface="+mn-lt"/>
+                <a:ea typeface="+mn-ea"/>
+                <a:cs typeface="+mn-cs"/>
+              </a:defRPr>
+            </a:lvl8pPr>
+            <a:lvl9pPr marL="3657600" algn="l" defTabSz="914400" rtl="0" eaLnBrk="1" latinLnBrk="0" hangingPunct="1">
+              <a:defRPr sz="1800" kern="1200">
+                <a:solidFill>
+                  <a:schemeClr val="tx1"/>
+                </a:solidFill>
+                <a:latin typeface="+mn-lt"/>
+                <a:ea typeface="+mn-ea"/>
+                <a:cs typeface="+mn-cs"/>
+              </a:defRPr>
+            </a:lvl9pPr>
+          </a:lstStyle>
+          <a:p>
+            <a:pPr>
+              <a:defRPr/>
+            </a:pPr>
+            <a:r>
+              <a:rPr lang="de-DE" noProof="1">
+                <a:solidFill>
+                  <a:srgbClr val="C4B9C8"/>
+                </a:solidFill>
+                <a:latin typeface="Arial"/>
+                <a:ea typeface="Calibri"/>
+                <a:cs typeface="Arial"/>
+              </a:rPr>
+              <a:t>Technology Management</a:t>
+            </a:r>
+            <a:endParaRPr lang="de-DE" noProof="1">
+              <a:solidFill>
+                <a:schemeClr val="tx1">
+                  <a:lumMod val="75000"/>
+                  <a:lumOff val="25000"/>
+                </a:schemeClr>
+              </a:solidFill>
+              <a:latin typeface="Arial"/>
+              <a:ea typeface="Calibri"/>
+              <a:cs typeface="Arial"/>
+            </a:endParaRPr>
+          </a:p>
+        </p:txBody>
+      </p:sp>
+    </p:spTree>
+    <p:extLst>
+      <p:ext uri="{BB962C8B-B14F-4D97-AF65-F5344CB8AC3E}">
+        <p14:creationId xmlns:p14="http://schemas.microsoft.com/office/powerpoint/2010/main" val="2893377371"/>
+      </p:ext>
+    </p:extLst>
+  </p:cSld>
+  <p:clrMapOvr>
+    <a:masterClrMapping/>
+  </p:clrMapOvr>
+</p:sld>
+</file>
+
+<file path=ppt/slides/slide13.xml><?xml version="1.0" encoding="utf-8"?>
+<p:sld xmlns:a="http://schemas.openxmlformats.org/drawingml/2006/main" xmlns:r="http://schemas.openxmlformats.org/officeDocument/2006/relationships" xmlns:p="http://schemas.openxmlformats.org/presentationml/2006/main">
+  <p:cSld>
+    <p:spTree>
+      <p:nvGrpSpPr>
+        <p:cNvPr id="1" name="">
+          <a:extLst>
+            <a:ext uri="{FF2B5EF4-FFF2-40B4-BE49-F238E27FC236}">
+              <a16:creationId xmlns:a16="http://schemas.microsoft.com/office/drawing/2014/main" id="{0C988B41-7150-DE04-CB68-A904861AF703}"/>
+            </a:ext>
+          </a:extLst>
+        </p:cNvPr>
+        <p:cNvGrpSpPr/>
+        <p:nvPr/>
+      </p:nvGrpSpPr>
+      <p:grpSpPr>
+        <a:xfrm>
+          <a:off x="0" y="0"/>
+          <a:ext cx="0" cy="0"/>
+          <a:chOff x="0" y="0"/>
+          <a:chExt cx="0" cy="0"/>
+        </a:xfrm>
+      </p:grpSpPr>
+      <p:sp>
+        <p:nvSpPr>
+          <p:cNvPr id="6" name="Titel 5">
+            <a:extLst>
+              <a:ext uri="{FF2B5EF4-FFF2-40B4-BE49-F238E27FC236}">
+                <a16:creationId xmlns:a16="http://schemas.microsoft.com/office/drawing/2014/main" id="{B98A9A04-99E1-478E-4679-5F55615A0E8C}"/>
+              </a:ext>
+            </a:extLst>
+          </p:cNvPr>
+          <p:cNvSpPr>
+            <a:spLocks noGrp="1"/>
+          </p:cNvSpPr>
+          <p:nvPr>
+            <p:ph type="title"/>
+          </p:nvPr>
+        </p:nvSpPr>
+        <p:spPr/>
+        <p:txBody>
+          <a:bodyPr>
+            <a:normAutofit/>
+          </a:bodyPr>
+          <a:lstStyle/>
+          <a:p>
+            <a:pPr algn="just"/>
+            <a:r>
+              <a:rPr lang="de-DE" b="1" noProof="1"/>
+              <a:t>Wertschöpfungskette</a:t>
+            </a:r>
+          </a:p>
+        </p:txBody>
+      </p:sp>
+      <p:sp>
+        <p:nvSpPr>
+          <p:cNvPr id="5" name="Datumsplatzhalter 4">
+            <a:extLst>
+              <a:ext uri="{FF2B5EF4-FFF2-40B4-BE49-F238E27FC236}">
+                <a16:creationId xmlns:a16="http://schemas.microsoft.com/office/drawing/2014/main" id="{AABFC8BB-70BB-1C90-1300-76FCFB30BF40}"/>
+              </a:ext>
+            </a:extLst>
+          </p:cNvPr>
+          <p:cNvSpPr>
+            <a:spLocks noGrp="1"/>
+          </p:cNvSpPr>
+          <p:nvPr>
+            <p:ph type="dt" sz="half" idx="14"/>
+          </p:nvPr>
+        </p:nvSpPr>
+        <p:spPr/>
+        <p:txBody>
+          <a:bodyPr/>
+          <a:lstStyle/>
+          <a:p>
+            <a:fld id="{078773AF-2259-0B42-AEF5-3C6C7EBEB81F}" type="datetime1">
+              <a:rPr lang="en-US" noProof="1" smtClean="0"/>
+              <a:t>5/17/26</a:t>
+            </a:fld>
+            <a:endParaRPr lang="de-DE" noProof="1"/>
+          </a:p>
+        </p:txBody>
+      </p:sp>
+      <p:sp>
+        <p:nvSpPr>
+          <p:cNvPr id="12" name="Foliennummernplatzhalter 11">
+            <a:extLst>
+              <a:ext uri="{FF2B5EF4-FFF2-40B4-BE49-F238E27FC236}">
+                <a16:creationId xmlns:a16="http://schemas.microsoft.com/office/drawing/2014/main" id="{EE2B4F3C-1861-7782-D835-06BF324B8DC2}"/>
+              </a:ext>
+            </a:extLst>
+          </p:cNvPr>
+          <p:cNvSpPr>
+            <a:spLocks noGrp="1"/>
+          </p:cNvSpPr>
+          <p:nvPr>
+            <p:ph type="sldNum" sz="quarter" idx="16"/>
+          </p:nvPr>
+        </p:nvSpPr>
+        <p:spPr/>
+        <p:txBody>
+          <a:bodyPr/>
+          <a:lstStyle/>
+          <a:p>
+            <a:fld id="{006C6BFE-10C3-7B49-A3EE-08AD7A863B95}" type="slidenum">
+              <a:rPr lang="de-DE" noProof="1" smtClean="0"/>
+              <a:pPr/>
+              <a:t>13</a:t>
+            </a:fld>
+            <a:endParaRPr lang="de-DE" noProof="1"/>
+          </a:p>
+        </p:txBody>
+      </p:sp>
+      <p:sp>
+        <p:nvSpPr>
+          <p:cNvPr id="2" name="TextBox 1">
+            <a:extLst>
+              <a:ext uri="{FF2B5EF4-FFF2-40B4-BE49-F238E27FC236}">
+                <a16:creationId xmlns:a16="http://schemas.microsoft.com/office/drawing/2014/main" id="{F6D3EBDC-544C-1FE4-E3CA-03BE30D5FAAF}"/>
+              </a:ext>
+            </a:extLst>
+          </p:cNvPr>
+          <p:cNvSpPr txBox="1"/>
+          <p:nvPr/>
+        </p:nvSpPr>
+        <p:spPr>
+          <a:xfrm>
+            <a:off x="5710239" y="6356350"/>
+            <a:ext cx="495300" cy="369332"/>
+          </a:xfrm>
+          <a:prstGeom prst="rect">
+            <a:avLst/>
+          </a:prstGeom>
+          <a:noFill/>
+        </p:spPr>
+        <p:txBody>
+          <a:bodyPr wrap="square" rtlCol="0">
+            <a:spAutoFit/>
+          </a:bodyPr>
+          <a:lstStyle/>
+          <a:p>
+            <a:r>
+              <a:rPr lang="de-DE" noProof="1"/>
+              <a:t>[1]</a:t>
+            </a:r>
+          </a:p>
+        </p:txBody>
+      </p:sp>
+      <p:sp>
+        <p:nvSpPr>
+          <p:cNvPr id="4" name="Footer Placeholder 3">
+            <a:extLst>
+              <a:ext uri="{FF2B5EF4-FFF2-40B4-BE49-F238E27FC236}">
+                <a16:creationId xmlns:a16="http://schemas.microsoft.com/office/drawing/2014/main" id="{795DAE24-B850-C0E8-8AFB-65826F067488}"/>
+              </a:ext>
+            </a:extLst>
+          </p:cNvPr>
+          <p:cNvSpPr>
+            <a:spLocks noGrp="1"/>
+          </p:cNvSpPr>
+          <p:nvPr>
+            <p:ph type="ftr" sz="quarter" idx="15"/>
+          </p:nvPr>
+        </p:nvSpPr>
+        <p:spPr/>
+        <p:txBody>
+          <a:bodyPr/>
+          <a:lstStyle/>
+          <a:p>
+            <a:r>
+              <a:rPr lang="de-DE"/>
+              <a:t>Technology Management</a:t>
+            </a:r>
+          </a:p>
+        </p:txBody>
+      </p:sp>
+      <p:sp>
+        <p:nvSpPr>
+          <p:cNvPr id="70" name="Rectangle 69">
+            <a:extLst>
+              <a:ext uri="{FF2B5EF4-FFF2-40B4-BE49-F238E27FC236}">
+                <a16:creationId xmlns:a16="http://schemas.microsoft.com/office/drawing/2014/main" id="{01C0ED4F-C305-4B1E-6B98-C60B28464BD7}"/>
+              </a:ext>
+            </a:extLst>
+          </p:cNvPr>
+          <p:cNvSpPr>
+            <a:spLocks/>
+          </p:cNvSpPr>
+          <p:nvPr/>
+        </p:nvSpPr>
+        <p:spPr>
+          <a:xfrm>
+            <a:off x="554949" y="1465943"/>
+            <a:ext cx="9701922" cy="566057"/>
+          </a:xfrm>
+          <a:custGeom>
+            <a:avLst/>
+            <a:gdLst>
+              <a:gd name="csX0" fmla="*/ 0 w 9509760"/>
+              <a:gd name="csY0" fmla="*/ 0 h 566057"/>
+              <a:gd name="csX1" fmla="*/ 9509760 w 9509760"/>
+              <a:gd name="csY1" fmla="*/ 0 h 566057"/>
+              <a:gd name="csX2" fmla="*/ 9509760 w 9509760"/>
+              <a:gd name="csY2" fmla="*/ 566057 h 566057"/>
+              <a:gd name="csX3" fmla="*/ 0 w 9509760"/>
+              <a:gd name="csY3" fmla="*/ 566057 h 566057"/>
+              <a:gd name="csX4" fmla="*/ 0 w 9509760"/>
+              <a:gd name="csY4" fmla="*/ 0 h 566057"/>
+              <a:gd name="csX0" fmla="*/ 0 w 9712960"/>
+              <a:gd name="csY0" fmla="*/ 0 h 566057"/>
+              <a:gd name="csX1" fmla="*/ 9509760 w 9712960"/>
+              <a:gd name="csY1" fmla="*/ 0 h 566057"/>
+              <a:gd name="csX2" fmla="*/ 9712960 w 9712960"/>
+              <a:gd name="csY2" fmla="*/ 566057 h 566057"/>
+              <a:gd name="csX3" fmla="*/ 0 w 9712960"/>
+              <a:gd name="csY3" fmla="*/ 566057 h 566057"/>
+              <a:gd name="csX4" fmla="*/ 0 w 9712960"/>
+              <a:gd name="csY4" fmla="*/ 0 h 566057"/>
+            </a:gdLst>
+            <a:ahLst/>
+            <a:cxnLst>
+              <a:cxn ang="0">
+                <a:pos x="csX0" y="csY0"/>
+              </a:cxn>
+              <a:cxn ang="0">
+                <a:pos x="csX1" y="csY1"/>
+              </a:cxn>
+              <a:cxn ang="0">
+                <a:pos x="csX2" y="csY2"/>
+              </a:cxn>
+              <a:cxn ang="0">
+                <a:pos x="csX3" y="csY3"/>
+              </a:cxn>
+              <a:cxn ang="0">
+                <a:pos x="csX4" y="csY4"/>
+              </a:cxn>
+            </a:cxnLst>
+            <a:rect l="l" t="t" r="r" b="b"/>
+            <a:pathLst>
+              <a:path w="9712960" h="566057">
+                <a:moveTo>
+                  <a:pt x="0" y="0"/>
+                </a:moveTo>
+                <a:lnTo>
+                  <a:pt x="9509760" y="0"/>
+                </a:lnTo>
+                <a:lnTo>
+                  <a:pt x="9712960" y="566057"/>
+                </a:lnTo>
+                <a:lnTo>
+                  <a:pt x="0" y="566057"/>
+                </a:lnTo>
+                <a:lnTo>
+                  <a:pt x="0" y="0"/>
+                </a:lnTo>
+                <a:close/>
+              </a:path>
+            </a:pathLst>
+          </a:custGeom>
+          <a:solidFill>
+            <a:srgbClr val="C00000"/>
+          </a:solidFill>
+          <a:ln w="9231" cap="flat">
+            <a:noFill/>
+            <a:prstDash val="solid"/>
+            <a:miter/>
+          </a:ln>
+          <a:effectLst>
+            <a:outerShdw blurRad="50800" dist="50800" dir="7680000" algn="ctr" rotWithShape="0">
+              <a:srgbClr val="C00000">
+                <a:alpha val="43000"/>
+              </a:srgbClr>
+            </a:outerShdw>
+          </a:effectLst>
+        </p:spPr>
+        <p:txBody>
+          <a:bodyPr rtlCol="0" anchor="ctr"/>
+          <a:lstStyle/>
+          <a:p>
+            <a:pPr algn="ctr"/>
+            <a:r>
+              <a:rPr lang="en-US" sz="1600" b="1" err="1">
+                <a:solidFill>
+                  <a:schemeClr val="bg1"/>
+                </a:solidFill>
+              </a:rPr>
+              <a:t>Unternehmens</a:t>
+            </a:r>
+            <a:r>
+              <a:rPr lang="en-US" sz="1600" b="1">
+                <a:solidFill>
+                  <a:schemeClr val="bg1"/>
+                </a:solidFill>
+              </a:rPr>
+              <a:t> </a:t>
+            </a:r>
+            <a:r>
+              <a:rPr lang="en-US" sz="1600" b="1" err="1">
+                <a:solidFill>
+                  <a:schemeClr val="bg1"/>
+                </a:solidFill>
+              </a:rPr>
+              <a:t>Infrastruktur</a:t>
+            </a:r>
+            <a:endParaRPr lang="en-US" sz="1600" b="1">
+              <a:solidFill>
+                <a:schemeClr val="bg1"/>
+              </a:solidFill>
+            </a:endParaRPr>
+          </a:p>
+          <a:p>
+            <a:pPr algn="ctr"/>
+            <a:r>
+              <a:rPr lang="en-US" sz="1600" b="1">
+                <a:solidFill>
+                  <a:schemeClr val="bg1"/>
+                </a:solidFill>
+              </a:rPr>
+              <a:t>Management, </a:t>
+            </a:r>
+            <a:r>
+              <a:rPr lang="en-US" sz="1600" b="1" err="1">
+                <a:solidFill>
+                  <a:schemeClr val="bg1"/>
+                </a:solidFill>
+              </a:rPr>
+              <a:t>Strategie</a:t>
+            </a:r>
+            <a:r>
+              <a:rPr lang="en-US" sz="1600" b="1">
+                <a:solidFill>
+                  <a:schemeClr val="bg1"/>
+                </a:solidFill>
+              </a:rPr>
+              <a:t>, </a:t>
+            </a:r>
+            <a:r>
+              <a:rPr lang="en-US" sz="1600" b="1" err="1">
+                <a:solidFill>
+                  <a:schemeClr val="bg1"/>
+                </a:solidFill>
+              </a:rPr>
+              <a:t>Finanzen</a:t>
+            </a:r>
+            <a:r>
+              <a:rPr lang="en-US" sz="1600" b="1">
+                <a:solidFill>
+                  <a:schemeClr val="bg1"/>
+                </a:solidFill>
+              </a:rPr>
+              <a:t> und </a:t>
+            </a:r>
+            <a:r>
+              <a:rPr lang="en-US" sz="1600" b="1" err="1">
+                <a:solidFill>
+                  <a:schemeClr val="bg1"/>
+                </a:solidFill>
+              </a:rPr>
+              <a:t>Qualitätsmanagement</a:t>
+            </a:r>
+            <a:endParaRPr lang="en-US" sz="1600" b="1">
+              <a:solidFill>
+                <a:schemeClr val="bg1"/>
+              </a:solidFill>
+            </a:endParaRPr>
+          </a:p>
+        </p:txBody>
+      </p:sp>
+      <p:sp>
+        <p:nvSpPr>
+          <p:cNvPr id="72" name="Chevron 71">
+            <a:extLst>
+              <a:ext uri="{FF2B5EF4-FFF2-40B4-BE49-F238E27FC236}">
+                <a16:creationId xmlns:a16="http://schemas.microsoft.com/office/drawing/2014/main" id="{7287437B-DEED-9ED4-A90F-D52D2AC5ACE5}"/>
+              </a:ext>
+            </a:extLst>
+          </p:cNvPr>
+          <p:cNvSpPr/>
+          <p:nvPr/>
+        </p:nvSpPr>
+        <p:spPr>
+          <a:xfrm>
+            <a:off x="10256871" y="1434872"/>
+            <a:ext cx="1807403" cy="4921478"/>
+          </a:xfrm>
+          <a:custGeom>
+            <a:avLst/>
+            <a:gdLst>
+              <a:gd name="csX0" fmla="*/ 0 w 1807403"/>
+              <a:gd name="csY0" fmla="*/ 0 h 4921478"/>
+              <a:gd name="csX1" fmla="*/ 903702 w 1807403"/>
+              <a:gd name="csY1" fmla="*/ 0 h 4921478"/>
+              <a:gd name="csX2" fmla="*/ 1807403 w 1807403"/>
+              <a:gd name="csY2" fmla="*/ 2460739 h 4921478"/>
+              <a:gd name="csX3" fmla="*/ 903702 w 1807403"/>
+              <a:gd name="csY3" fmla="*/ 4921478 h 4921478"/>
+              <a:gd name="csX4" fmla="*/ 0 w 1807403"/>
+              <a:gd name="csY4" fmla="*/ 4921478 h 4921478"/>
+              <a:gd name="csX5" fmla="*/ 903702 w 1807403"/>
+              <a:gd name="csY5" fmla="*/ 2460739 h 4921478"/>
+              <a:gd name="csX6" fmla="*/ 0 w 1807403"/>
+              <a:gd name="csY6" fmla="*/ 0 h 4921478"/>
+              <a:gd name="csX0" fmla="*/ 0 w 1807403"/>
+              <a:gd name="csY0" fmla="*/ 0 h 4921478"/>
+              <a:gd name="csX1" fmla="*/ 903702 w 1807403"/>
+              <a:gd name="csY1" fmla="*/ 0 h 4921478"/>
+              <a:gd name="csX2" fmla="*/ 1807403 w 1807403"/>
+              <a:gd name="csY2" fmla="*/ 2460739 h 4921478"/>
+              <a:gd name="csX3" fmla="*/ 903702 w 1807403"/>
+              <a:gd name="csY3" fmla="*/ 4921478 h 4921478"/>
+              <a:gd name="csX4" fmla="*/ 319315 w 1807403"/>
+              <a:gd name="csY4" fmla="*/ 4921478 h 4921478"/>
+              <a:gd name="csX5" fmla="*/ 903702 w 1807403"/>
+              <a:gd name="csY5" fmla="*/ 2460739 h 4921478"/>
+              <a:gd name="csX6" fmla="*/ 0 w 1807403"/>
+              <a:gd name="csY6" fmla="*/ 0 h 4921478"/>
+            </a:gdLst>
+            <a:ahLst/>
+            <a:cxnLst>
+              <a:cxn ang="0">
+                <a:pos x="csX0" y="csY0"/>
+              </a:cxn>
+              <a:cxn ang="0">
+                <a:pos x="csX1" y="csY1"/>
+              </a:cxn>
+              <a:cxn ang="0">
+                <a:pos x="csX2" y="csY2"/>
+              </a:cxn>
+              <a:cxn ang="0">
+                <a:pos x="csX3" y="csY3"/>
+              </a:cxn>
+              <a:cxn ang="0">
+                <a:pos x="csX4" y="csY4"/>
+              </a:cxn>
+              <a:cxn ang="0">
+                <a:pos x="csX5" y="csY5"/>
+              </a:cxn>
+              <a:cxn ang="0">
+                <a:pos x="csX6" y="csY6"/>
+              </a:cxn>
+            </a:cxnLst>
+            <a:rect l="l" t="t" r="r" b="b"/>
+            <a:pathLst>
+              <a:path w="1807403" h="4921478">
+                <a:moveTo>
+                  <a:pt x="0" y="0"/>
+                </a:moveTo>
+                <a:lnTo>
+                  <a:pt x="903702" y="0"/>
+                </a:lnTo>
+                <a:lnTo>
+                  <a:pt x="1807403" y="2460739"/>
+                </a:lnTo>
+                <a:lnTo>
+                  <a:pt x="903702" y="4921478"/>
+                </a:lnTo>
+                <a:lnTo>
+                  <a:pt x="319315" y="4921478"/>
+                </a:lnTo>
+                <a:lnTo>
+                  <a:pt x="903702" y="2460739"/>
+                </a:lnTo>
+                <a:lnTo>
+                  <a:pt x="0" y="0"/>
+                </a:lnTo>
+                <a:close/>
+              </a:path>
+            </a:pathLst>
+          </a:custGeom>
+          <a:solidFill>
+            <a:schemeClr val="bg1"/>
+          </a:solidFill>
+          <a:ln w="57150" cap="flat">
+            <a:noFill/>
+            <a:prstDash val="solid"/>
+            <a:miter/>
+          </a:ln>
+          <a:effectLst>
+            <a:outerShdw blurRad="50800" dir="5400000" algn="ctr" rotWithShape="0">
+              <a:srgbClr val="C00000"/>
+            </a:outerShdw>
+          </a:effectLst>
+        </p:spPr>
+        <p:txBody>
+          <a:bodyPr rtlCol="0" anchor="ctr"/>
+          <a:lstStyle/>
+          <a:p>
+            <a:pPr algn="ctr"/>
+            <a:r>
+              <a:rPr lang="en-US" sz="1600" b="1">
+                <a:solidFill>
+                  <a:sysClr val="windowText" lastClr="000000"/>
+                </a:solidFill>
+              </a:rPr>
+              <a:t>                  Marge</a:t>
+            </a:r>
+          </a:p>
+        </p:txBody>
+      </p:sp>
+      <p:sp>
+        <p:nvSpPr>
+          <p:cNvPr id="74" name="Rectangle 73">
+            <a:extLst>
+              <a:ext uri="{FF2B5EF4-FFF2-40B4-BE49-F238E27FC236}">
+                <a16:creationId xmlns:a16="http://schemas.microsoft.com/office/drawing/2014/main" id="{82169984-62CB-A5CD-54BB-E5EF2FD4DBF5}"/>
+              </a:ext>
+            </a:extLst>
+          </p:cNvPr>
+          <p:cNvSpPr/>
+          <p:nvPr/>
+        </p:nvSpPr>
+        <p:spPr>
+          <a:xfrm>
+            <a:off x="549917" y="2063071"/>
+            <a:ext cx="9881126" cy="566057"/>
+          </a:xfrm>
+          <a:custGeom>
+            <a:avLst/>
+            <a:gdLst>
+              <a:gd name="csX0" fmla="*/ 0 w 9712960"/>
+              <a:gd name="csY0" fmla="*/ 0 h 566057"/>
+              <a:gd name="csX1" fmla="*/ 9712960 w 9712960"/>
+              <a:gd name="csY1" fmla="*/ 0 h 566057"/>
+              <a:gd name="csX2" fmla="*/ 9712960 w 9712960"/>
+              <a:gd name="csY2" fmla="*/ 566057 h 566057"/>
+              <a:gd name="csX3" fmla="*/ 0 w 9712960"/>
+              <a:gd name="csY3" fmla="*/ 566057 h 566057"/>
+              <a:gd name="csX4" fmla="*/ 0 w 9712960"/>
+              <a:gd name="csY4" fmla="*/ 0 h 566057"/>
+              <a:gd name="csX0" fmla="*/ 0 w 9887132"/>
+              <a:gd name="csY0" fmla="*/ 0 h 566057"/>
+              <a:gd name="csX1" fmla="*/ 9712960 w 9887132"/>
+              <a:gd name="csY1" fmla="*/ 0 h 566057"/>
+              <a:gd name="csX2" fmla="*/ 9887132 w 9887132"/>
+              <a:gd name="csY2" fmla="*/ 566057 h 566057"/>
+              <a:gd name="csX3" fmla="*/ 0 w 9887132"/>
+              <a:gd name="csY3" fmla="*/ 566057 h 566057"/>
+              <a:gd name="csX4" fmla="*/ 0 w 9887132"/>
+              <a:gd name="csY4" fmla="*/ 0 h 566057"/>
+            </a:gdLst>
+            <a:ahLst/>
+            <a:cxnLst>
+              <a:cxn ang="0">
+                <a:pos x="csX0" y="csY0"/>
+              </a:cxn>
+              <a:cxn ang="0">
+                <a:pos x="csX1" y="csY1"/>
+              </a:cxn>
+              <a:cxn ang="0">
+                <a:pos x="csX2" y="csY2"/>
+              </a:cxn>
+              <a:cxn ang="0">
+                <a:pos x="csX3" y="csY3"/>
+              </a:cxn>
+              <a:cxn ang="0">
+                <a:pos x="csX4" y="csY4"/>
+              </a:cxn>
+            </a:cxnLst>
+            <a:rect l="l" t="t" r="r" b="b"/>
+            <a:pathLst>
+              <a:path w="9887132" h="566057">
+                <a:moveTo>
+                  <a:pt x="0" y="0"/>
+                </a:moveTo>
+                <a:lnTo>
+                  <a:pt x="9712960" y="0"/>
+                </a:lnTo>
+                <a:lnTo>
+                  <a:pt x="9887132" y="566057"/>
+                </a:lnTo>
+                <a:lnTo>
+                  <a:pt x="0" y="566057"/>
+                </a:lnTo>
+                <a:lnTo>
+                  <a:pt x="0" y="0"/>
+                </a:lnTo>
+                <a:close/>
+              </a:path>
+            </a:pathLst>
+          </a:custGeom>
+          <a:solidFill>
+            <a:srgbClr val="C00000"/>
+          </a:solidFill>
+          <a:ln w="9231" cap="flat">
+            <a:noFill/>
+            <a:prstDash val="solid"/>
+            <a:miter/>
+          </a:ln>
+          <a:effectLst>
+            <a:outerShdw blurRad="50800" dist="50800" dir="7680000" algn="ctr" rotWithShape="0">
+              <a:srgbClr val="C00000">
+                <a:alpha val="43000"/>
+              </a:srgbClr>
+            </a:outerShdw>
+          </a:effectLst>
+        </p:spPr>
+        <p:txBody>
+          <a:bodyPr rtlCol="0" anchor="ctr"/>
+          <a:lstStyle/>
+          <a:p>
+            <a:pPr algn="ctr"/>
+            <a:r>
+              <a:rPr lang="en-US" sz="1600" b="1">
+                <a:solidFill>
+                  <a:schemeClr val="bg1"/>
+                </a:solidFill>
+              </a:rPr>
+              <a:t>Human Resource Management </a:t>
+            </a:r>
+          </a:p>
+          <a:p>
+            <a:pPr algn="ctr"/>
+            <a:r>
+              <a:rPr lang="en-US" sz="1600" b="1" err="1">
+                <a:solidFill>
+                  <a:schemeClr val="bg1"/>
+                </a:solidFill>
+              </a:rPr>
+              <a:t>Fachkräfte</a:t>
+            </a:r>
+            <a:r>
+              <a:rPr lang="en-US" sz="1600" b="1">
+                <a:solidFill>
+                  <a:schemeClr val="bg1"/>
+                </a:solidFill>
+              </a:rPr>
+              <a:t>, </a:t>
+            </a:r>
+            <a:r>
+              <a:rPr lang="en-US" sz="1600" b="1" err="1">
+                <a:solidFill>
+                  <a:schemeClr val="bg1"/>
+                </a:solidFill>
+              </a:rPr>
+              <a:t>Ausbildung</a:t>
+            </a:r>
+            <a:r>
+              <a:rPr lang="en-US" sz="1600" b="1">
+                <a:solidFill>
+                  <a:schemeClr val="bg1"/>
+                </a:solidFill>
+              </a:rPr>
+              <a:t> und </a:t>
+            </a:r>
+            <a:r>
+              <a:rPr lang="en-US" sz="1600" b="1" err="1">
+                <a:solidFill>
+                  <a:schemeClr val="bg1"/>
+                </a:solidFill>
+              </a:rPr>
+              <a:t>Personalentwicklung</a:t>
+            </a:r>
+            <a:endParaRPr lang="en-US" sz="1600" b="1">
+              <a:solidFill>
+                <a:schemeClr val="bg1"/>
+              </a:solidFill>
+            </a:endParaRPr>
+          </a:p>
+        </p:txBody>
+      </p:sp>
+      <p:sp>
+        <p:nvSpPr>
+          <p:cNvPr id="75" name="Rectangle 73">
+            <a:extLst>
+              <a:ext uri="{FF2B5EF4-FFF2-40B4-BE49-F238E27FC236}">
+                <a16:creationId xmlns:a16="http://schemas.microsoft.com/office/drawing/2014/main" id="{A0B615E8-E9DA-DC2B-A25D-EA8713B0AA0A}"/>
+              </a:ext>
+            </a:extLst>
+          </p:cNvPr>
+          <p:cNvSpPr/>
+          <p:nvPr/>
+        </p:nvSpPr>
+        <p:spPr>
+          <a:xfrm>
+            <a:off x="543911" y="2691270"/>
+            <a:ext cx="10095060" cy="566057"/>
+          </a:xfrm>
+          <a:custGeom>
+            <a:avLst/>
+            <a:gdLst>
+              <a:gd name="csX0" fmla="*/ 0 w 9712960"/>
+              <a:gd name="csY0" fmla="*/ 0 h 566057"/>
+              <a:gd name="csX1" fmla="*/ 9712960 w 9712960"/>
+              <a:gd name="csY1" fmla="*/ 0 h 566057"/>
+              <a:gd name="csX2" fmla="*/ 9712960 w 9712960"/>
+              <a:gd name="csY2" fmla="*/ 566057 h 566057"/>
+              <a:gd name="csX3" fmla="*/ 0 w 9712960"/>
+              <a:gd name="csY3" fmla="*/ 566057 h 566057"/>
+              <a:gd name="csX4" fmla="*/ 0 w 9712960"/>
+              <a:gd name="csY4" fmla="*/ 0 h 566057"/>
+              <a:gd name="csX0" fmla="*/ 0 w 9887132"/>
+              <a:gd name="csY0" fmla="*/ 0 h 566057"/>
+              <a:gd name="csX1" fmla="*/ 9712960 w 9887132"/>
+              <a:gd name="csY1" fmla="*/ 0 h 566057"/>
+              <a:gd name="csX2" fmla="*/ 9887132 w 9887132"/>
+              <a:gd name="csY2" fmla="*/ 566057 h 566057"/>
+              <a:gd name="csX3" fmla="*/ 0 w 9887132"/>
+              <a:gd name="csY3" fmla="*/ 566057 h 566057"/>
+              <a:gd name="csX4" fmla="*/ 0 w 9887132"/>
+              <a:gd name="csY4" fmla="*/ 0 h 566057"/>
+            </a:gdLst>
+            <a:ahLst/>
+            <a:cxnLst>
+              <a:cxn ang="0">
+                <a:pos x="csX0" y="csY0"/>
+              </a:cxn>
+              <a:cxn ang="0">
+                <a:pos x="csX1" y="csY1"/>
+              </a:cxn>
+              <a:cxn ang="0">
+                <a:pos x="csX2" y="csY2"/>
+              </a:cxn>
+              <a:cxn ang="0">
+                <a:pos x="csX3" y="csY3"/>
+              </a:cxn>
+              <a:cxn ang="0">
+                <a:pos x="csX4" y="csY4"/>
+              </a:cxn>
+            </a:cxnLst>
+            <a:rect l="l" t="t" r="r" b="b"/>
+            <a:pathLst>
+              <a:path w="9887132" h="566057">
+                <a:moveTo>
+                  <a:pt x="0" y="0"/>
+                </a:moveTo>
+                <a:lnTo>
+                  <a:pt x="9712960" y="0"/>
+                </a:lnTo>
+                <a:lnTo>
+                  <a:pt x="9887132" y="566057"/>
+                </a:lnTo>
+                <a:lnTo>
+                  <a:pt x="0" y="566057"/>
+                </a:lnTo>
+                <a:lnTo>
+                  <a:pt x="0" y="0"/>
+                </a:lnTo>
+                <a:close/>
+              </a:path>
+            </a:pathLst>
+          </a:custGeom>
+          <a:solidFill>
+            <a:srgbClr val="C00000"/>
+          </a:solidFill>
+          <a:ln w="9231" cap="flat">
+            <a:noFill/>
+            <a:prstDash val="solid"/>
+            <a:miter/>
+          </a:ln>
+          <a:effectLst>
+            <a:outerShdw blurRad="50800" dist="50800" dir="7680000" algn="ctr" rotWithShape="0">
+              <a:srgbClr val="C00000">
+                <a:alpha val="43000"/>
+              </a:srgbClr>
+            </a:outerShdw>
+          </a:effectLst>
+        </p:spPr>
+        <p:txBody>
+          <a:bodyPr rtlCol="0" anchor="ctr"/>
+          <a:lstStyle/>
+          <a:p>
+            <a:pPr algn="ctr"/>
+            <a:r>
+              <a:rPr lang="en-US" sz="1600" b="1">
+                <a:solidFill>
+                  <a:schemeClr val="bg1"/>
+                </a:solidFill>
+              </a:rPr>
+              <a:t>Technologie-</a:t>
+            </a:r>
+            <a:r>
+              <a:rPr lang="en-US" sz="1600" b="1" err="1">
+                <a:solidFill>
+                  <a:schemeClr val="bg1"/>
+                </a:solidFill>
+              </a:rPr>
+              <a:t>Entwicklung</a:t>
+            </a:r>
+            <a:endParaRPr lang="en-US" sz="1600" b="1">
+              <a:solidFill>
+                <a:schemeClr val="bg1"/>
+              </a:solidFill>
+            </a:endParaRPr>
+          </a:p>
+          <a:p>
+            <a:pPr algn="ctr"/>
+            <a:r>
+              <a:rPr lang="en-US" sz="1600" b="1" err="1">
+                <a:solidFill>
+                  <a:schemeClr val="bg1"/>
+                </a:solidFill>
+              </a:rPr>
+              <a:t>Elektromobilität</a:t>
+            </a:r>
+            <a:r>
+              <a:rPr lang="en-US" sz="1600" b="1">
+                <a:solidFill>
+                  <a:schemeClr val="bg1"/>
+                </a:solidFill>
+              </a:rPr>
+              <a:t>, Software, </a:t>
+            </a:r>
+            <a:r>
+              <a:rPr lang="en-US" sz="1600" b="1" err="1">
+                <a:solidFill>
+                  <a:schemeClr val="bg1"/>
+                </a:solidFill>
+              </a:rPr>
+              <a:t>Batterietechnik</a:t>
+            </a:r>
+            <a:r>
+              <a:rPr lang="en-US" sz="1600" b="1">
+                <a:solidFill>
+                  <a:schemeClr val="bg1"/>
+                </a:solidFill>
+              </a:rPr>
+              <a:t> und Innovation</a:t>
+            </a:r>
+          </a:p>
+        </p:txBody>
+      </p:sp>
+      <p:sp>
+        <p:nvSpPr>
+          <p:cNvPr id="76" name="Rectangle 73">
+            <a:extLst>
+              <a:ext uri="{FF2B5EF4-FFF2-40B4-BE49-F238E27FC236}">
+                <a16:creationId xmlns:a16="http://schemas.microsoft.com/office/drawing/2014/main" id="{786B5E1E-1E66-97A8-1EDF-67F69B830499}"/>
+              </a:ext>
+            </a:extLst>
+          </p:cNvPr>
+          <p:cNvSpPr/>
+          <p:nvPr/>
+        </p:nvSpPr>
+        <p:spPr>
+          <a:xfrm>
+            <a:off x="538461" y="3298483"/>
+            <a:ext cx="10289195" cy="566057"/>
+          </a:xfrm>
+          <a:custGeom>
+            <a:avLst/>
+            <a:gdLst>
+              <a:gd name="csX0" fmla="*/ 0 w 9712960"/>
+              <a:gd name="csY0" fmla="*/ 0 h 566057"/>
+              <a:gd name="csX1" fmla="*/ 9712960 w 9712960"/>
+              <a:gd name="csY1" fmla="*/ 0 h 566057"/>
+              <a:gd name="csX2" fmla="*/ 9712960 w 9712960"/>
+              <a:gd name="csY2" fmla="*/ 566057 h 566057"/>
+              <a:gd name="csX3" fmla="*/ 0 w 9712960"/>
+              <a:gd name="csY3" fmla="*/ 566057 h 566057"/>
+              <a:gd name="csX4" fmla="*/ 0 w 9712960"/>
+              <a:gd name="csY4" fmla="*/ 0 h 566057"/>
+              <a:gd name="csX0" fmla="*/ 0 w 9887132"/>
+              <a:gd name="csY0" fmla="*/ 0 h 566057"/>
+              <a:gd name="csX1" fmla="*/ 9712960 w 9887132"/>
+              <a:gd name="csY1" fmla="*/ 0 h 566057"/>
+              <a:gd name="csX2" fmla="*/ 9887132 w 9887132"/>
+              <a:gd name="csY2" fmla="*/ 566057 h 566057"/>
+              <a:gd name="csX3" fmla="*/ 0 w 9887132"/>
+              <a:gd name="csY3" fmla="*/ 566057 h 566057"/>
+              <a:gd name="csX4" fmla="*/ 0 w 9887132"/>
+              <a:gd name="csY4" fmla="*/ 0 h 566057"/>
+            </a:gdLst>
+            <a:ahLst/>
+            <a:cxnLst>
+              <a:cxn ang="0">
+                <a:pos x="csX0" y="csY0"/>
+              </a:cxn>
+              <a:cxn ang="0">
+                <a:pos x="csX1" y="csY1"/>
+              </a:cxn>
+              <a:cxn ang="0">
+                <a:pos x="csX2" y="csY2"/>
+              </a:cxn>
+              <a:cxn ang="0">
+                <a:pos x="csX3" y="csY3"/>
+              </a:cxn>
+              <a:cxn ang="0">
+                <a:pos x="csX4" y="csY4"/>
+              </a:cxn>
+            </a:cxnLst>
+            <a:rect l="l" t="t" r="r" b="b"/>
+            <a:pathLst>
+              <a:path w="9887132" h="566057">
+                <a:moveTo>
+                  <a:pt x="0" y="0"/>
+                </a:moveTo>
+                <a:lnTo>
+                  <a:pt x="9712960" y="0"/>
+                </a:lnTo>
+                <a:lnTo>
+                  <a:pt x="9887132" y="566057"/>
+                </a:lnTo>
+                <a:lnTo>
+                  <a:pt x="0" y="566057"/>
+                </a:lnTo>
+                <a:lnTo>
+                  <a:pt x="0" y="0"/>
+                </a:lnTo>
+                <a:close/>
+              </a:path>
+            </a:pathLst>
+          </a:custGeom>
+          <a:solidFill>
+            <a:srgbClr val="C00000"/>
+          </a:solidFill>
+          <a:ln w="9231" cap="flat">
+            <a:noFill/>
+            <a:prstDash val="solid"/>
+            <a:miter/>
+          </a:ln>
+          <a:effectLst>
+            <a:outerShdw blurRad="50800" dist="50800" dir="7680000" algn="ctr" rotWithShape="0">
+              <a:srgbClr val="C00000">
+                <a:alpha val="43000"/>
+              </a:srgbClr>
+            </a:outerShdw>
+          </a:effectLst>
+        </p:spPr>
+        <p:txBody>
+          <a:bodyPr rtlCol="0" anchor="ctr"/>
+          <a:lstStyle/>
+          <a:p>
+            <a:pPr algn="ctr"/>
+            <a:r>
+              <a:rPr lang="en-US" sz="1600" b="1" err="1">
+                <a:solidFill>
+                  <a:schemeClr val="bg1"/>
+                </a:solidFill>
+              </a:rPr>
+              <a:t>Beschaffung</a:t>
+            </a:r>
+            <a:endParaRPr lang="en-US" sz="1600" b="1">
+              <a:solidFill>
+                <a:schemeClr val="bg1"/>
+              </a:solidFill>
+            </a:endParaRPr>
+          </a:p>
+          <a:p>
+            <a:pPr algn="ctr"/>
+            <a:r>
+              <a:rPr lang="en-US" sz="1600" b="1" err="1">
+                <a:solidFill>
+                  <a:schemeClr val="bg1"/>
+                </a:solidFill>
+              </a:rPr>
+              <a:t>Batterien</a:t>
+            </a:r>
+            <a:r>
+              <a:rPr lang="en-US" sz="1600" b="1">
+                <a:solidFill>
+                  <a:schemeClr val="bg1"/>
+                </a:solidFill>
+              </a:rPr>
+              <a:t>, </a:t>
+            </a:r>
+            <a:r>
+              <a:rPr lang="en-US" sz="1600" b="1" err="1">
+                <a:solidFill>
+                  <a:schemeClr val="bg1"/>
+                </a:solidFill>
+              </a:rPr>
+              <a:t>Halbleiter</a:t>
+            </a:r>
+            <a:r>
+              <a:rPr lang="en-US" sz="1600" b="1">
+                <a:solidFill>
+                  <a:schemeClr val="bg1"/>
+                </a:solidFill>
+              </a:rPr>
+              <a:t>, </a:t>
+            </a:r>
+            <a:r>
+              <a:rPr lang="en-US" sz="1600" b="1" err="1">
+                <a:solidFill>
+                  <a:schemeClr val="bg1"/>
+                </a:solidFill>
+              </a:rPr>
+              <a:t>Rohstoffe</a:t>
+            </a:r>
+            <a:r>
+              <a:rPr lang="en-US" sz="1600" b="1">
+                <a:solidFill>
+                  <a:schemeClr val="bg1"/>
+                </a:solidFill>
+              </a:rPr>
+              <a:t> und </a:t>
+            </a:r>
+            <a:r>
+              <a:rPr lang="en-US" sz="1600" b="1" err="1">
+                <a:solidFill>
+                  <a:schemeClr val="bg1"/>
+                </a:solidFill>
+              </a:rPr>
+              <a:t>Zulieferteile</a:t>
+            </a:r>
+            <a:endParaRPr lang="en-US" sz="1600" b="1">
+              <a:solidFill>
+                <a:schemeClr val="bg1"/>
+              </a:solidFill>
+            </a:endParaRPr>
+          </a:p>
+        </p:txBody>
+      </p:sp>
+      <p:sp>
+        <p:nvSpPr>
+          <p:cNvPr id="78" name="Rectangle 77">
+            <a:extLst>
+              <a:ext uri="{FF2B5EF4-FFF2-40B4-BE49-F238E27FC236}">
+                <a16:creationId xmlns:a16="http://schemas.microsoft.com/office/drawing/2014/main" id="{ACF574F2-C496-71FA-3D8B-244562AF3874}"/>
+              </a:ext>
+            </a:extLst>
+          </p:cNvPr>
+          <p:cNvSpPr/>
+          <p:nvPr/>
+        </p:nvSpPr>
+        <p:spPr>
+          <a:xfrm>
+            <a:off x="587821" y="3952304"/>
+            <a:ext cx="1908633" cy="2343939"/>
+          </a:xfrm>
+          <a:prstGeom prst="rect">
+            <a:avLst/>
+          </a:prstGeom>
+          <a:solidFill>
+            <a:schemeClr val="bg1"/>
+          </a:solidFill>
+          <a:ln w="57150" cap="flat">
+            <a:noFill/>
+            <a:prstDash val="solid"/>
+            <a:miter/>
+          </a:ln>
+          <a:effectLst>
+            <a:outerShdw blurRad="50800" dir="5400000" algn="ctr" rotWithShape="0">
+              <a:srgbClr val="C00000"/>
+            </a:outerShdw>
+          </a:effectLst>
+        </p:spPr>
+        <p:txBody>
+          <a:bodyPr rtlCol="0" anchor="ctr"/>
+          <a:lstStyle/>
+          <a:p>
+            <a:pPr algn="ctr"/>
+            <a:r>
+              <a:rPr lang="en-US" b="1">
+                <a:solidFill>
+                  <a:srgbClr val="000000"/>
+                </a:solidFill>
+              </a:rPr>
+              <a:t>Interne Logistik</a:t>
+            </a:r>
+          </a:p>
+          <a:p>
+            <a:pPr algn="ctr"/>
+            <a:endParaRPr lang="en-US" sz="1600" b="1">
+              <a:solidFill>
+                <a:srgbClr val="000000"/>
+              </a:solidFill>
+            </a:endParaRPr>
+          </a:p>
+          <a:p>
+            <a:pPr marL="285750" indent="-285750">
+              <a:buFont typeface="Arial" panose="020B0604020202020204" pitchFamily="34" charset="0"/>
+              <a:buChar char="•"/>
+            </a:pPr>
+            <a:r>
+              <a:rPr lang="en-US" sz="1600" err="1">
+                <a:solidFill>
+                  <a:srgbClr val="000000"/>
+                </a:solidFill>
+              </a:rPr>
+              <a:t>Materiallager-ung</a:t>
+            </a:r>
+            <a:endParaRPr lang="en-US" sz="1600">
+              <a:solidFill>
+                <a:srgbClr val="000000"/>
+              </a:solidFill>
+            </a:endParaRPr>
+          </a:p>
+          <a:p>
+            <a:pPr marL="285750" indent="-285750">
+              <a:buFont typeface="Arial" panose="020B0604020202020204" pitchFamily="34" charset="0"/>
+              <a:buChar char="•"/>
+            </a:pPr>
+            <a:r>
+              <a:rPr lang="en-US" sz="1600" err="1">
+                <a:solidFill>
+                  <a:srgbClr val="000000"/>
+                </a:solidFill>
+              </a:rPr>
+              <a:t>Lieferanten</a:t>
+            </a:r>
+            <a:r>
+              <a:rPr lang="en-US" sz="1600">
+                <a:solidFill>
+                  <a:srgbClr val="000000"/>
+                </a:solidFill>
+              </a:rPr>
+              <a:t>-management</a:t>
+            </a:r>
+          </a:p>
+          <a:p>
+            <a:pPr marL="285750" indent="-285750">
+              <a:buFont typeface="Arial" panose="020B0604020202020204" pitchFamily="34" charset="0"/>
+              <a:buChar char="•"/>
+            </a:pPr>
+            <a:r>
+              <a:rPr lang="en-US" sz="1600" err="1">
+                <a:solidFill>
+                  <a:srgbClr val="000000"/>
+                </a:solidFill>
+              </a:rPr>
+              <a:t>Bauteil</a:t>
+            </a:r>
+            <a:r>
+              <a:rPr lang="en-US" sz="1600">
+                <a:solidFill>
+                  <a:srgbClr val="000000"/>
+                </a:solidFill>
+              </a:rPr>
+              <a:t>/</a:t>
+            </a:r>
+            <a:r>
+              <a:rPr lang="en-US" sz="1600" err="1">
+                <a:solidFill>
+                  <a:srgbClr val="000000"/>
+                </a:solidFill>
+              </a:rPr>
+              <a:t>Rohstoffversorgung</a:t>
+            </a:r>
+            <a:endParaRPr lang="en-US" sz="1600">
+              <a:solidFill>
+                <a:srgbClr val="000000"/>
+              </a:solidFill>
+            </a:endParaRPr>
+          </a:p>
+        </p:txBody>
+      </p:sp>
+      <p:sp>
+        <p:nvSpPr>
+          <p:cNvPr id="86" name="Rectangle 85">
+            <a:extLst>
+              <a:ext uri="{FF2B5EF4-FFF2-40B4-BE49-F238E27FC236}">
+                <a16:creationId xmlns:a16="http://schemas.microsoft.com/office/drawing/2014/main" id="{5B138ED0-3408-3F3A-E0EF-2CD98539D82B}"/>
+              </a:ext>
+            </a:extLst>
+          </p:cNvPr>
+          <p:cNvSpPr/>
+          <p:nvPr/>
+        </p:nvSpPr>
+        <p:spPr>
+          <a:xfrm>
+            <a:off x="2598051" y="3959053"/>
+            <a:ext cx="1908633" cy="2343939"/>
+          </a:xfrm>
+          <a:prstGeom prst="rect">
+            <a:avLst/>
+          </a:prstGeom>
+          <a:solidFill>
+            <a:schemeClr val="bg1"/>
+          </a:solidFill>
+          <a:ln w="57150" cap="flat">
+            <a:noFill/>
+            <a:prstDash val="solid"/>
+            <a:miter/>
+          </a:ln>
+          <a:effectLst>
+            <a:outerShdw blurRad="50800" dir="5400000" algn="ctr" rotWithShape="0">
+              <a:srgbClr val="C00000"/>
+            </a:outerShdw>
+          </a:effectLst>
+        </p:spPr>
+        <p:txBody>
+          <a:bodyPr rtlCol="0" anchor="ctr"/>
+          <a:lstStyle/>
+          <a:p>
+            <a:pPr algn="ctr"/>
+            <a:r>
+              <a:rPr lang="en-US" b="1">
+                <a:solidFill>
+                  <a:srgbClr val="000000"/>
+                </a:solidFill>
+              </a:rPr>
+              <a:t>Produktion</a:t>
+            </a:r>
+            <a:endParaRPr lang="en-US" sz="1600">
+              <a:solidFill>
+                <a:srgbClr val="000000"/>
+              </a:solidFill>
+            </a:endParaRPr>
+          </a:p>
+          <a:p>
+            <a:pPr marL="285750" indent="-285750">
+              <a:buFont typeface="Arial" panose="020B0604020202020204" pitchFamily="34" charset="0"/>
+              <a:buChar char="•"/>
+            </a:pPr>
+            <a:r>
+              <a:rPr lang="en-US" sz="1600" err="1">
+                <a:solidFill>
+                  <a:srgbClr val="000000"/>
+                </a:solidFill>
+              </a:rPr>
+              <a:t>Fahrzeug-fertigung</a:t>
+            </a:r>
+            <a:endParaRPr lang="en-US" sz="1600">
+              <a:solidFill>
+                <a:srgbClr val="000000"/>
+              </a:solidFill>
+            </a:endParaRPr>
+          </a:p>
+          <a:p>
+            <a:pPr marL="285750" indent="-285750">
+              <a:buFont typeface="Arial" panose="020B0604020202020204" pitchFamily="34" charset="0"/>
+              <a:buChar char="•"/>
+            </a:pPr>
+            <a:r>
+              <a:rPr lang="en-US" sz="1600" err="1">
+                <a:solidFill>
+                  <a:srgbClr val="000000"/>
+                </a:solidFill>
+              </a:rPr>
+              <a:t>Lackierung</a:t>
+            </a:r>
+            <a:endParaRPr lang="en-US" sz="1600">
+              <a:solidFill>
+                <a:srgbClr val="000000"/>
+              </a:solidFill>
+            </a:endParaRPr>
+          </a:p>
+          <a:p>
+            <a:pPr marL="285750" indent="-285750">
+              <a:buFont typeface="Arial" panose="020B0604020202020204" pitchFamily="34" charset="0"/>
+              <a:buChar char="•"/>
+            </a:pPr>
+            <a:r>
+              <a:rPr lang="en-US" sz="1600">
+                <a:solidFill>
+                  <a:srgbClr val="000000"/>
+                </a:solidFill>
+              </a:rPr>
+              <a:t>Montage</a:t>
+            </a:r>
+          </a:p>
+          <a:p>
+            <a:pPr marL="285750" indent="-285750">
+              <a:buFont typeface="Arial" panose="020B0604020202020204" pitchFamily="34" charset="0"/>
+              <a:buChar char="•"/>
+            </a:pPr>
+            <a:r>
+              <a:rPr lang="en-US" sz="1600" err="1">
+                <a:solidFill>
+                  <a:srgbClr val="000000"/>
+                </a:solidFill>
+              </a:rPr>
+              <a:t>Qualitäts-kontrolle</a:t>
+            </a:r>
+            <a:endParaRPr lang="en-US" sz="1600">
+              <a:solidFill>
+                <a:srgbClr val="000000"/>
+              </a:solidFill>
+            </a:endParaRPr>
+          </a:p>
+          <a:p>
+            <a:pPr marL="285750" indent="-285750" algn="ctr">
+              <a:buFont typeface="Arial" panose="020B0604020202020204" pitchFamily="34" charset="0"/>
+              <a:buChar char="•"/>
+            </a:pPr>
+            <a:endParaRPr lang="en-US" sz="1600">
+              <a:solidFill>
+                <a:srgbClr val="000000"/>
+              </a:solidFill>
+            </a:endParaRPr>
+          </a:p>
+        </p:txBody>
+      </p:sp>
+      <p:sp>
+        <p:nvSpPr>
+          <p:cNvPr id="87" name="Rectangle 86">
+            <a:extLst>
+              <a:ext uri="{FF2B5EF4-FFF2-40B4-BE49-F238E27FC236}">
+                <a16:creationId xmlns:a16="http://schemas.microsoft.com/office/drawing/2014/main" id="{8580C7B1-1F9B-3EBF-D230-C6FC5F1A6CA5}"/>
+              </a:ext>
+            </a:extLst>
+          </p:cNvPr>
+          <p:cNvSpPr/>
+          <p:nvPr/>
+        </p:nvSpPr>
+        <p:spPr>
+          <a:xfrm>
+            <a:off x="4608281" y="3972234"/>
+            <a:ext cx="1908633" cy="2343939"/>
+          </a:xfrm>
+          <a:prstGeom prst="rect">
+            <a:avLst/>
+          </a:prstGeom>
+          <a:solidFill>
+            <a:schemeClr val="bg1"/>
+          </a:solidFill>
+          <a:ln w="57150" cap="flat">
+            <a:noFill/>
+            <a:prstDash val="solid"/>
+            <a:miter/>
+          </a:ln>
+          <a:effectLst>
+            <a:outerShdw blurRad="50800" dir="5400000" algn="ctr" rotWithShape="0">
+              <a:srgbClr val="C00000"/>
+            </a:outerShdw>
+          </a:effectLst>
+        </p:spPr>
+        <p:txBody>
+          <a:bodyPr rtlCol="0" anchor="ctr"/>
+          <a:lstStyle/>
+          <a:p>
+            <a:pPr algn="ctr"/>
+            <a:r>
+              <a:rPr lang="en-US" b="1">
+                <a:solidFill>
+                  <a:srgbClr val="000000"/>
+                </a:solidFill>
+              </a:rPr>
+              <a:t>Externe Logistik</a:t>
+            </a:r>
+            <a:endParaRPr lang="en-US" sz="1600" b="1">
+              <a:solidFill>
+                <a:srgbClr val="000000"/>
+              </a:solidFill>
+            </a:endParaRPr>
+          </a:p>
+          <a:p>
+            <a:pPr marL="285750" indent="-285750">
+              <a:buFont typeface="Arial" panose="020B0604020202020204" pitchFamily="34" charset="0"/>
+              <a:buChar char="•"/>
+            </a:pPr>
+            <a:r>
+              <a:rPr lang="en-US" sz="1600" err="1">
+                <a:solidFill>
+                  <a:srgbClr val="000000"/>
+                </a:solidFill>
+              </a:rPr>
+              <a:t>Fahrzeug</a:t>
+            </a:r>
+            <a:r>
+              <a:rPr lang="en-US" sz="1600">
+                <a:solidFill>
+                  <a:srgbClr val="000000"/>
+                </a:solidFill>
+              </a:rPr>
+              <a:t>-transport</a:t>
+            </a:r>
+          </a:p>
+          <a:p>
+            <a:pPr marL="285750" indent="-285750">
+              <a:buFont typeface="Arial" panose="020B0604020202020204" pitchFamily="34" charset="0"/>
+              <a:buChar char="•"/>
+            </a:pPr>
+            <a:r>
+              <a:rPr lang="en-US" sz="1600" err="1">
+                <a:solidFill>
+                  <a:srgbClr val="000000"/>
+                </a:solidFill>
+              </a:rPr>
+              <a:t>Weltweite</a:t>
+            </a:r>
+            <a:br>
+              <a:rPr lang="en-US" sz="1600">
+                <a:solidFill>
+                  <a:srgbClr val="000000"/>
+                </a:solidFill>
+              </a:rPr>
+            </a:br>
+            <a:r>
+              <a:rPr lang="en-US" sz="1600">
+                <a:solidFill>
+                  <a:srgbClr val="000000"/>
+                </a:solidFill>
+              </a:rPr>
+              <a:t>Auslieferung</a:t>
+            </a:r>
+          </a:p>
+          <a:p>
+            <a:pPr marL="285750" indent="-285750">
+              <a:buFont typeface="Arial" panose="020B0604020202020204" pitchFamily="34" charset="0"/>
+              <a:buChar char="•"/>
+            </a:pPr>
+            <a:r>
+              <a:rPr lang="en-US" sz="1600">
+                <a:solidFill>
+                  <a:srgbClr val="000000"/>
+                </a:solidFill>
+              </a:rPr>
+              <a:t>Kunden-</a:t>
+            </a:r>
+            <a:r>
+              <a:rPr lang="en-US" sz="1600" err="1">
+                <a:solidFill>
+                  <a:srgbClr val="000000"/>
+                </a:solidFill>
+              </a:rPr>
+              <a:t>übergabe</a:t>
+            </a:r>
+            <a:endParaRPr lang="en-US" sz="1600">
+              <a:solidFill>
+                <a:srgbClr val="000000"/>
+              </a:solidFill>
+            </a:endParaRPr>
+          </a:p>
+          <a:p>
+            <a:pPr marL="285750" indent="-285750">
+              <a:buFont typeface="Arial" panose="020B0604020202020204" pitchFamily="34" charset="0"/>
+              <a:buChar char="•"/>
+            </a:pPr>
+            <a:endParaRPr lang="en-US" sz="1600">
+              <a:solidFill>
+                <a:srgbClr val="000000"/>
+              </a:solidFill>
+            </a:endParaRPr>
+          </a:p>
+        </p:txBody>
+      </p:sp>
+      <p:sp>
+        <p:nvSpPr>
+          <p:cNvPr id="88" name="Rectangle 87">
+            <a:extLst>
+              <a:ext uri="{FF2B5EF4-FFF2-40B4-BE49-F238E27FC236}">
+                <a16:creationId xmlns:a16="http://schemas.microsoft.com/office/drawing/2014/main" id="{6A9C790E-0A72-D161-E25B-5799EA3EB0FF}"/>
+              </a:ext>
+            </a:extLst>
+          </p:cNvPr>
+          <p:cNvSpPr/>
+          <p:nvPr/>
+        </p:nvSpPr>
+        <p:spPr>
+          <a:xfrm>
+            <a:off x="6618511" y="3978983"/>
+            <a:ext cx="1908633" cy="2343939"/>
+          </a:xfrm>
+          <a:prstGeom prst="rect">
+            <a:avLst/>
+          </a:prstGeom>
+          <a:solidFill>
+            <a:schemeClr val="bg1"/>
+          </a:solidFill>
+          <a:ln w="57150" cap="flat">
+            <a:noFill/>
+            <a:prstDash val="solid"/>
+            <a:miter/>
+          </a:ln>
+          <a:effectLst>
+            <a:outerShdw blurRad="50800" dir="5400000" algn="ctr" rotWithShape="0">
+              <a:srgbClr val="C00000"/>
+            </a:outerShdw>
+          </a:effectLst>
+        </p:spPr>
+        <p:txBody>
+          <a:bodyPr rtlCol="0" anchor="ctr"/>
+          <a:lstStyle/>
+          <a:p>
+            <a:pPr algn="ctr"/>
+            <a:r>
+              <a:rPr lang="en-US" b="1" err="1">
+                <a:solidFill>
+                  <a:srgbClr val="000000"/>
+                </a:solidFill>
+              </a:rPr>
+              <a:t>Marteting</a:t>
+            </a:r>
+            <a:r>
+              <a:rPr lang="en-US" b="1">
+                <a:solidFill>
+                  <a:srgbClr val="000000"/>
+                </a:solidFill>
+              </a:rPr>
+              <a:t> &amp; </a:t>
+            </a:r>
+            <a:r>
+              <a:rPr lang="en-US" b="1" err="1">
+                <a:solidFill>
+                  <a:srgbClr val="000000"/>
+                </a:solidFill>
+              </a:rPr>
+              <a:t>Verkauf</a:t>
+            </a:r>
+            <a:endParaRPr lang="en-US" b="1">
+              <a:solidFill>
+                <a:srgbClr val="000000"/>
+              </a:solidFill>
+            </a:endParaRPr>
+          </a:p>
+          <a:p>
+            <a:pPr marL="285750" indent="-285750">
+              <a:buFont typeface="Arial" panose="020B0604020202020204" pitchFamily="34" charset="0"/>
+              <a:buChar char="•"/>
+            </a:pPr>
+            <a:r>
+              <a:rPr lang="en-US" sz="1600" err="1">
+                <a:solidFill>
+                  <a:srgbClr val="000000"/>
+                </a:solidFill>
+              </a:rPr>
+              <a:t>Permium</a:t>
+            </a:r>
+            <a:r>
+              <a:rPr lang="en-US" sz="1600">
+                <a:solidFill>
+                  <a:srgbClr val="000000"/>
+                </a:solidFill>
+              </a:rPr>
+              <a:t>-Marketing</a:t>
+            </a:r>
+          </a:p>
+          <a:p>
+            <a:pPr marL="285750" indent="-285750">
+              <a:buFont typeface="Arial" panose="020B0604020202020204" pitchFamily="34" charset="0"/>
+              <a:buChar char="•"/>
+            </a:pPr>
+            <a:r>
+              <a:rPr lang="en-US" sz="1600" err="1">
+                <a:solidFill>
+                  <a:srgbClr val="000000"/>
+                </a:solidFill>
+              </a:rPr>
+              <a:t>Prosche</a:t>
+            </a:r>
+            <a:r>
+              <a:rPr lang="en-US" sz="1600">
+                <a:solidFill>
+                  <a:srgbClr val="000000"/>
+                </a:solidFill>
+              </a:rPr>
+              <a:t> </a:t>
+            </a:r>
+            <a:r>
+              <a:rPr lang="en-US" sz="1600" err="1">
+                <a:solidFill>
+                  <a:srgbClr val="000000"/>
+                </a:solidFill>
+              </a:rPr>
+              <a:t>Zentren</a:t>
+            </a:r>
+            <a:endParaRPr lang="en-US" sz="1600">
+              <a:solidFill>
+                <a:srgbClr val="000000"/>
+              </a:solidFill>
+            </a:endParaRPr>
+          </a:p>
+          <a:p>
+            <a:pPr marL="285750" indent="-285750">
+              <a:buFont typeface="Arial" panose="020B0604020202020204" pitchFamily="34" charset="0"/>
+              <a:buChar char="•"/>
+            </a:pPr>
+            <a:r>
+              <a:rPr lang="en-US" sz="1600" err="1">
+                <a:solidFill>
+                  <a:srgbClr val="000000"/>
+                </a:solidFill>
+              </a:rPr>
+              <a:t>Fahrzeug-Konfigurationen</a:t>
+            </a:r>
+            <a:endParaRPr lang="en-US" sz="1600">
+              <a:solidFill>
+                <a:srgbClr val="000000"/>
+              </a:solidFill>
+            </a:endParaRPr>
+          </a:p>
+          <a:p>
+            <a:pPr marL="285750" indent="-285750">
+              <a:buFont typeface="Arial" panose="020B0604020202020204" pitchFamily="34" charset="0"/>
+              <a:buChar char="•"/>
+            </a:pPr>
+            <a:r>
+              <a:rPr lang="en-US" sz="1600" err="1">
+                <a:solidFill>
+                  <a:srgbClr val="000000"/>
+                </a:solidFill>
+              </a:rPr>
+              <a:t>Markenimage</a:t>
+            </a:r>
+            <a:endParaRPr lang="en-US" sz="1600">
+              <a:solidFill>
+                <a:srgbClr val="000000"/>
+              </a:solidFill>
+            </a:endParaRPr>
+          </a:p>
+        </p:txBody>
+      </p:sp>
+      <p:sp>
+        <p:nvSpPr>
+          <p:cNvPr id="93" name="Rectangle 92">
+            <a:extLst>
+              <a:ext uri="{FF2B5EF4-FFF2-40B4-BE49-F238E27FC236}">
+                <a16:creationId xmlns:a16="http://schemas.microsoft.com/office/drawing/2014/main" id="{E9865388-00E8-6DBC-734B-7576F614F8AD}"/>
+              </a:ext>
+            </a:extLst>
+          </p:cNvPr>
+          <p:cNvSpPr/>
+          <p:nvPr/>
+        </p:nvSpPr>
+        <p:spPr>
+          <a:xfrm>
+            <a:off x="8628741" y="3987494"/>
+            <a:ext cx="2213433" cy="2343939"/>
+          </a:xfrm>
+          <a:custGeom>
+            <a:avLst/>
+            <a:gdLst>
+              <a:gd name="csX0" fmla="*/ 0 w 1908633"/>
+              <a:gd name="csY0" fmla="*/ 0 h 2343939"/>
+              <a:gd name="csX1" fmla="*/ 1908633 w 1908633"/>
+              <a:gd name="csY1" fmla="*/ 0 h 2343939"/>
+              <a:gd name="csX2" fmla="*/ 1908633 w 1908633"/>
+              <a:gd name="csY2" fmla="*/ 2343939 h 2343939"/>
+              <a:gd name="csX3" fmla="*/ 0 w 1908633"/>
+              <a:gd name="csY3" fmla="*/ 2343939 h 2343939"/>
+              <a:gd name="csX4" fmla="*/ 0 w 1908633"/>
+              <a:gd name="csY4" fmla="*/ 0 h 2343939"/>
+              <a:gd name="csX0" fmla="*/ 0 w 2213433"/>
+              <a:gd name="csY0" fmla="*/ 0 h 2343939"/>
+              <a:gd name="csX1" fmla="*/ 2213433 w 2213433"/>
+              <a:gd name="csY1" fmla="*/ 0 h 2343939"/>
+              <a:gd name="csX2" fmla="*/ 1908633 w 2213433"/>
+              <a:gd name="csY2" fmla="*/ 2343939 h 2343939"/>
+              <a:gd name="csX3" fmla="*/ 0 w 2213433"/>
+              <a:gd name="csY3" fmla="*/ 2343939 h 2343939"/>
+              <a:gd name="csX4" fmla="*/ 0 w 2213433"/>
+              <a:gd name="csY4" fmla="*/ 0 h 2343939"/>
+            </a:gdLst>
+            <a:ahLst/>
+            <a:cxnLst>
+              <a:cxn ang="0">
+                <a:pos x="csX0" y="csY0"/>
+              </a:cxn>
+              <a:cxn ang="0">
+                <a:pos x="csX1" y="csY1"/>
+              </a:cxn>
+              <a:cxn ang="0">
+                <a:pos x="csX2" y="csY2"/>
+              </a:cxn>
+              <a:cxn ang="0">
+                <a:pos x="csX3" y="csY3"/>
+              </a:cxn>
+              <a:cxn ang="0">
+                <a:pos x="csX4" y="csY4"/>
+              </a:cxn>
+            </a:cxnLst>
+            <a:rect l="l" t="t" r="r" b="b"/>
+            <a:pathLst>
+              <a:path w="2213433" h="2343939">
+                <a:moveTo>
+                  <a:pt x="0" y="0"/>
+                </a:moveTo>
+                <a:lnTo>
+                  <a:pt x="2213433" y="0"/>
+                </a:lnTo>
+                <a:lnTo>
+                  <a:pt x="1908633" y="2343939"/>
+                </a:lnTo>
+                <a:lnTo>
+                  <a:pt x="0" y="2343939"/>
+                </a:lnTo>
+                <a:lnTo>
+                  <a:pt x="0" y="0"/>
+                </a:lnTo>
+                <a:close/>
+              </a:path>
+            </a:pathLst>
+          </a:custGeom>
+          <a:solidFill>
+            <a:schemeClr val="bg1"/>
+          </a:solidFill>
+          <a:ln w="57150" cap="flat">
+            <a:noFill/>
+            <a:prstDash val="solid"/>
+            <a:miter/>
+          </a:ln>
+          <a:effectLst>
+            <a:outerShdw blurRad="50800" dir="5400000" algn="ctr" rotWithShape="0">
+              <a:srgbClr val="C00000"/>
+            </a:outerShdw>
+          </a:effectLst>
+        </p:spPr>
+        <p:txBody>
+          <a:bodyPr rtlCol="0" anchor="ctr"/>
+          <a:lstStyle/>
+          <a:p>
+            <a:pPr algn="ctr"/>
+            <a:r>
+              <a:rPr lang="en-US" b="1">
+                <a:solidFill>
+                  <a:srgbClr val="000000"/>
+                </a:solidFill>
+              </a:rPr>
+              <a:t>Service</a:t>
+            </a:r>
+          </a:p>
+          <a:p>
+            <a:pPr algn="ctr"/>
+            <a:endParaRPr lang="en-US" sz="1600" b="1">
+              <a:solidFill>
+                <a:srgbClr val="000000"/>
+              </a:solidFill>
+            </a:endParaRPr>
+          </a:p>
+          <a:p>
+            <a:pPr marL="285750" indent="-285750">
+              <a:buFont typeface="Arial" panose="020B0604020202020204" pitchFamily="34" charset="0"/>
+              <a:buChar char="•"/>
+            </a:pPr>
+            <a:r>
+              <a:rPr lang="en-US" sz="1600" err="1">
+                <a:solidFill>
+                  <a:srgbClr val="000000"/>
+                </a:solidFill>
+              </a:rPr>
+              <a:t>Wartung</a:t>
+            </a:r>
+            <a:endParaRPr lang="en-US" sz="1600">
+              <a:solidFill>
+                <a:srgbClr val="000000"/>
+              </a:solidFill>
+            </a:endParaRPr>
+          </a:p>
+          <a:p>
+            <a:pPr marL="285750" indent="-285750">
+              <a:buFont typeface="Arial" panose="020B0604020202020204" pitchFamily="34" charset="0"/>
+              <a:buChar char="•"/>
+            </a:pPr>
+            <a:r>
+              <a:rPr lang="en-US" sz="1600" err="1">
+                <a:solidFill>
+                  <a:srgbClr val="000000"/>
+                </a:solidFill>
+              </a:rPr>
+              <a:t>Ersatzteile</a:t>
+            </a:r>
+            <a:endParaRPr lang="en-US" sz="1600">
+              <a:solidFill>
+                <a:srgbClr val="000000"/>
+              </a:solidFill>
+            </a:endParaRPr>
+          </a:p>
+          <a:p>
+            <a:pPr marL="285750" indent="-285750">
+              <a:buFont typeface="Arial" panose="020B0604020202020204" pitchFamily="34" charset="0"/>
+              <a:buChar char="•"/>
+            </a:pPr>
+            <a:r>
+              <a:rPr lang="en-US" sz="1600" err="1">
+                <a:solidFill>
+                  <a:srgbClr val="000000"/>
+                </a:solidFill>
+              </a:rPr>
+              <a:t>Finanzierung</a:t>
+            </a:r>
+            <a:endParaRPr lang="en-US" sz="1600">
+              <a:solidFill>
+                <a:srgbClr val="000000"/>
+              </a:solidFill>
+            </a:endParaRPr>
+          </a:p>
+          <a:p>
+            <a:pPr marL="285750" indent="-285750">
+              <a:buFont typeface="Arial" panose="020B0604020202020204" pitchFamily="34" charset="0"/>
+              <a:buChar char="•"/>
+            </a:pPr>
+            <a:r>
+              <a:rPr lang="en-US" sz="1600">
+                <a:solidFill>
+                  <a:srgbClr val="000000"/>
+                </a:solidFill>
+              </a:rPr>
+              <a:t>Porsche Connect</a:t>
+            </a:r>
+          </a:p>
+          <a:p>
+            <a:pPr marL="285750" indent="-285750">
+              <a:buFont typeface="Arial" panose="020B0604020202020204" pitchFamily="34" charset="0"/>
+              <a:buChar char="•"/>
+            </a:pPr>
+            <a:r>
+              <a:rPr lang="en-US" sz="1600" err="1">
+                <a:solidFill>
+                  <a:srgbClr val="000000"/>
+                </a:solidFill>
+              </a:rPr>
+              <a:t>Digitale</a:t>
+            </a:r>
+            <a:r>
+              <a:rPr lang="en-US" sz="1600">
+                <a:solidFill>
+                  <a:srgbClr val="000000"/>
+                </a:solidFill>
+              </a:rPr>
+              <a:t> Services</a:t>
+            </a:r>
+          </a:p>
+        </p:txBody>
+      </p:sp>
+    </p:spTree>
+    <p:extLst>
+      <p:ext uri="{BB962C8B-B14F-4D97-AF65-F5344CB8AC3E}">
+        <p14:creationId xmlns:p14="http://schemas.microsoft.com/office/powerpoint/2010/main" val="4132558906"/>
+      </p:ext>
+    </p:extLst>
+  </p:cSld>
+  <p:clrMapOvr>
+    <a:masterClrMapping/>
+  </p:clrMapOvr>
+</p:sld>
+</file>
+
+<file path=ppt/slides/slide14.xml><?xml version="1.0" encoding="utf-8"?>
+<p:sld xmlns:a="http://schemas.openxmlformats.org/drawingml/2006/main" xmlns:r="http://schemas.openxmlformats.org/officeDocument/2006/relationships" xmlns:p="http://schemas.openxmlformats.org/presentationml/2006/main">
+  <p:cSld>
+    <p:spTree>
+      <p:nvGrpSpPr>
+        <p:cNvPr id="1" name="">
+          <a:extLst>
+            <a:ext uri="{FF2B5EF4-FFF2-40B4-BE49-F238E27FC236}">
+              <a16:creationId xmlns:a16="http://schemas.microsoft.com/office/drawing/2014/main" id="{E9670BEE-6800-BB62-0E69-71275CFB4248}"/>
+            </a:ext>
+          </a:extLst>
+        </p:cNvPr>
+        <p:cNvGrpSpPr/>
+        <p:nvPr/>
+      </p:nvGrpSpPr>
+      <p:grpSpPr>
+        <a:xfrm>
+          <a:off x="0" y="0"/>
+          <a:ext cx="0" cy="0"/>
+          <a:chOff x="0" y="0"/>
+          <a:chExt cx="0" cy="0"/>
+        </a:xfrm>
+      </p:grpSpPr>
+      <p:sp>
+        <p:nvSpPr>
+          <p:cNvPr id="6" name="Titel 5">
+            <a:extLst>
+              <a:ext uri="{FF2B5EF4-FFF2-40B4-BE49-F238E27FC236}">
+                <a16:creationId xmlns:a16="http://schemas.microsoft.com/office/drawing/2014/main" id="{8AE26C5A-E779-DCB0-9DB3-968101F8F478}"/>
+              </a:ext>
+            </a:extLst>
+          </p:cNvPr>
+          <p:cNvSpPr>
+            <a:spLocks noGrp="1"/>
+          </p:cNvSpPr>
+          <p:nvPr>
+            <p:ph type="title"/>
+          </p:nvPr>
+        </p:nvSpPr>
+        <p:spPr/>
+        <p:txBody>
+          <a:bodyPr>
+            <a:normAutofit/>
+          </a:bodyPr>
+          <a:lstStyle/>
+          <a:p>
+            <a:pPr algn="just"/>
+            <a:r>
+              <a:rPr lang="de-DE" b="1" noProof="1"/>
+              <a:t>Unternehmenspositionierung</a:t>
+            </a:r>
+          </a:p>
+        </p:txBody>
+      </p:sp>
+      <p:sp>
+        <p:nvSpPr>
+          <p:cNvPr id="7" name="Inhaltsplatzhalter 6">
+            <a:extLst>
+              <a:ext uri="{FF2B5EF4-FFF2-40B4-BE49-F238E27FC236}">
+                <a16:creationId xmlns:a16="http://schemas.microsoft.com/office/drawing/2014/main" id="{96408740-E5D1-8804-5E65-5EBCD5B10686}"/>
+              </a:ext>
+            </a:extLst>
+          </p:cNvPr>
+          <p:cNvSpPr>
+            <a:spLocks noGrp="1"/>
+          </p:cNvSpPr>
+          <p:nvPr>
+            <p:ph idx="1"/>
+          </p:nvPr>
+        </p:nvSpPr>
+        <p:spPr>
+          <a:xfrm>
+            <a:off x="543911" y="1457790"/>
+            <a:ext cx="3532789" cy="4573586"/>
+          </a:xfrm>
+        </p:spPr>
+        <p:txBody>
+          <a:bodyPr/>
+          <a:lstStyle/>
+          <a:p>
+            <a:r>
+              <a:rPr lang="en-US" b="1"/>
+              <a:t>Kostenführerschaft</a:t>
+            </a:r>
+          </a:p>
+          <a:p>
+            <a:r>
+              <a:rPr lang="en-US"/>
+              <a:t>Porsche verzichtet bewusst auf diese Strategie. Skaleneffekte der VW-Gruppe dienen der </a:t>
+            </a:r>
+            <a:r>
+              <a:rPr lang="en-US" b="1"/>
+              <a:t>Margenoptimierung</a:t>
+            </a:r>
+            <a:r>
+              <a:rPr lang="en-US"/>
+              <a:t>, nicht der Preissenkung. Das Credo lautet </a:t>
+            </a:r>
+            <a:r>
+              <a:rPr lang="en-US" b="1"/>
+              <a:t>„Value over Volume“</a:t>
+            </a:r>
+            <a:r>
+              <a:rPr lang="en-US"/>
+              <a:t> statt Massenmarkt-Preiskampf.</a:t>
+            </a:r>
+          </a:p>
+        </p:txBody>
+      </p:sp>
+      <p:sp>
+        <p:nvSpPr>
+          <p:cNvPr id="5" name="Datumsplatzhalter 4">
+            <a:extLst>
+              <a:ext uri="{FF2B5EF4-FFF2-40B4-BE49-F238E27FC236}">
+                <a16:creationId xmlns:a16="http://schemas.microsoft.com/office/drawing/2014/main" id="{12AD3F32-7C44-711C-4E23-77AA6E418AE1}"/>
+              </a:ext>
+            </a:extLst>
+          </p:cNvPr>
+          <p:cNvSpPr>
+            <a:spLocks noGrp="1"/>
+          </p:cNvSpPr>
+          <p:nvPr>
+            <p:ph type="dt" sz="half" idx="14"/>
+          </p:nvPr>
+        </p:nvSpPr>
+        <p:spPr/>
+        <p:txBody>
+          <a:bodyPr/>
+          <a:lstStyle/>
+          <a:p>
+            <a:fld id="{078773AF-2259-0B42-AEF5-3C6C7EBEB81F}" type="datetime1">
+              <a:rPr lang="en-US" noProof="1" smtClean="0"/>
+              <a:t>5/17/26</a:t>
+            </a:fld>
+            <a:endParaRPr lang="de-DE" noProof="1"/>
+          </a:p>
+        </p:txBody>
+      </p:sp>
+      <p:sp>
+        <p:nvSpPr>
+          <p:cNvPr id="12" name="Foliennummernplatzhalter 11">
+            <a:extLst>
+              <a:ext uri="{FF2B5EF4-FFF2-40B4-BE49-F238E27FC236}">
+                <a16:creationId xmlns:a16="http://schemas.microsoft.com/office/drawing/2014/main" id="{6A43DCD5-47DE-8C92-FDF1-71CF09C4192F}"/>
+              </a:ext>
+            </a:extLst>
+          </p:cNvPr>
+          <p:cNvSpPr>
+            <a:spLocks noGrp="1"/>
+          </p:cNvSpPr>
+          <p:nvPr>
+            <p:ph type="sldNum" sz="quarter" idx="16"/>
+          </p:nvPr>
+        </p:nvSpPr>
+        <p:spPr/>
+        <p:txBody>
+          <a:bodyPr/>
+          <a:lstStyle/>
+          <a:p>
+            <a:fld id="{006C6BFE-10C3-7B49-A3EE-08AD7A863B95}" type="slidenum">
+              <a:rPr lang="de-DE" noProof="1" smtClean="0"/>
+              <a:pPr/>
+              <a:t>14</a:t>
+            </a:fld>
+            <a:endParaRPr lang="de-DE" noProof="1"/>
+          </a:p>
+        </p:txBody>
+      </p:sp>
+      <p:sp>
+        <p:nvSpPr>
+          <p:cNvPr id="3" name="Fußzeilenplatzhalter 4">
+            <a:extLst>
+              <a:ext uri="{FF2B5EF4-FFF2-40B4-BE49-F238E27FC236}">
+                <a16:creationId xmlns:a16="http://schemas.microsoft.com/office/drawing/2014/main" id="{8807AC3B-3572-07B1-C0C5-3A337A611F61}"/>
+              </a:ext>
+            </a:extLst>
+          </p:cNvPr>
+          <p:cNvSpPr txBox="1">
+            <a:spLocks/>
+          </p:cNvSpPr>
+          <p:nvPr/>
+        </p:nvSpPr>
+        <p:spPr>
+          <a:xfrm>
+            <a:off x="6417733" y="6356239"/>
+            <a:ext cx="5291667" cy="365125"/>
+          </a:xfrm>
+          <a:prstGeom prst="rect">
+            <a:avLst/>
+          </a:prstGeom>
+        </p:spPr>
+        <p:txBody>
+          <a:bodyPr vert="horz" lIns="91440" tIns="45720" rIns="91440" bIns="45720" rtlCol="0" anchor="ctr">
+            <a:normAutofit/>
+          </a:bodyPr>
+          <a:lstStyle>
+            <a:defPPr>
+              <a:defRPr lang="de-DE"/>
+            </a:defPPr>
+            <a:lvl1pPr marL="0" algn="l" defTabSz="914400" rtl="0" eaLnBrk="1" latinLnBrk="0" hangingPunct="1">
+              <a:defRPr sz="1000" kern="1200">
+                <a:solidFill>
+                  <a:schemeClr val="bg2">
+                    <a:lumMod val="90000"/>
+                  </a:schemeClr>
+                </a:solidFill>
+                <a:latin typeface="Arial" panose="020B0604020202020204" pitchFamily="34" charset="0"/>
+                <a:ea typeface="+mn-ea"/>
+                <a:cs typeface="Arial" panose="020B0604020202020204" pitchFamily="34" charset="0"/>
+              </a:defRPr>
+            </a:lvl1pPr>
+            <a:lvl2pPr marL="457200" algn="l" defTabSz="914400" rtl="0" eaLnBrk="1" latinLnBrk="0" hangingPunct="1">
+              <a:defRPr sz="1800" kern="1200">
+                <a:solidFill>
+                  <a:schemeClr val="tx1"/>
+                </a:solidFill>
+                <a:latin typeface="+mn-lt"/>
+                <a:ea typeface="+mn-ea"/>
+                <a:cs typeface="+mn-cs"/>
+              </a:defRPr>
+            </a:lvl2pPr>
+            <a:lvl3pPr marL="914400" algn="l" defTabSz="914400" rtl="0" eaLnBrk="1" latinLnBrk="0" hangingPunct="1">
+              <a:defRPr sz="1800" kern="1200">
+                <a:solidFill>
+                  <a:schemeClr val="tx1"/>
+                </a:solidFill>
+                <a:latin typeface="+mn-lt"/>
+                <a:ea typeface="+mn-ea"/>
+                <a:cs typeface="+mn-cs"/>
+              </a:defRPr>
+            </a:lvl3pPr>
+            <a:lvl4pPr marL="1371600" algn="l" defTabSz="914400" rtl="0" eaLnBrk="1" latinLnBrk="0" hangingPunct="1">
+              <a:defRPr sz="1800" kern="1200">
+                <a:solidFill>
+                  <a:schemeClr val="tx1"/>
+                </a:solidFill>
+                <a:latin typeface="+mn-lt"/>
+                <a:ea typeface="+mn-ea"/>
+                <a:cs typeface="+mn-cs"/>
+              </a:defRPr>
+            </a:lvl4pPr>
+            <a:lvl5pPr marL="1828800" algn="l" defTabSz="914400" rtl="0" eaLnBrk="1" latinLnBrk="0" hangingPunct="1">
+              <a:defRPr sz="1800" kern="1200">
+                <a:solidFill>
+                  <a:schemeClr val="tx1"/>
+                </a:solidFill>
+                <a:latin typeface="+mn-lt"/>
+                <a:ea typeface="+mn-ea"/>
+                <a:cs typeface="+mn-cs"/>
+              </a:defRPr>
+            </a:lvl5pPr>
+            <a:lvl6pPr marL="2286000" algn="l" defTabSz="914400" rtl="0" eaLnBrk="1" latinLnBrk="0" hangingPunct="1">
+              <a:defRPr sz="1800" kern="1200">
+                <a:solidFill>
+                  <a:schemeClr val="tx1"/>
+                </a:solidFill>
+                <a:latin typeface="+mn-lt"/>
+                <a:ea typeface="+mn-ea"/>
+                <a:cs typeface="+mn-cs"/>
+              </a:defRPr>
+            </a:lvl6pPr>
+            <a:lvl7pPr marL="2743200" algn="l" defTabSz="914400" rtl="0" eaLnBrk="1" latinLnBrk="0" hangingPunct="1">
+              <a:defRPr sz="1800" kern="1200">
+                <a:solidFill>
+                  <a:schemeClr val="tx1"/>
+                </a:solidFill>
+                <a:latin typeface="+mn-lt"/>
+                <a:ea typeface="+mn-ea"/>
+                <a:cs typeface="+mn-cs"/>
+              </a:defRPr>
+            </a:lvl7pPr>
+            <a:lvl8pPr marL="3200400" algn="l" defTabSz="914400" rtl="0" eaLnBrk="1" latinLnBrk="0" hangingPunct="1">
+              <a:defRPr sz="1800" kern="1200">
+                <a:solidFill>
+                  <a:schemeClr val="tx1"/>
+                </a:solidFill>
+                <a:latin typeface="+mn-lt"/>
+                <a:ea typeface="+mn-ea"/>
+                <a:cs typeface="+mn-cs"/>
+              </a:defRPr>
+            </a:lvl8pPr>
+            <a:lvl9pPr marL="3657600" algn="l" defTabSz="914400" rtl="0" eaLnBrk="1" latinLnBrk="0" hangingPunct="1">
+              <a:defRPr sz="1800" kern="1200">
+                <a:solidFill>
+                  <a:schemeClr val="tx1"/>
+                </a:solidFill>
+                <a:latin typeface="+mn-lt"/>
+                <a:ea typeface="+mn-ea"/>
+                <a:cs typeface="+mn-cs"/>
+              </a:defRPr>
+            </a:lvl9pPr>
+          </a:lstStyle>
+          <a:p>
+            <a:pPr>
+              <a:defRPr/>
+            </a:pPr>
+            <a:endParaRPr lang="de-DE" noProof="1">
+              <a:solidFill>
+                <a:schemeClr val="tx1">
+                  <a:lumMod val="75000"/>
+                  <a:lumOff val="25000"/>
+                </a:schemeClr>
+              </a:solidFill>
+              <a:latin typeface="Arial"/>
+              <a:ea typeface="Calibri"/>
+              <a:cs typeface="Arial"/>
+            </a:endParaRPr>
+          </a:p>
+        </p:txBody>
+      </p:sp>
+      <p:sp>
+        <p:nvSpPr>
+          <p:cNvPr id="8" name="Fußzeilenplatzhalter 4">
+            <a:extLst>
+              <a:ext uri="{FF2B5EF4-FFF2-40B4-BE49-F238E27FC236}">
+                <a16:creationId xmlns:a16="http://schemas.microsoft.com/office/drawing/2014/main" id="{FD4E010D-CF33-A430-7C1F-9E3B735969B6}"/>
+              </a:ext>
+            </a:extLst>
+          </p:cNvPr>
+          <p:cNvSpPr txBox="1">
+            <a:spLocks/>
+          </p:cNvSpPr>
+          <p:nvPr/>
+        </p:nvSpPr>
+        <p:spPr>
+          <a:xfrm>
+            <a:off x="6570133" y="6508639"/>
+            <a:ext cx="5291667" cy="365125"/>
+          </a:xfrm>
+          <a:prstGeom prst="rect">
+            <a:avLst/>
+          </a:prstGeom>
+        </p:spPr>
+        <p:txBody>
+          <a:bodyPr vert="horz" lIns="91440" tIns="45720" rIns="91440" bIns="45720" rtlCol="0" anchor="ctr">
+            <a:normAutofit/>
+          </a:bodyPr>
+          <a:lstStyle>
+            <a:defPPr>
+              <a:defRPr lang="de-DE"/>
+            </a:defPPr>
+            <a:lvl1pPr marL="0" algn="l" defTabSz="914400" rtl="0" eaLnBrk="1" latinLnBrk="0" hangingPunct="1">
+              <a:defRPr sz="1000" kern="1200">
+                <a:solidFill>
+                  <a:schemeClr val="bg2">
+                    <a:lumMod val="90000"/>
+                  </a:schemeClr>
+                </a:solidFill>
+                <a:latin typeface="Arial" panose="020B0604020202020204" pitchFamily="34" charset="0"/>
+                <a:ea typeface="+mn-ea"/>
+                <a:cs typeface="Arial" panose="020B0604020202020204" pitchFamily="34" charset="0"/>
+              </a:defRPr>
+            </a:lvl1pPr>
+            <a:lvl2pPr marL="457200" algn="l" defTabSz="914400" rtl="0" eaLnBrk="1" latinLnBrk="0" hangingPunct="1">
+              <a:defRPr sz="1800" kern="1200">
+                <a:solidFill>
+                  <a:schemeClr val="tx1"/>
+                </a:solidFill>
+                <a:latin typeface="+mn-lt"/>
+                <a:ea typeface="+mn-ea"/>
+                <a:cs typeface="+mn-cs"/>
+              </a:defRPr>
+            </a:lvl2pPr>
+            <a:lvl3pPr marL="914400" algn="l" defTabSz="914400" rtl="0" eaLnBrk="1" latinLnBrk="0" hangingPunct="1">
+              <a:defRPr sz="1800" kern="1200">
+                <a:solidFill>
+                  <a:schemeClr val="tx1"/>
+                </a:solidFill>
+                <a:latin typeface="+mn-lt"/>
+                <a:ea typeface="+mn-ea"/>
+                <a:cs typeface="+mn-cs"/>
+              </a:defRPr>
+            </a:lvl3pPr>
+            <a:lvl4pPr marL="1371600" algn="l" defTabSz="914400" rtl="0" eaLnBrk="1" latinLnBrk="0" hangingPunct="1">
+              <a:defRPr sz="1800" kern="1200">
+                <a:solidFill>
+                  <a:schemeClr val="tx1"/>
+                </a:solidFill>
+                <a:latin typeface="+mn-lt"/>
+                <a:ea typeface="+mn-ea"/>
+                <a:cs typeface="+mn-cs"/>
+              </a:defRPr>
+            </a:lvl4pPr>
+            <a:lvl5pPr marL="1828800" algn="l" defTabSz="914400" rtl="0" eaLnBrk="1" latinLnBrk="0" hangingPunct="1">
+              <a:defRPr sz="1800" kern="1200">
+                <a:solidFill>
+                  <a:schemeClr val="tx1"/>
+                </a:solidFill>
+                <a:latin typeface="+mn-lt"/>
+                <a:ea typeface="+mn-ea"/>
+                <a:cs typeface="+mn-cs"/>
+              </a:defRPr>
+            </a:lvl5pPr>
+            <a:lvl6pPr marL="2286000" algn="l" defTabSz="914400" rtl="0" eaLnBrk="1" latinLnBrk="0" hangingPunct="1">
+              <a:defRPr sz="1800" kern="1200">
+                <a:solidFill>
+                  <a:schemeClr val="tx1"/>
+                </a:solidFill>
+                <a:latin typeface="+mn-lt"/>
+                <a:ea typeface="+mn-ea"/>
+                <a:cs typeface="+mn-cs"/>
+              </a:defRPr>
+            </a:lvl6pPr>
+            <a:lvl7pPr marL="2743200" algn="l" defTabSz="914400" rtl="0" eaLnBrk="1" latinLnBrk="0" hangingPunct="1">
+              <a:defRPr sz="1800" kern="1200">
+                <a:solidFill>
+                  <a:schemeClr val="tx1"/>
+                </a:solidFill>
+                <a:latin typeface="+mn-lt"/>
+                <a:ea typeface="+mn-ea"/>
+                <a:cs typeface="+mn-cs"/>
+              </a:defRPr>
+            </a:lvl7pPr>
+            <a:lvl8pPr marL="3200400" algn="l" defTabSz="914400" rtl="0" eaLnBrk="1" latinLnBrk="0" hangingPunct="1">
+              <a:defRPr sz="1800" kern="1200">
+                <a:solidFill>
+                  <a:schemeClr val="tx1"/>
+                </a:solidFill>
+                <a:latin typeface="+mn-lt"/>
+                <a:ea typeface="+mn-ea"/>
+                <a:cs typeface="+mn-cs"/>
+              </a:defRPr>
+            </a:lvl8pPr>
+            <a:lvl9pPr marL="3657600" algn="l" defTabSz="914400" rtl="0" eaLnBrk="1" latinLnBrk="0" hangingPunct="1">
+              <a:defRPr sz="1800" kern="1200">
+                <a:solidFill>
+                  <a:schemeClr val="tx1"/>
+                </a:solidFill>
+                <a:latin typeface="+mn-lt"/>
+                <a:ea typeface="+mn-ea"/>
+                <a:cs typeface="+mn-cs"/>
+              </a:defRPr>
+            </a:lvl9pPr>
+          </a:lstStyle>
+          <a:p>
+            <a:pPr>
+              <a:defRPr/>
+            </a:pPr>
+            <a:r>
+              <a:rPr lang="de-DE" noProof="1">
+                <a:solidFill>
+                  <a:srgbClr val="C4B9C8"/>
+                </a:solidFill>
+                <a:latin typeface="Arial"/>
+                <a:ea typeface="Calibri"/>
+                <a:cs typeface="Arial"/>
+              </a:rPr>
+              <a:t>Technology Management</a:t>
+            </a:r>
+            <a:endParaRPr lang="de-DE" noProof="1">
+              <a:solidFill>
+                <a:schemeClr val="tx1">
+                  <a:lumMod val="75000"/>
+                  <a:lumOff val="25000"/>
+                </a:schemeClr>
+              </a:solidFill>
+              <a:latin typeface="Arial"/>
+              <a:ea typeface="Calibri"/>
+              <a:cs typeface="Arial"/>
+            </a:endParaRPr>
+          </a:p>
+        </p:txBody>
+      </p:sp>
+      <p:sp>
+        <p:nvSpPr>
+          <p:cNvPr id="10" name="Inhaltsplatzhalter 6">
+            <a:extLst>
+              <a:ext uri="{FF2B5EF4-FFF2-40B4-BE49-F238E27FC236}">
+                <a16:creationId xmlns:a16="http://schemas.microsoft.com/office/drawing/2014/main" id="{75E3CC44-9076-4B18-C827-8A5C34E58CBF}"/>
+              </a:ext>
+            </a:extLst>
+          </p:cNvPr>
+          <p:cNvSpPr txBox="1">
+            <a:spLocks/>
+          </p:cNvSpPr>
+          <p:nvPr/>
+        </p:nvSpPr>
+        <p:spPr>
+          <a:xfrm>
+            <a:off x="4329605" y="1420590"/>
+            <a:ext cx="3532789" cy="4573586"/>
+          </a:xfrm>
+          <a:prstGeom prst="rect">
+            <a:avLst/>
+          </a:prstGeom>
+        </p:spPr>
+        <p:txBody>
+          <a:bodyPr vert="horz" lIns="91440" tIns="45720" rIns="91440" bIns="45720" rtlCol="0">
+            <a:normAutofit/>
+          </a:bodyPr>
+          <a:lstStyle>
+            <a:lvl1pPr marL="228600" indent="-228600" algn="l" defTabSz="914400" rtl="0" eaLnBrk="1" latinLnBrk="0" hangingPunct="1">
+              <a:lnSpc>
+                <a:spcPct val="90000"/>
+              </a:lnSpc>
+              <a:spcBef>
+                <a:spcPts val="1000"/>
+              </a:spcBef>
+              <a:buClr>
+                <a:schemeClr val="accent1"/>
+              </a:buClr>
+              <a:buFont typeface="Arial" panose="020B0604020202020204" pitchFamily="34" charset="0"/>
+              <a:buChar char="•"/>
+              <a:defRPr sz="2000" b="0" i="0" kern="1200">
+                <a:solidFill>
+                  <a:schemeClr val="tx1"/>
+                </a:solidFill>
+                <a:latin typeface="Arial" panose="020B0604020202020204" pitchFamily="34" charset="0"/>
+                <a:ea typeface="+mn-ea"/>
+                <a:cs typeface="+mn-cs"/>
+              </a:defRPr>
+            </a:lvl1pPr>
+            <a:lvl2pPr marL="685800" indent="-228600" algn="l" defTabSz="914400" rtl="0" eaLnBrk="1" latinLnBrk="0" hangingPunct="1">
+              <a:lnSpc>
+                <a:spcPct val="90000"/>
+              </a:lnSpc>
+              <a:spcBef>
+                <a:spcPts val="500"/>
+              </a:spcBef>
+              <a:buClr>
+                <a:schemeClr val="accent1"/>
+              </a:buClr>
+              <a:buFont typeface="Arial" panose="020B0604020202020204" pitchFamily="34" charset="0"/>
+              <a:buChar char="•"/>
+              <a:defRPr sz="1800" b="0" i="0" kern="1200">
+                <a:solidFill>
+                  <a:schemeClr val="tx1"/>
+                </a:solidFill>
+                <a:latin typeface="Arial" panose="020B0604020202020204" pitchFamily="34" charset="0"/>
+                <a:ea typeface="+mn-ea"/>
+                <a:cs typeface="+mn-cs"/>
+              </a:defRPr>
+            </a:lvl2pPr>
+            <a:lvl3pPr marL="1143000" indent="-228600" algn="l" defTabSz="914400" rtl="0" eaLnBrk="1" latinLnBrk="0" hangingPunct="1">
+              <a:lnSpc>
+                <a:spcPct val="90000"/>
+              </a:lnSpc>
+              <a:spcBef>
+                <a:spcPts val="500"/>
+              </a:spcBef>
+              <a:buClr>
+                <a:schemeClr val="accent1"/>
+              </a:buClr>
+              <a:buFont typeface="Arial" panose="020B0604020202020204" pitchFamily="34" charset="0"/>
+              <a:buChar char="•"/>
+              <a:defRPr sz="1600" b="0" i="0" kern="1200">
+                <a:solidFill>
+                  <a:schemeClr val="tx1"/>
+                </a:solidFill>
+                <a:latin typeface="Arial" panose="020B0604020202020204" pitchFamily="34" charset="0"/>
+                <a:ea typeface="+mn-ea"/>
+                <a:cs typeface="+mn-cs"/>
+              </a:defRPr>
+            </a:lvl3pPr>
+            <a:lvl4pPr marL="1600200" indent="-228600" algn="l" defTabSz="914400" rtl="0" eaLnBrk="1" latinLnBrk="0" hangingPunct="1">
+              <a:lnSpc>
+                <a:spcPct val="90000"/>
+              </a:lnSpc>
+              <a:spcBef>
+                <a:spcPts val="500"/>
+              </a:spcBef>
+              <a:buClr>
+                <a:schemeClr val="accent1"/>
+              </a:buClr>
+              <a:buFont typeface="Arial" panose="020B0604020202020204" pitchFamily="34" charset="0"/>
+              <a:buChar char="•"/>
+              <a:defRPr sz="1400" b="0" i="0" kern="1200">
+                <a:solidFill>
+                  <a:schemeClr val="tx1"/>
+                </a:solidFill>
+                <a:latin typeface="Arial" panose="020B0604020202020204" pitchFamily="34" charset="0"/>
+                <a:ea typeface="+mn-ea"/>
+                <a:cs typeface="+mn-cs"/>
+              </a:defRPr>
+            </a:lvl4pPr>
+            <a:lvl5pPr marL="2057400" indent="-228600" algn="l" defTabSz="914400" rtl="0" eaLnBrk="1" latinLnBrk="0" hangingPunct="1">
+              <a:lnSpc>
+                <a:spcPct val="90000"/>
+              </a:lnSpc>
+              <a:spcBef>
+                <a:spcPts val="500"/>
+              </a:spcBef>
+              <a:buClr>
+                <a:schemeClr val="accent1"/>
+              </a:buClr>
+              <a:buFont typeface="Arial" panose="020B0604020202020204" pitchFamily="34" charset="0"/>
+              <a:buChar char="•"/>
+              <a:defRPr sz="1400" b="0" i="0" kern="1200">
+                <a:solidFill>
+                  <a:schemeClr val="tx1"/>
+                </a:solidFill>
+                <a:latin typeface="Arial" panose="020B0604020202020204" pitchFamily="34" charset="0"/>
+                <a:ea typeface="+mn-ea"/>
+                <a:cs typeface="+mn-cs"/>
+              </a:defRPr>
+            </a:lvl5pPr>
+            <a:lvl6pPr marL="2514600" indent="-228600" algn="l" defTabSz="914400" rtl="0" eaLnBrk="1" latinLnBrk="0" hangingPunct="1">
+              <a:lnSpc>
+                <a:spcPct val="90000"/>
+              </a:lnSpc>
+              <a:spcBef>
+                <a:spcPts val="500"/>
+              </a:spcBef>
+              <a:buFont typeface="Arial" panose="020B0604020202020204" pitchFamily="34" charset="0"/>
+              <a:buChar char="•"/>
+              <a:defRPr sz="1800" kern="1200">
+                <a:solidFill>
+                  <a:schemeClr val="tx1"/>
+                </a:solidFill>
+                <a:latin typeface="+mn-lt"/>
+                <a:ea typeface="+mn-ea"/>
+                <a:cs typeface="+mn-cs"/>
+              </a:defRPr>
+            </a:lvl6pPr>
+            <a:lvl7pPr marL="2971800" indent="-228600" algn="l" defTabSz="914400" rtl="0" eaLnBrk="1" latinLnBrk="0" hangingPunct="1">
+              <a:lnSpc>
+                <a:spcPct val="90000"/>
+              </a:lnSpc>
+              <a:spcBef>
+                <a:spcPts val="500"/>
+              </a:spcBef>
+              <a:buFont typeface="Arial" panose="020B0604020202020204" pitchFamily="34" charset="0"/>
+              <a:buChar char="•"/>
+              <a:defRPr sz="1800" kern="1200">
+                <a:solidFill>
+                  <a:schemeClr val="tx1"/>
+                </a:solidFill>
+                <a:latin typeface="+mn-lt"/>
+                <a:ea typeface="+mn-ea"/>
+                <a:cs typeface="+mn-cs"/>
+              </a:defRPr>
+            </a:lvl7pPr>
+            <a:lvl8pPr marL="3429000" indent="-228600" algn="l" defTabSz="914400" rtl="0" eaLnBrk="1" latinLnBrk="0" hangingPunct="1">
+              <a:lnSpc>
+                <a:spcPct val="90000"/>
+              </a:lnSpc>
+              <a:spcBef>
+                <a:spcPts val="500"/>
+              </a:spcBef>
+              <a:buFont typeface="Arial" panose="020B0604020202020204" pitchFamily="34" charset="0"/>
+              <a:buChar char="•"/>
+              <a:defRPr sz="1800" kern="1200">
+                <a:solidFill>
+                  <a:schemeClr val="tx1"/>
+                </a:solidFill>
+                <a:latin typeface="+mn-lt"/>
+                <a:ea typeface="+mn-ea"/>
+                <a:cs typeface="+mn-cs"/>
+              </a:defRPr>
+            </a:lvl8pPr>
+            <a:lvl9pPr marL="3886200" indent="-228600" algn="l" defTabSz="914400" rtl="0" eaLnBrk="1" latinLnBrk="0" hangingPunct="1">
+              <a:lnSpc>
+                <a:spcPct val="90000"/>
+              </a:lnSpc>
+              <a:spcBef>
+                <a:spcPts val="500"/>
+              </a:spcBef>
+              <a:buFont typeface="Arial" panose="020B0604020202020204" pitchFamily="34" charset="0"/>
+              <a:buChar char="•"/>
+              <a:defRPr sz="1800" kern="1200">
+                <a:solidFill>
+                  <a:schemeClr val="tx1"/>
+                </a:solidFill>
+                <a:latin typeface="+mn-lt"/>
+                <a:ea typeface="+mn-ea"/>
+                <a:cs typeface="+mn-cs"/>
+              </a:defRPr>
+            </a:lvl9pPr>
+          </a:lstStyle>
+          <a:p>
+            <a:r>
+              <a:rPr lang="en-US" b="1"/>
+              <a:t>Produktdifferenzierung</a:t>
+            </a:r>
+          </a:p>
+          <a:p>
+            <a:r>
+              <a:rPr lang="en-US"/>
+              <a:t>Die </a:t>
+            </a:r>
+            <a:r>
+              <a:rPr lang="en-US" b="1"/>
+              <a:t>Kernstrategie</a:t>
+            </a:r>
+            <a:r>
+              <a:rPr lang="en-US"/>
+              <a:t> von Porsche. Einzigartigkeit durch technologische Exzellenz, ikonisches Design und ein unverwechselbares Heritage. Ziel ist die maximale </a:t>
+            </a:r>
+            <a:r>
+              <a:rPr lang="en-US" b="1"/>
+              <a:t>Zahlungsbereitschaft</a:t>
+            </a:r>
+            <a:r>
+              <a:rPr lang="en-US"/>
+              <a:t> durch emotionalen Mehrwert.</a:t>
+            </a:r>
+          </a:p>
+        </p:txBody>
+      </p:sp>
+      <p:sp>
+        <p:nvSpPr>
+          <p:cNvPr id="11" name="Inhaltsplatzhalter 6">
+            <a:extLst>
+              <a:ext uri="{FF2B5EF4-FFF2-40B4-BE49-F238E27FC236}">
+                <a16:creationId xmlns:a16="http://schemas.microsoft.com/office/drawing/2014/main" id="{FBFF8DFF-3547-9578-7D9A-EC151B477D80}"/>
+              </a:ext>
+            </a:extLst>
+          </p:cNvPr>
+          <p:cNvSpPr txBox="1">
+            <a:spLocks/>
+          </p:cNvSpPr>
+          <p:nvPr/>
+        </p:nvSpPr>
+        <p:spPr>
+          <a:xfrm>
+            <a:off x="7862394" y="1420701"/>
+            <a:ext cx="3532789" cy="4573586"/>
+          </a:xfrm>
+          <a:prstGeom prst="rect">
+            <a:avLst/>
+          </a:prstGeom>
+        </p:spPr>
+        <p:txBody>
+          <a:bodyPr vert="horz" lIns="91440" tIns="45720" rIns="91440" bIns="45720" rtlCol="0">
+            <a:normAutofit/>
+          </a:bodyPr>
+          <a:lstStyle>
+            <a:lvl1pPr marL="228600" indent="-228600" algn="l" defTabSz="914400" rtl="0" eaLnBrk="1" latinLnBrk="0" hangingPunct="1">
+              <a:lnSpc>
+                <a:spcPct val="90000"/>
+              </a:lnSpc>
+              <a:spcBef>
+                <a:spcPts val="1000"/>
+              </a:spcBef>
+              <a:buClr>
+                <a:schemeClr val="accent1"/>
+              </a:buClr>
+              <a:buFont typeface="Arial" panose="020B0604020202020204" pitchFamily="34" charset="0"/>
+              <a:buChar char="•"/>
+              <a:defRPr sz="2000" b="0" i="0" kern="1200">
+                <a:solidFill>
+                  <a:schemeClr val="tx1"/>
+                </a:solidFill>
+                <a:latin typeface="Arial" panose="020B0604020202020204" pitchFamily="34" charset="0"/>
+                <a:ea typeface="+mn-ea"/>
+                <a:cs typeface="+mn-cs"/>
+              </a:defRPr>
+            </a:lvl1pPr>
+            <a:lvl2pPr marL="685800" indent="-228600" algn="l" defTabSz="914400" rtl="0" eaLnBrk="1" latinLnBrk="0" hangingPunct="1">
+              <a:lnSpc>
+                <a:spcPct val="90000"/>
+              </a:lnSpc>
+              <a:spcBef>
+                <a:spcPts val="500"/>
+              </a:spcBef>
+              <a:buClr>
+                <a:schemeClr val="accent1"/>
+              </a:buClr>
+              <a:buFont typeface="Arial" panose="020B0604020202020204" pitchFamily="34" charset="0"/>
+              <a:buChar char="•"/>
+              <a:defRPr sz="1800" b="0" i="0" kern="1200">
+                <a:solidFill>
+                  <a:schemeClr val="tx1"/>
+                </a:solidFill>
+                <a:latin typeface="Arial" panose="020B0604020202020204" pitchFamily="34" charset="0"/>
+                <a:ea typeface="+mn-ea"/>
+                <a:cs typeface="+mn-cs"/>
+              </a:defRPr>
+            </a:lvl2pPr>
+            <a:lvl3pPr marL="1143000" indent="-228600" algn="l" defTabSz="914400" rtl="0" eaLnBrk="1" latinLnBrk="0" hangingPunct="1">
+              <a:lnSpc>
+                <a:spcPct val="90000"/>
+              </a:lnSpc>
+              <a:spcBef>
+                <a:spcPts val="500"/>
+              </a:spcBef>
+              <a:buClr>
+                <a:schemeClr val="accent1"/>
+              </a:buClr>
+              <a:buFont typeface="Arial" panose="020B0604020202020204" pitchFamily="34" charset="0"/>
+              <a:buChar char="•"/>
+              <a:defRPr sz="1600" b="0" i="0" kern="1200">
+                <a:solidFill>
+                  <a:schemeClr val="tx1"/>
+                </a:solidFill>
+                <a:latin typeface="Arial" panose="020B0604020202020204" pitchFamily="34" charset="0"/>
+                <a:ea typeface="+mn-ea"/>
+                <a:cs typeface="+mn-cs"/>
+              </a:defRPr>
+            </a:lvl3pPr>
+            <a:lvl4pPr marL="1600200" indent="-228600" algn="l" defTabSz="914400" rtl="0" eaLnBrk="1" latinLnBrk="0" hangingPunct="1">
+              <a:lnSpc>
+                <a:spcPct val="90000"/>
+              </a:lnSpc>
+              <a:spcBef>
+                <a:spcPts val="500"/>
+              </a:spcBef>
+              <a:buClr>
+                <a:schemeClr val="accent1"/>
+              </a:buClr>
+              <a:buFont typeface="Arial" panose="020B0604020202020204" pitchFamily="34" charset="0"/>
+              <a:buChar char="•"/>
+              <a:defRPr sz="1400" b="0" i="0" kern="1200">
+                <a:solidFill>
+                  <a:schemeClr val="tx1"/>
+                </a:solidFill>
+                <a:latin typeface="Arial" panose="020B0604020202020204" pitchFamily="34" charset="0"/>
+                <a:ea typeface="+mn-ea"/>
+                <a:cs typeface="+mn-cs"/>
+              </a:defRPr>
+            </a:lvl4pPr>
+            <a:lvl5pPr marL="2057400" indent="-228600" algn="l" defTabSz="914400" rtl="0" eaLnBrk="1" latinLnBrk="0" hangingPunct="1">
+              <a:lnSpc>
+                <a:spcPct val="90000"/>
+              </a:lnSpc>
+              <a:spcBef>
+                <a:spcPts val="500"/>
+              </a:spcBef>
+              <a:buClr>
+                <a:schemeClr val="accent1"/>
+              </a:buClr>
+              <a:buFont typeface="Arial" panose="020B0604020202020204" pitchFamily="34" charset="0"/>
+              <a:buChar char="•"/>
+              <a:defRPr sz="1400" b="0" i="0" kern="1200">
+                <a:solidFill>
+                  <a:schemeClr val="tx1"/>
+                </a:solidFill>
+                <a:latin typeface="Arial" panose="020B0604020202020204" pitchFamily="34" charset="0"/>
+                <a:ea typeface="+mn-ea"/>
+                <a:cs typeface="+mn-cs"/>
+              </a:defRPr>
+            </a:lvl5pPr>
+            <a:lvl6pPr marL="2514600" indent="-228600" algn="l" defTabSz="914400" rtl="0" eaLnBrk="1" latinLnBrk="0" hangingPunct="1">
+              <a:lnSpc>
+                <a:spcPct val="90000"/>
+              </a:lnSpc>
+              <a:spcBef>
+                <a:spcPts val="500"/>
+              </a:spcBef>
+              <a:buFont typeface="Arial" panose="020B0604020202020204" pitchFamily="34" charset="0"/>
+              <a:buChar char="•"/>
+              <a:defRPr sz="1800" kern="1200">
+                <a:solidFill>
+                  <a:schemeClr val="tx1"/>
+                </a:solidFill>
+                <a:latin typeface="+mn-lt"/>
+                <a:ea typeface="+mn-ea"/>
+                <a:cs typeface="+mn-cs"/>
+              </a:defRPr>
+            </a:lvl6pPr>
+            <a:lvl7pPr marL="2971800" indent="-228600" algn="l" defTabSz="914400" rtl="0" eaLnBrk="1" latinLnBrk="0" hangingPunct="1">
+              <a:lnSpc>
+                <a:spcPct val="90000"/>
+              </a:lnSpc>
+              <a:spcBef>
+                <a:spcPts val="500"/>
+              </a:spcBef>
+              <a:buFont typeface="Arial" panose="020B0604020202020204" pitchFamily="34" charset="0"/>
+              <a:buChar char="•"/>
+              <a:defRPr sz="1800" kern="1200">
+                <a:solidFill>
+                  <a:schemeClr val="tx1"/>
+                </a:solidFill>
+                <a:latin typeface="+mn-lt"/>
+                <a:ea typeface="+mn-ea"/>
+                <a:cs typeface="+mn-cs"/>
+              </a:defRPr>
+            </a:lvl7pPr>
+            <a:lvl8pPr marL="3429000" indent="-228600" algn="l" defTabSz="914400" rtl="0" eaLnBrk="1" latinLnBrk="0" hangingPunct="1">
+              <a:lnSpc>
+                <a:spcPct val="90000"/>
+              </a:lnSpc>
+              <a:spcBef>
+                <a:spcPts val="500"/>
+              </a:spcBef>
+              <a:buFont typeface="Arial" panose="020B0604020202020204" pitchFamily="34" charset="0"/>
+              <a:buChar char="•"/>
+              <a:defRPr sz="1800" kern="1200">
+                <a:solidFill>
+                  <a:schemeClr val="tx1"/>
+                </a:solidFill>
+                <a:latin typeface="+mn-lt"/>
+                <a:ea typeface="+mn-ea"/>
+                <a:cs typeface="+mn-cs"/>
+              </a:defRPr>
+            </a:lvl8pPr>
+            <a:lvl9pPr marL="3886200" indent="-228600" algn="l" defTabSz="914400" rtl="0" eaLnBrk="1" latinLnBrk="0" hangingPunct="1">
+              <a:lnSpc>
+                <a:spcPct val="90000"/>
+              </a:lnSpc>
+              <a:spcBef>
+                <a:spcPts val="500"/>
+              </a:spcBef>
+              <a:buFont typeface="Arial" panose="020B0604020202020204" pitchFamily="34" charset="0"/>
+              <a:buChar char="•"/>
+              <a:defRPr sz="1800" kern="1200">
+                <a:solidFill>
+                  <a:schemeClr val="tx1"/>
+                </a:solidFill>
+                <a:latin typeface="+mn-lt"/>
+                <a:ea typeface="+mn-ea"/>
+                <a:cs typeface="+mn-cs"/>
+              </a:defRPr>
+            </a:lvl9pPr>
+          </a:lstStyle>
+          <a:p>
+            <a:r>
+              <a:rPr lang="en-US" b="1"/>
+              <a:t>Konzentration auf Schwerpunkte</a:t>
+            </a:r>
+          </a:p>
+          <a:p>
+            <a:r>
+              <a:rPr lang="en-US"/>
+              <a:t>Fokussierung auf das </a:t>
+            </a:r>
+            <a:r>
+              <a:rPr lang="en-US" b="1"/>
+              <a:t>Luxus- und Hochleistungssegment</a:t>
+            </a:r>
+            <a:r>
+              <a:rPr lang="en-US"/>
+              <a:t>. Porsche bedient keine breiten Massenmärkte, sondern konzentriert sich konsequent auf die exklusive Nische von </a:t>
+            </a:r>
+            <a:r>
+              <a:rPr lang="en-US" b="1"/>
+              <a:t>High-Net-Worth Individuals</a:t>
+            </a:r>
+            <a:r>
+              <a:rPr lang="en-US"/>
+              <a:t>.</a:t>
+            </a:r>
+          </a:p>
+        </p:txBody>
+      </p:sp>
+    </p:spTree>
+    <p:extLst>
+      <p:ext uri="{BB962C8B-B14F-4D97-AF65-F5344CB8AC3E}">
+        <p14:creationId xmlns:p14="http://schemas.microsoft.com/office/powerpoint/2010/main" val="4041183091"/>
+      </p:ext>
+    </p:extLst>
+  </p:cSld>
+  <p:clrMapOvr>
+    <a:masterClrMapping/>
+  </p:clrMapOvr>
+</p:sld>
+</file>
+
+<file path=ppt/slides/slide15.xml><?xml version="1.0" encoding="utf-8"?>
+<p:sld xmlns:a="http://schemas.openxmlformats.org/drawingml/2006/main" xmlns:r="http://schemas.openxmlformats.org/officeDocument/2006/relationships" xmlns:p="http://schemas.openxmlformats.org/presentationml/2006/main">
+  <p:cSld>
+    <p:spTree>
+      <p:nvGrpSpPr>
+        <p:cNvPr id="1" name="">
+          <a:extLst>
+            <a:ext uri="{FF2B5EF4-FFF2-40B4-BE49-F238E27FC236}">
+              <a16:creationId xmlns:a16="http://schemas.microsoft.com/office/drawing/2014/main" id="{E2D5B948-30AC-4053-8100-22F9BF4A6552}"/>
+            </a:ext>
+          </a:extLst>
+        </p:cNvPr>
+        <p:cNvGrpSpPr/>
+        <p:nvPr/>
+      </p:nvGrpSpPr>
+      <p:grpSpPr>
+        <a:xfrm>
+          <a:off x="0" y="0"/>
+          <a:ext cx="0" cy="0"/>
+          <a:chOff x="0" y="0"/>
+          <a:chExt cx="0" cy="0"/>
+        </a:xfrm>
+      </p:grpSpPr>
+      <p:sp>
+        <p:nvSpPr>
+          <p:cNvPr id="6" name="Titel 5">
+            <a:extLst>
+              <a:ext uri="{FF2B5EF4-FFF2-40B4-BE49-F238E27FC236}">
+                <a16:creationId xmlns:a16="http://schemas.microsoft.com/office/drawing/2014/main" id="{20371492-7E91-95D5-BF32-D70E7D114C6B}"/>
+              </a:ext>
+            </a:extLst>
+          </p:cNvPr>
+          <p:cNvSpPr>
+            <a:spLocks noGrp="1"/>
+          </p:cNvSpPr>
+          <p:nvPr>
+            <p:ph type="title"/>
+          </p:nvPr>
+        </p:nvSpPr>
+        <p:spPr/>
+        <p:txBody>
+          <a:bodyPr>
+            <a:normAutofit/>
+          </a:bodyPr>
+          <a:lstStyle/>
+          <a:p>
+            <a:pPr algn="just"/>
+            <a:r>
+              <a:rPr lang="de-DE" b="1" noProof="1"/>
+              <a:t>Schlüsseltechnologien</a:t>
+            </a:r>
+          </a:p>
+        </p:txBody>
+      </p:sp>
+      <p:sp>
+        <p:nvSpPr>
+          <p:cNvPr id="5" name="Datumsplatzhalter 4">
+            <a:extLst>
+              <a:ext uri="{FF2B5EF4-FFF2-40B4-BE49-F238E27FC236}">
+                <a16:creationId xmlns:a16="http://schemas.microsoft.com/office/drawing/2014/main" id="{24094671-2BFD-E203-EE0F-7CA00426E8DE}"/>
+              </a:ext>
+            </a:extLst>
+          </p:cNvPr>
+          <p:cNvSpPr>
+            <a:spLocks noGrp="1"/>
+          </p:cNvSpPr>
+          <p:nvPr>
+            <p:ph type="dt" sz="half" idx="14"/>
+          </p:nvPr>
+        </p:nvSpPr>
+        <p:spPr/>
+        <p:txBody>
+          <a:bodyPr/>
+          <a:lstStyle/>
+          <a:p>
+            <a:fld id="{078773AF-2259-0B42-AEF5-3C6C7EBEB81F}" type="datetime1">
+              <a:rPr lang="en-US" noProof="1" smtClean="0"/>
+              <a:t>5/17/26</a:t>
+            </a:fld>
+            <a:endParaRPr lang="de-DE" noProof="1"/>
+          </a:p>
+        </p:txBody>
+      </p:sp>
+      <p:sp>
+        <p:nvSpPr>
+          <p:cNvPr id="12" name="Foliennummernplatzhalter 11">
+            <a:extLst>
+              <a:ext uri="{FF2B5EF4-FFF2-40B4-BE49-F238E27FC236}">
+                <a16:creationId xmlns:a16="http://schemas.microsoft.com/office/drawing/2014/main" id="{4C63B2EA-BD4B-88E0-A35A-504AAD5DFC64}"/>
+              </a:ext>
+            </a:extLst>
+          </p:cNvPr>
+          <p:cNvSpPr>
+            <a:spLocks noGrp="1"/>
+          </p:cNvSpPr>
+          <p:nvPr>
+            <p:ph type="sldNum" sz="quarter" idx="16"/>
+          </p:nvPr>
+        </p:nvSpPr>
+        <p:spPr/>
+        <p:txBody>
+          <a:bodyPr/>
+          <a:lstStyle/>
+          <a:p>
+            <a:fld id="{006C6BFE-10C3-7B49-A3EE-08AD7A863B95}" type="slidenum">
+              <a:rPr lang="de-DE" noProof="1" smtClean="0"/>
+              <a:pPr/>
+              <a:t>15</a:t>
+            </a:fld>
+            <a:endParaRPr lang="de-DE" noProof="1"/>
+          </a:p>
+        </p:txBody>
+      </p:sp>
+      <p:sp>
+        <p:nvSpPr>
+          <p:cNvPr id="2" name="TextBox 1">
+            <a:extLst>
+              <a:ext uri="{FF2B5EF4-FFF2-40B4-BE49-F238E27FC236}">
+                <a16:creationId xmlns:a16="http://schemas.microsoft.com/office/drawing/2014/main" id="{319560E4-51D3-5480-C1ED-747754632334}"/>
+              </a:ext>
+            </a:extLst>
+          </p:cNvPr>
+          <p:cNvSpPr txBox="1"/>
+          <p:nvPr/>
+        </p:nvSpPr>
+        <p:spPr>
+          <a:xfrm>
+            <a:off x="5710239" y="6356350"/>
+            <a:ext cx="495300" cy="369332"/>
+          </a:xfrm>
+          <a:prstGeom prst="rect">
+            <a:avLst/>
+          </a:prstGeom>
+          <a:noFill/>
+        </p:spPr>
+        <p:txBody>
+          <a:bodyPr wrap="square" rtlCol="0">
+            <a:spAutoFit/>
+          </a:bodyPr>
+          <a:lstStyle/>
+          <a:p>
+            <a:r>
+              <a:rPr lang="de-DE" noProof="1"/>
+              <a:t>[1]</a:t>
+            </a:r>
+          </a:p>
+        </p:txBody>
+      </p:sp>
+      <p:sp>
+        <p:nvSpPr>
+          <p:cNvPr id="3" name="Fußzeilenplatzhalter 4">
+            <a:extLst>
+              <a:ext uri="{FF2B5EF4-FFF2-40B4-BE49-F238E27FC236}">
+                <a16:creationId xmlns:a16="http://schemas.microsoft.com/office/drawing/2014/main" id="{EA61F9AA-CB03-8F80-9F24-FCDB13EB646D}"/>
+              </a:ext>
+            </a:extLst>
+          </p:cNvPr>
+          <p:cNvSpPr txBox="1">
+            <a:spLocks/>
+          </p:cNvSpPr>
+          <p:nvPr/>
+        </p:nvSpPr>
+        <p:spPr>
+          <a:xfrm>
+            <a:off x="6417733" y="6356239"/>
+            <a:ext cx="5291667" cy="365125"/>
+          </a:xfrm>
+          <a:prstGeom prst="rect">
+            <a:avLst/>
+          </a:prstGeom>
+        </p:spPr>
+        <p:txBody>
+          <a:bodyPr vert="horz" lIns="91440" tIns="45720" rIns="91440" bIns="45720" rtlCol="0" anchor="ctr">
+            <a:normAutofit/>
+          </a:bodyPr>
+          <a:lstStyle>
+            <a:defPPr>
+              <a:defRPr lang="de-DE"/>
+            </a:defPPr>
+            <a:lvl1pPr marL="0" algn="l" defTabSz="914400" rtl="0" eaLnBrk="1" latinLnBrk="0" hangingPunct="1">
+              <a:defRPr sz="1000" kern="1200">
+                <a:solidFill>
+                  <a:schemeClr val="bg2">
+                    <a:lumMod val="90000"/>
+                  </a:schemeClr>
+                </a:solidFill>
+                <a:latin typeface="Arial" panose="020B0604020202020204" pitchFamily="34" charset="0"/>
+                <a:ea typeface="+mn-ea"/>
+                <a:cs typeface="Arial" panose="020B0604020202020204" pitchFamily="34" charset="0"/>
+              </a:defRPr>
+            </a:lvl1pPr>
+            <a:lvl2pPr marL="457200" algn="l" defTabSz="914400" rtl="0" eaLnBrk="1" latinLnBrk="0" hangingPunct="1">
+              <a:defRPr sz="1800" kern="1200">
+                <a:solidFill>
+                  <a:schemeClr val="tx1"/>
+                </a:solidFill>
+                <a:latin typeface="+mn-lt"/>
+                <a:ea typeface="+mn-ea"/>
+                <a:cs typeface="+mn-cs"/>
+              </a:defRPr>
+            </a:lvl2pPr>
+            <a:lvl3pPr marL="914400" algn="l" defTabSz="914400" rtl="0" eaLnBrk="1" latinLnBrk="0" hangingPunct="1">
+              <a:defRPr sz="1800" kern="1200">
+                <a:solidFill>
+                  <a:schemeClr val="tx1"/>
+                </a:solidFill>
+                <a:latin typeface="+mn-lt"/>
+                <a:ea typeface="+mn-ea"/>
+                <a:cs typeface="+mn-cs"/>
+              </a:defRPr>
+            </a:lvl3pPr>
+            <a:lvl4pPr marL="1371600" algn="l" defTabSz="914400" rtl="0" eaLnBrk="1" latinLnBrk="0" hangingPunct="1">
+              <a:defRPr sz="1800" kern="1200">
+                <a:solidFill>
+                  <a:schemeClr val="tx1"/>
+                </a:solidFill>
+                <a:latin typeface="+mn-lt"/>
+                <a:ea typeface="+mn-ea"/>
+                <a:cs typeface="+mn-cs"/>
+              </a:defRPr>
+            </a:lvl4pPr>
+            <a:lvl5pPr marL="1828800" algn="l" defTabSz="914400" rtl="0" eaLnBrk="1" latinLnBrk="0" hangingPunct="1">
+              <a:defRPr sz="1800" kern="1200">
+                <a:solidFill>
+                  <a:schemeClr val="tx1"/>
+                </a:solidFill>
+                <a:latin typeface="+mn-lt"/>
+                <a:ea typeface="+mn-ea"/>
+                <a:cs typeface="+mn-cs"/>
+              </a:defRPr>
+            </a:lvl5pPr>
+            <a:lvl6pPr marL="2286000" algn="l" defTabSz="914400" rtl="0" eaLnBrk="1" latinLnBrk="0" hangingPunct="1">
+              <a:defRPr sz="1800" kern="1200">
+                <a:solidFill>
+                  <a:schemeClr val="tx1"/>
+                </a:solidFill>
+                <a:latin typeface="+mn-lt"/>
+                <a:ea typeface="+mn-ea"/>
+                <a:cs typeface="+mn-cs"/>
+              </a:defRPr>
+            </a:lvl6pPr>
+            <a:lvl7pPr marL="2743200" algn="l" defTabSz="914400" rtl="0" eaLnBrk="1" latinLnBrk="0" hangingPunct="1">
+              <a:defRPr sz="1800" kern="1200">
+                <a:solidFill>
+                  <a:schemeClr val="tx1"/>
+                </a:solidFill>
+                <a:latin typeface="+mn-lt"/>
+                <a:ea typeface="+mn-ea"/>
+                <a:cs typeface="+mn-cs"/>
+              </a:defRPr>
+            </a:lvl7pPr>
+            <a:lvl8pPr marL="3200400" algn="l" defTabSz="914400" rtl="0" eaLnBrk="1" latinLnBrk="0" hangingPunct="1">
+              <a:defRPr sz="1800" kern="1200">
+                <a:solidFill>
+                  <a:schemeClr val="tx1"/>
+                </a:solidFill>
+                <a:latin typeface="+mn-lt"/>
+                <a:ea typeface="+mn-ea"/>
+                <a:cs typeface="+mn-cs"/>
+              </a:defRPr>
+            </a:lvl8pPr>
+            <a:lvl9pPr marL="3657600" algn="l" defTabSz="914400" rtl="0" eaLnBrk="1" latinLnBrk="0" hangingPunct="1">
+              <a:defRPr sz="1800" kern="1200">
+                <a:solidFill>
+                  <a:schemeClr val="tx1"/>
+                </a:solidFill>
+                <a:latin typeface="+mn-lt"/>
+                <a:ea typeface="+mn-ea"/>
+                <a:cs typeface="+mn-cs"/>
+              </a:defRPr>
+            </a:lvl9pPr>
+          </a:lstStyle>
+          <a:p>
+            <a:pPr>
+              <a:defRPr/>
+            </a:pPr>
+            <a:endParaRPr lang="de-DE" noProof="1">
+              <a:solidFill>
+                <a:schemeClr val="tx1">
+                  <a:lumMod val="75000"/>
+                  <a:lumOff val="25000"/>
+                </a:schemeClr>
+              </a:solidFill>
+              <a:latin typeface="Arial"/>
+              <a:ea typeface="Calibri"/>
+              <a:cs typeface="Arial"/>
+            </a:endParaRPr>
+          </a:p>
+        </p:txBody>
+      </p:sp>
+      <p:sp>
+        <p:nvSpPr>
+          <p:cNvPr id="4" name="Footer Placeholder 3">
+            <a:extLst>
+              <a:ext uri="{FF2B5EF4-FFF2-40B4-BE49-F238E27FC236}">
+                <a16:creationId xmlns:a16="http://schemas.microsoft.com/office/drawing/2014/main" id="{EA8A7AF2-33C9-2B4B-6F81-54802870478C}"/>
+              </a:ext>
+            </a:extLst>
+          </p:cNvPr>
+          <p:cNvSpPr>
+            <a:spLocks noGrp="1"/>
+          </p:cNvSpPr>
+          <p:nvPr>
+            <p:ph type="ftr" sz="quarter" idx="15"/>
+          </p:nvPr>
+        </p:nvSpPr>
+        <p:spPr/>
+        <p:txBody>
+          <a:bodyPr/>
+          <a:lstStyle/>
+          <a:p>
+            <a:r>
+              <a:rPr lang="de-DE"/>
+              <a:t>Technology Management</a:t>
+            </a:r>
+          </a:p>
+        </p:txBody>
+      </p:sp>
+      <p:sp>
+        <p:nvSpPr>
+          <p:cNvPr id="8" name="Rectangle 7">
+            <a:extLst>
+              <a:ext uri="{FF2B5EF4-FFF2-40B4-BE49-F238E27FC236}">
+                <a16:creationId xmlns:a16="http://schemas.microsoft.com/office/drawing/2014/main" id="{ADDCEB08-4A65-7058-9EA0-152544EDE0E6}"/>
+              </a:ext>
+            </a:extLst>
+          </p:cNvPr>
+          <p:cNvSpPr/>
+          <p:nvPr/>
+        </p:nvSpPr>
+        <p:spPr>
+          <a:xfrm>
+            <a:off x="215901" y="1423915"/>
+            <a:ext cx="1972733" cy="4776821"/>
+          </a:xfrm>
+          <a:prstGeom prst="rect">
+            <a:avLst/>
+          </a:prstGeom>
+          <a:solidFill>
+            <a:schemeClr val="bg1"/>
+          </a:solidFill>
+          <a:ln w="57150" cap="flat">
+            <a:noFill/>
+            <a:prstDash val="solid"/>
+            <a:miter/>
+          </a:ln>
+          <a:effectLst>
+            <a:outerShdw blurRad="206677" dist="83281" dir="7860000" algn="ctr" rotWithShape="0">
+              <a:srgbClr val="C00000"/>
+            </a:outerShdw>
+          </a:effectLst>
+        </p:spPr>
+        <p:txBody>
+          <a:bodyPr rtlCol="0" anchor="ctr"/>
+          <a:lstStyle/>
+          <a:p>
+            <a:pPr algn="ctr"/>
+            <a:r>
+              <a:rPr lang="en-US" b="1" err="1">
+                <a:solidFill>
+                  <a:srgbClr val="000000"/>
+                </a:solidFill>
+              </a:rPr>
+              <a:t>Elektromobilität</a:t>
+            </a:r>
+            <a:endParaRPr lang="en-US" b="1">
+              <a:solidFill>
+                <a:srgbClr val="000000"/>
+              </a:solidFill>
+            </a:endParaRPr>
+          </a:p>
+          <a:p>
+            <a:pPr algn="ctr"/>
+            <a:endParaRPr lang="en-US" b="1">
+              <a:solidFill>
+                <a:srgbClr val="000000"/>
+              </a:solidFill>
+            </a:endParaRPr>
+          </a:p>
+          <a:p>
+            <a:pPr marL="285750" indent="-285750">
+              <a:buFont typeface="Arial" panose="020B0604020202020204" pitchFamily="34" charset="0"/>
+              <a:buChar char="•"/>
+            </a:pPr>
+            <a:r>
+              <a:rPr lang="en-US" err="1">
+                <a:solidFill>
+                  <a:srgbClr val="000000"/>
+                </a:solidFill>
+              </a:rPr>
+              <a:t>Hochleistungs-batterien</a:t>
+            </a:r>
+            <a:endParaRPr lang="en-US">
+              <a:solidFill>
+                <a:srgbClr val="000000"/>
+              </a:solidFill>
+            </a:endParaRPr>
+          </a:p>
+          <a:p>
+            <a:pPr marL="285750" indent="-285750">
+              <a:buFont typeface="Arial" panose="020B0604020202020204" pitchFamily="34" charset="0"/>
+              <a:buChar char="•"/>
+            </a:pPr>
+            <a:endParaRPr lang="en-US">
+              <a:solidFill>
+                <a:srgbClr val="000000"/>
+              </a:solidFill>
+            </a:endParaRPr>
+          </a:p>
+          <a:p>
+            <a:pPr marL="285750" indent="-285750">
+              <a:buFont typeface="Arial" panose="020B0604020202020204" pitchFamily="34" charset="0"/>
+              <a:buChar char="•"/>
+            </a:pPr>
+            <a:r>
+              <a:rPr lang="en-US" err="1">
+                <a:solidFill>
+                  <a:srgbClr val="000000"/>
+                </a:solidFill>
+              </a:rPr>
+              <a:t>Schnelllade-technologie</a:t>
+            </a:r>
+            <a:endParaRPr lang="en-US">
+              <a:solidFill>
+                <a:srgbClr val="000000"/>
+              </a:solidFill>
+            </a:endParaRPr>
+          </a:p>
+          <a:p>
+            <a:pPr marL="285750" indent="-285750">
+              <a:buFont typeface="Arial" panose="020B0604020202020204" pitchFamily="34" charset="0"/>
+              <a:buChar char="•"/>
+            </a:pPr>
+            <a:endParaRPr lang="en-US">
+              <a:solidFill>
+                <a:srgbClr val="000000"/>
+              </a:solidFill>
+            </a:endParaRPr>
+          </a:p>
+          <a:p>
+            <a:pPr marL="285750" indent="-285750">
+              <a:buFont typeface="Arial" panose="020B0604020202020204" pitchFamily="34" charset="0"/>
+              <a:buChar char="•"/>
+            </a:pPr>
+            <a:r>
+              <a:rPr lang="en-US" err="1">
+                <a:solidFill>
+                  <a:srgbClr val="000000"/>
+                </a:solidFill>
+              </a:rPr>
+              <a:t>Elektrische</a:t>
+            </a:r>
+            <a:r>
+              <a:rPr lang="en-US">
+                <a:solidFill>
+                  <a:srgbClr val="000000"/>
+                </a:solidFill>
+              </a:rPr>
+              <a:t> </a:t>
+            </a:r>
+            <a:br>
+              <a:rPr lang="en-US">
+                <a:solidFill>
+                  <a:srgbClr val="000000"/>
+                </a:solidFill>
+              </a:rPr>
+            </a:br>
+            <a:r>
+              <a:rPr lang="en-US" err="1">
+                <a:solidFill>
+                  <a:srgbClr val="000000"/>
+                </a:solidFill>
+              </a:rPr>
+              <a:t>Plattformen</a:t>
+            </a:r>
+            <a:endParaRPr lang="en-US">
+              <a:solidFill>
+                <a:srgbClr val="000000"/>
+              </a:solidFill>
+            </a:endParaRPr>
+          </a:p>
+          <a:p>
+            <a:pPr marL="285750" indent="-285750">
+              <a:buFont typeface="Arial" panose="020B0604020202020204" pitchFamily="34" charset="0"/>
+              <a:buChar char="•"/>
+            </a:pPr>
+            <a:endParaRPr lang="en-US">
+              <a:solidFill>
+                <a:srgbClr val="000000"/>
+              </a:solidFill>
+            </a:endParaRPr>
+          </a:p>
+          <a:p>
+            <a:pPr marL="285750" indent="-285750">
+              <a:buFont typeface="Arial" panose="020B0604020202020204" pitchFamily="34" charset="0"/>
+              <a:buChar char="•"/>
+            </a:pPr>
+            <a:r>
+              <a:rPr lang="en-US">
+                <a:solidFill>
+                  <a:srgbClr val="000000"/>
+                </a:solidFill>
+              </a:rPr>
+              <a:t>Thermo-management</a:t>
+            </a:r>
+          </a:p>
+          <a:p>
+            <a:pPr marL="285750" indent="-285750">
+              <a:buFont typeface="Arial" panose="020B0604020202020204" pitchFamily="34" charset="0"/>
+              <a:buChar char="•"/>
+            </a:pPr>
+            <a:endParaRPr lang="en-US" b="1">
+              <a:solidFill>
+                <a:srgbClr val="000000"/>
+              </a:solidFill>
+            </a:endParaRPr>
+          </a:p>
+          <a:p>
+            <a:endParaRPr lang="en-US" b="1">
+              <a:solidFill>
+                <a:srgbClr val="000000"/>
+              </a:solidFill>
+            </a:endParaRPr>
+          </a:p>
+          <a:p>
+            <a:pPr marL="285750" indent="-285750">
+              <a:buFont typeface="Arial" panose="020B0604020202020204" pitchFamily="34" charset="0"/>
+              <a:buChar char="•"/>
+            </a:pPr>
+            <a:endParaRPr lang="en-US" b="1">
+              <a:solidFill>
+                <a:srgbClr val="000000"/>
+              </a:solidFill>
+            </a:endParaRPr>
+          </a:p>
+        </p:txBody>
+      </p:sp>
+      <p:sp>
+        <p:nvSpPr>
+          <p:cNvPr id="9" name="Rectangle 8">
+            <a:extLst>
+              <a:ext uri="{FF2B5EF4-FFF2-40B4-BE49-F238E27FC236}">
+                <a16:creationId xmlns:a16="http://schemas.microsoft.com/office/drawing/2014/main" id="{6F2974A5-8AEC-EA53-86CC-C7DE52C97D65}"/>
+              </a:ext>
+            </a:extLst>
+          </p:cNvPr>
+          <p:cNvSpPr/>
+          <p:nvPr/>
+        </p:nvSpPr>
+        <p:spPr>
+          <a:xfrm>
+            <a:off x="2662767" y="1423915"/>
+            <a:ext cx="1972733" cy="4776821"/>
+          </a:xfrm>
+          <a:prstGeom prst="rect">
+            <a:avLst/>
+          </a:prstGeom>
+          <a:solidFill>
+            <a:schemeClr val="bg1"/>
+          </a:solidFill>
+          <a:ln w="57150" cap="flat">
+            <a:noFill/>
+            <a:prstDash val="solid"/>
+            <a:miter/>
+          </a:ln>
+          <a:effectLst>
+            <a:outerShdw blurRad="206677" dist="83281" dir="7860000" algn="ctr" rotWithShape="0">
+              <a:srgbClr val="C00000"/>
+            </a:outerShdw>
+          </a:effectLst>
+        </p:spPr>
+        <p:txBody>
+          <a:bodyPr rtlCol="0" anchor="ctr"/>
+          <a:lstStyle/>
+          <a:p>
+            <a:pPr algn="ctr"/>
+            <a:r>
+              <a:rPr lang="en-US" b="1">
+                <a:solidFill>
+                  <a:srgbClr val="000000"/>
+                </a:solidFill>
+              </a:rPr>
+              <a:t>Software &amp; </a:t>
+            </a:r>
+            <a:r>
+              <a:rPr lang="en-US" b="1" err="1">
+                <a:solidFill>
+                  <a:srgbClr val="000000"/>
+                </a:solidFill>
+              </a:rPr>
+              <a:t>Digitalisierung</a:t>
+            </a:r>
+            <a:endParaRPr lang="en-US" b="1">
+              <a:solidFill>
+                <a:srgbClr val="000000"/>
+              </a:solidFill>
+            </a:endParaRPr>
+          </a:p>
+          <a:p>
+            <a:pPr algn="ctr"/>
+            <a:endParaRPr lang="en-US" b="1">
+              <a:solidFill>
+                <a:srgbClr val="000000"/>
+              </a:solidFill>
+            </a:endParaRPr>
+          </a:p>
+          <a:p>
+            <a:pPr marL="285750" indent="-285750">
+              <a:buFont typeface="Arial" panose="020B0604020202020204" pitchFamily="34" charset="0"/>
+              <a:buChar char="•"/>
+            </a:pPr>
+            <a:r>
+              <a:rPr lang="en-US" err="1">
+                <a:solidFill>
+                  <a:srgbClr val="000000"/>
+                </a:solidFill>
+              </a:rPr>
+              <a:t>Fahrassistenz-systeme</a:t>
+            </a:r>
+            <a:endParaRPr lang="en-US">
+              <a:solidFill>
+                <a:srgbClr val="000000"/>
+              </a:solidFill>
+            </a:endParaRPr>
+          </a:p>
+          <a:p>
+            <a:pPr marL="285750" indent="-285750">
+              <a:buFont typeface="Arial" panose="020B0604020202020204" pitchFamily="34" charset="0"/>
+              <a:buChar char="•"/>
+            </a:pPr>
+            <a:endParaRPr lang="en-US">
+              <a:solidFill>
+                <a:srgbClr val="000000"/>
+              </a:solidFill>
+            </a:endParaRPr>
+          </a:p>
+          <a:p>
+            <a:pPr marL="285750" indent="-285750">
+              <a:buFont typeface="Arial" panose="020B0604020202020204" pitchFamily="34" charset="0"/>
+              <a:buChar char="•"/>
+            </a:pPr>
+            <a:r>
+              <a:rPr lang="en-US">
+                <a:solidFill>
+                  <a:srgbClr val="000000"/>
+                </a:solidFill>
+              </a:rPr>
+              <a:t>Porsche Connect</a:t>
+            </a:r>
+          </a:p>
+          <a:p>
+            <a:pPr marL="285750" indent="-285750">
+              <a:buFont typeface="Arial" panose="020B0604020202020204" pitchFamily="34" charset="0"/>
+              <a:buChar char="•"/>
+            </a:pPr>
+            <a:endParaRPr lang="en-US">
+              <a:solidFill>
+                <a:srgbClr val="000000"/>
+              </a:solidFill>
+            </a:endParaRPr>
+          </a:p>
+          <a:p>
+            <a:pPr marL="285750" indent="-285750">
+              <a:buFont typeface="Arial" panose="020B0604020202020204" pitchFamily="34" charset="0"/>
+              <a:buChar char="•"/>
+            </a:pPr>
+            <a:r>
+              <a:rPr lang="en-US" err="1">
+                <a:solidFill>
+                  <a:srgbClr val="000000"/>
+                </a:solidFill>
+              </a:rPr>
+              <a:t>Fahrzeug</a:t>
+            </a:r>
+            <a:r>
+              <a:rPr lang="en-US">
+                <a:solidFill>
+                  <a:srgbClr val="000000"/>
+                </a:solidFill>
+              </a:rPr>
+              <a:t>-software &amp; OS</a:t>
+            </a:r>
+          </a:p>
+          <a:p>
+            <a:pPr marL="285750" indent="-285750">
+              <a:buFont typeface="Arial" panose="020B0604020202020204" pitchFamily="34" charset="0"/>
+              <a:buChar char="•"/>
+            </a:pPr>
+            <a:endParaRPr lang="en-US">
+              <a:solidFill>
+                <a:srgbClr val="000000"/>
+              </a:solidFill>
+            </a:endParaRPr>
+          </a:p>
+          <a:p>
+            <a:pPr marL="285750" indent="-285750">
+              <a:buFont typeface="Arial" panose="020B0604020202020204" pitchFamily="34" charset="0"/>
+              <a:buChar char="•"/>
+            </a:pPr>
+            <a:r>
+              <a:rPr lang="en-US" err="1">
+                <a:solidFill>
+                  <a:srgbClr val="000000"/>
+                </a:solidFill>
+              </a:rPr>
+              <a:t>Vernetzung</a:t>
+            </a:r>
+            <a:r>
+              <a:rPr lang="en-US">
+                <a:solidFill>
+                  <a:srgbClr val="000000"/>
+                </a:solidFill>
+              </a:rPr>
+              <a:t> &amp; Updates </a:t>
+            </a:r>
+            <a:br>
+              <a:rPr lang="en-US">
+                <a:solidFill>
+                  <a:srgbClr val="000000"/>
+                </a:solidFill>
+              </a:rPr>
+            </a:br>
+            <a:r>
+              <a:rPr lang="en-US">
+                <a:solidFill>
+                  <a:srgbClr val="000000"/>
+                </a:solidFill>
+              </a:rPr>
+              <a:t>“over-the-air”</a:t>
+            </a:r>
+          </a:p>
+          <a:p>
+            <a:endParaRPr lang="en-US" b="1">
+              <a:solidFill>
+                <a:srgbClr val="000000"/>
+              </a:solidFill>
+            </a:endParaRPr>
+          </a:p>
+        </p:txBody>
+      </p:sp>
+      <p:sp>
+        <p:nvSpPr>
+          <p:cNvPr id="10" name="Rectangle 9">
+            <a:extLst>
+              <a:ext uri="{FF2B5EF4-FFF2-40B4-BE49-F238E27FC236}">
+                <a16:creationId xmlns:a16="http://schemas.microsoft.com/office/drawing/2014/main" id="{CFB17CE5-C676-3DE5-114E-F03A8362A1E5}"/>
+              </a:ext>
+            </a:extLst>
+          </p:cNvPr>
+          <p:cNvSpPr/>
+          <p:nvPr/>
+        </p:nvSpPr>
+        <p:spPr>
+          <a:xfrm>
+            <a:off x="5109633" y="1423915"/>
+            <a:ext cx="2080876" cy="4776821"/>
+          </a:xfrm>
+          <a:prstGeom prst="rect">
+            <a:avLst/>
+          </a:prstGeom>
+          <a:solidFill>
+            <a:schemeClr val="bg1"/>
+          </a:solidFill>
+          <a:ln w="57150" cap="flat">
+            <a:noFill/>
+            <a:prstDash val="solid"/>
+            <a:miter/>
+          </a:ln>
+          <a:effectLst>
+            <a:outerShdw blurRad="206677" dist="83281" dir="7860000" algn="ctr" rotWithShape="0">
+              <a:srgbClr val="C00000"/>
+            </a:outerShdw>
+          </a:effectLst>
+        </p:spPr>
+        <p:txBody>
+          <a:bodyPr rtlCol="0" anchor="ctr"/>
+          <a:lstStyle/>
+          <a:p>
+            <a:pPr algn="ctr"/>
+            <a:r>
+              <a:rPr lang="en-US" b="1" err="1">
+                <a:solidFill>
+                  <a:srgbClr val="000000"/>
+                </a:solidFill>
+              </a:rPr>
+              <a:t>Verbrennungs</a:t>
+            </a:r>
+            <a:r>
+              <a:rPr lang="en-US" b="1">
+                <a:solidFill>
+                  <a:srgbClr val="000000"/>
+                </a:solidFill>
+              </a:rPr>
+              <a:t>- &amp; </a:t>
+            </a:r>
+            <a:r>
+              <a:rPr lang="en-US" b="1" err="1">
+                <a:solidFill>
+                  <a:srgbClr val="000000"/>
+                </a:solidFill>
+              </a:rPr>
+              <a:t>Hybridtechnologien</a:t>
+            </a:r>
+            <a:endParaRPr lang="en-US" b="1">
+              <a:solidFill>
+                <a:srgbClr val="000000"/>
+              </a:solidFill>
+            </a:endParaRPr>
+          </a:p>
+          <a:p>
+            <a:pPr algn="ctr"/>
+            <a:endParaRPr lang="en-US" b="1">
+              <a:solidFill>
+                <a:srgbClr val="000000"/>
+              </a:solidFill>
+            </a:endParaRPr>
+          </a:p>
+          <a:p>
+            <a:pPr marL="285750" indent="-285750">
+              <a:buFont typeface="Arial" panose="020B0604020202020204" pitchFamily="34" charset="0"/>
+              <a:buChar char="•"/>
+            </a:pPr>
+            <a:r>
+              <a:rPr lang="en-US" err="1">
+                <a:solidFill>
+                  <a:srgbClr val="000000"/>
+                </a:solidFill>
+              </a:rPr>
+              <a:t>Hochleistungs-motoren</a:t>
+            </a:r>
+            <a:endParaRPr lang="en-US">
+              <a:solidFill>
+                <a:srgbClr val="000000"/>
+              </a:solidFill>
+            </a:endParaRPr>
+          </a:p>
+          <a:p>
+            <a:pPr marL="285750" indent="-285750">
+              <a:buFont typeface="Arial" panose="020B0604020202020204" pitchFamily="34" charset="0"/>
+              <a:buChar char="•"/>
+            </a:pPr>
+            <a:endParaRPr lang="en-US">
+              <a:solidFill>
+                <a:srgbClr val="000000"/>
+              </a:solidFill>
+            </a:endParaRPr>
+          </a:p>
+          <a:p>
+            <a:pPr marL="285750" indent="-285750">
+              <a:buFont typeface="Arial" panose="020B0604020202020204" pitchFamily="34" charset="0"/>
+              <a:buChar char="•"/>
+            </a:pPr>
+            <a:r>
+              <a:rPr lang="en-US">
+                <a:solidFill>
+                  <a:srgbClr val="000000"/>
+                </a:solidFill>
+              </a:rPr>
+              <a:t>Plugin-in-Hybrid</a:t>
+            </a:r>
+          </a:p>
+          <a:p>
+            <a:pPr marL="285750" indent="-285750">
+              <a:buFont typeface="Arial" panose="020B0604020202020204" pitchFamily="34" charset="0"/>
+              <a:buChar char="•"/>
+            </a:pPr>
+            <a:endParaRPr lang="en-US">
+              <a:solidFill>
+                <a:srgbClr val="000000"/>
+              </a:solidFill>
+            </a:endParaRPr>
+          </a:p>
+          <a:p>
+            <a:pPr marL="285750" indent="-285750">
+              <a:buFont typeface="Arial" panose="020B0604020202020204" pitchFamily="34" charset="0"/>
+              <a:buChar char="•"/>
+            </a:pPr>
+            <a:r>
+              <a:rPr lang="en-US">
+                <a:solidFill>
+                  <a:srgbClr val="000000"/>
+                </a:solidFill>
+              </a:rPr>
+              <a:t>E-Fuels</a:t>
+            </a:r>
+          </a:p>
+          <a:p>
+            <a:pPr marL="285750" indent="-285750">
+              <a:buFont typeface="Arial" panose="020B0604020202020204" pitchFamily="34" charset="0"/>
+              <a:buChar char="•"/>
+            </a:pPr>
+            <a:endParaRPr lang="en-US">
+              <a:solidFill>
+                <a:srgbClr val="000000"/>
+              </a:solidFill>
+            </a:endParaRPr>
+          </a:p>
+          <a:p>
+            <a:pPr marL="285750" indent="-285750">
+              <a:buFont typeface="Arial" panose="020B0604020202020204" pitchFamily="34" charset="0"/>
+              <a:buChar char="•"/>
+            </a:pPr>
+            <a:r>
+              <a:rPr lang="en-US">
+                <a:solidFill>
+                  <a:srgbClr val="000000"/>
+                </a:solidFill>
+              </a:rPr>
+              <a:t>Effizienz-steigerung</a:t>
+            </a:r>
+          </a:p>
+          <a:p>
+            <a:endParaRPr lang="en-US" b="1">
+              <a:solidFill>
+                <a:srgbClr val="000000"/>
+              </a:solidFill>
+            </a:endParaRPr>
+          </a:p>
+          <a:p>
+            <a:pPr marL="285750" indent="-285750">
+              <a:buFont typeface="Arial" panose="020B0604020202020204" pitchFamily="34" charset="0"/>
+              <a:buChar char="•"/>
+            </a:pPr>
+            <a:endParaRPr lang="en-US" b="1">
+              <a:solidFill>
+                <a:srgbClr val="000000"/>
+              </a:solidFill>
+            </a:endParaRPr>
+          </a:p>
+          <a:p>
+            <a:pPr marL="285750" indent="-285750">
+              <a:buFont typeface="Arial" panose="020B0604020202020204" pitchFamily="34" charset="0"/>
+              <a:buChar char="•"/>
+            </a:pPr>
+            <a:endParaRPr lang="en-US" b="1">
+              <a:solidFill>
+                <a:srgbClr val="000000"/>
+              </a:solidFill>
+            </a:endParaRPr>
+          </a:p>
+        </p:txBody>
+      </p:sp>
+      <p:sp>
+        <p:nvSpPr>
+          <p:cNvPr id="11" name="Rectangle 10">
+            <a:extLst>
+              <a:ext uri="{FF2B5EF4-FFF2-40B4-BE49-F238E27FC236}">
+                <a16:creationId xmlns:a16="http://schemas.microsoft.com/office/drawing/2014/main" id="{8FE6F89C-F1F1-2DE6-584C-7E13991559F7}"/>
+              </a:ext>
+            </a:extLst>
+          </p:cNvPr>
+          <p:cNvSpPr/>
+          <p:nvPr/>
+        </p:nvSpPr>
+        <p:spPr>
+          <a:xfrm>
+            <a:off x="7556499" y="1423804"/>
+            <a:ext cx="1972733" cy="4776821"/>
+          </a:xfrm>
+          <a:prstGeom prst="rect">
+            <a:avLst/>
+          </a:prstGeom>
+          <a:solidFill>
+            <a:schemeClr val="bg1"/>
+          </a:solidFill>
+          <a:ln w="57150" cap="flat">
+            <a:noFill/>
+            <a:prstDash val="solid"/>
+            <a:miter/>
+          </a:ln>
+          <a:effectLst>
+            <a:outerShdw blurRad="206677" dist="83281" dir="7860000" algn="ctr" rotWithShape="0">
+              <a:srgbClr val="C00000"/>
+            </a:outerShdw>
+          </a:effectLst>
+        </p:spPr>
+        <p:txBody>
+          <a:bodyPr rtlCol="0" anchor="ctr"/>
+          <a:lstStyle/>
+          <a:p>
+            <a:pPr algn="ctr"/>
+            <a:r>
+              <a:rPr lang="en-US" b="1" err="1">
+                <a:solidFill>
+                  <a:srgbClr val="000000"/>
+                </a:solidFill>
+              </a:rPr>
+              <a:t>Produktions-technologien</a:t>
+            </a:r>
+            <a:endParaRPr lang="en-US" b="1">
+              <a:solidFill>
+                <a:srgbClr val="000000"/>
+              </a:solidFill>
+            </a:endParaRPr>
+          </a:p>
+          <a:p>
+            <a:pPr algn="ctr"/>
+            <a:endParaRPr lang="en-US" b="1">
+              <a:solidFill>
+                <a:srgbClr val="000000"/>
+              </a:solidFill>
+            </a:endParaRPr>
+          </a:p>
+          <a:p>
+            <a:pPr marL="285750" indent="-285750">
+              <a:buFont typeface="Arial" panose="020B0604020202020204" pitchFamily="34" charset="0"/>
+              <a:buChar char="•"/>
+            </a:pPr>
+            <a:r>
+              <a:rPr lang="en-US" err="1">
+                <a:solidFill>
+                  <a:srgbClr val="000000"/>
+                </a:solidFill>
+              </a:rPr>
+              <a:t>Hochautomat-isierung</a:t>
+            </a:r>
+            <a:endParaRPr lang="en-US">
+              <a:solidFill>
+                <a:srgbClr val="000000"/>
+              </a:solidFill>
+            </a:endParaRPr>
+          </a:p>
+          <a:p>
+            <a:pPr marL="285750" indent="-285750">
+              <a:buFont typeface="Arial" panose="020B0604020202020204" pitchFamily="34" charset="0"/>
+              <a:buChar char="•"/>
+            </a:pPr>
+            <a:endParaRPr lang="en-US">
+              <a:solidFill>
+                <a:srgbClr val="000000"/>
+              </a:solidFill>
+            </a:endParaRPr>
+          </a:p>
+          <a:p>
+            <a:pPr marL="285750" indent="-285750">
+              <a:buFont typeface="Arial" panose="020B0604020202020204" pitchFamily="34" charset="0"/>
+              <a:buChar char="•"/>
+            </a:pPr>
+            <a:r>
+              <a:rPr lang="en-US" err="1">
+                <a:solidFill>
+                  <a:srgbClr val="000000"/>
+                </a:solidFill>
+              </a:rPr>
+              <a:t>Digitale</a:t>
+            </a:r>
+            <a:r>
+              <a:rPr lang="en-US">
+                <a:solidFill>
+                  <a:srgbClr val="000000"/>
+                </a:solidFill>
+              </a:rPr>
+              <a:t> </a:t>
+            </a:r>
+            <a:r>
+              <a:rPr lang="en-US" err="1">
+                <a:solidFill>
+                  <a:srgbClr val="000000"/>
+                </a:solidFill>
+              </a:rPr>
+              <a:t>Fertigung</a:t>
+            </a:r>
+            <a:r>
+              <a:rPr lang="en-US">
+                <a:solidFill>
+                  <a:srgbClr val="000000"/>
+                </a:solidFill>
+              </a:rPr>
+              <a:t> &amp; Industrie 4.0</a:t>
+            </a:r>
+          </a:p>
+          <a:p>
+            <a:pPr marL="285750" indent="-285750">
+              <a:buFont typeface="Arial" panose="020B0604020202020204" pitchFamily="34" charset="0"/>
+              <a:buChar char="•"/>
+            </a:pPr>
+            <a:endParaRPr lang="en-US">
+              <a:solidFill>
+                <a:srgbClr val="000000"/>
+              </a:solidFill>
+            </a:endParaRPr>
+          </a:p>
+          <a:p>
+            <a:pPr marL="285750" indent="-285750">
+              <a:buFont typeface="Arial" panose="020B0604020202020204" pitchFamily="34" charset="0"/>
+              <a:buChar char="•"/>
+            </a:pPr>
+            <a:r>
+              <a:rPr lang="en-US">
+                <a:solidFill>
+                  <a:srgbClr val="000000"/>
+                </a:solidFill>
+              </a:rPr>
+              <a:t>Additive </a:t>
+            </a:r>
+            <a:r>
+              <a:rPr lang="en-US" err="1">
+                <a:solidFill>
+                  <a:srgbClr val="000000"/>
+                </a:solidFill>
+              </a:rPr>
+              <a:t>Fertigung</a:t>
+            </a:r>
+            <a:r>
+              <a:rPr lang="en-US">
+                <a:solidFill>
+                  <a:srgbClr val="000000"/>
+                </a:solidFill>
+              </a:rPr>
+              <a:t> 3D-Druck</a:t>
+            </a:r>
+          </a:p>
+          <a:p>
+            <a:pPr marL="285750" indent="-285750">
+              <a:buFont typeface="Arial" panose="020B0604020202020204" pitchFamily="34" charset="0"/>
+              <a:buChar char="•"/>
+            </a:pPr>
+            <a:endParaRPr lang="en-US">
+              <a:solidFill>
+                <a:srgbClr val="000000"/>
+              </a:solidFill>
+            </a:endParaRPr>
+          </a:p>
+          <a:p>
+            <a:pPr marL="285750" indent="-285750">
+              <a:buFont typeface="Arial" panose="020B0604020202020204" pitchFamily="34" charset="0"/>
+              <a:buChar char="•"/>
+            </a:pPr>
+            <a:r>
+              <a:rPr lang="en-US" err="1">
+                <a:solidFill>
+                  <a:srgbClr val="000000"/>
+                </a:solidFill>
+              </a:rPr>
+              <a:t>Qualitäts</a:t>
+            </a:r>
+            <a:r>
+              <a:rPr lang="en-US">
+                <a:solidFill>
+                  <a:srgbClr val="000000"/>
+                </a:solidFill>
+              </a:rPr>
+              <a:t>-management</a:t>
+            </a:r>
+            <a:endParaRPr lang="en-US" sz="1600" b="1">
+              <a:solidFill>
+                <a:srgbClr val="000000"/>
+              </a:solidFill>
+            </a:endParaRPr>
+          </a:p>
+        </p:txBody>
+      </p:sp>
+      <p:sp>
+        <p:nvSpPr>
+          <p:cNvPr id="13" name="Rectangle 12">
+            <a:extLst>
+              <a:ext uri="{FF2B5EF4-FFF2-40B4-BE49-F238E27FC236}">
+                <a16:creationId xmlns:a16="http://schemas.microsoft.com/office/drawing/2014/main" id="{22375073-9C0A-3CDA-1773-CCEB13E7D817}"/>
+              </a:ext>
+            </a:extLst>
+          </p:cNvPr>
+          <p:cNvSpPr/>
+          <p:nvPr/>
+        </p:nvSpPr>
+        <p:spPr>
+          <a:xfrm>
+            <a:off x="9795165" y="1423804"/>
+            <a:ext cx="2180934" cy="4776821"/>
+          </a:xfrm>
+          <a:prstGeom prst="rect">
+            <a:avLst/>
+          </a:prstGeom>
+          <a:solidFill>
+            <a:schemeClr val="bg1"/>
+          </a:solidFill>
+          <a:ln w="57150" cap="flat">
+            <a:noFill/>
+            <a:prstDash val="solid"/>
+            <a:miter/>
+          </a:ln>
+          <a:effectLst>
+            <a:outerShdw blurRad="206677" dist="83281" dir="7860000" algn="ctr" rotWithShape="0">
+              <a:srgbClr val="C00000"/>
+            </a:outerShdw>
+          </a:effectLst>
+        </p:spPr>
+        <p:txBody>
+          <a:bodyPr rtlCol="0" anchor="ctr"/>
+          <a:lstStyle/>
+          <a:p>
+            <a:pPr algn="ctr"/>
+            <a:r>
+              <a:rPr lang="en-US" b="1" err="1">
+                <a:solidFill>
+                  <a:srgbClr val="000000"/>
+                </a:solidFill>
+              </a:rPr>
+              <a:t>Nachhaltigkeits</a:t>
+            </a:r>
+            <a:r>
+              <a:rPr lang="en-US" b="1">
+                <a:solidFill>
+                  <a:srgbClr val="000000"/>
+                </a:solidFill>
+              </a:rPr>
+              <a:t>- &amp; </a:t>
+            </a:r>
+          </a:p>
+          <a:p>
+            <a:pPr algn="ctr"/>
+            <a:r>
+              <a:rPr lang="en-US" b="1">
+                <a:solidFill>
+                  <a:srgbClr val="000000"/>
+                </a:solidFill>
+              </a:rPr>
+              <a:t>Energie-</a:t>
+            </a:r>
+            <a:r>
+              <a:rPr lang="en-US" b="1" err="1">
+                <a:solidFill>
+                  <a:srgbClr val="000000"/>
+                </a:solidFill>
+              </a:rPr>
+              <a:t>technologien</a:t>
+            </a:r>
+            <a:endParaRPr lang="en-US" b="1">
+              <a:solidFill>
+                <a:srgbClr val="000000"/>
+              </a:solidFill>
+            </a:endParaRPr>
+          </a:p>
+          <a:p>
+            <a:pPr algn="ctr"/>
+            <a:endParaRPr lang="en-US" b="1">
+              <a:solidFill>
+                <a:srgbClr val="000000"/>
+              </a:solidFill>
+            </a:endParaRPr>
+          </a:p>
+          <a:p>
+            <a:pPr marL="285750" indent="-285750">
+              <a:buFont typeface="Arial" panose="020B0604020202020204" pitchFamily="34" charset="0"/>
+              <a:buChar char="•"/>
+            </a:pPr>
+            <a:r>
+              <a:rPr lang="en-US">
+                <a:solidFill>
+                  <a:srgbClr val="000000"/>
+                </a:solidFill>
+              </a:rPr>
+              <a:t>Batterie Recycling</a:t>
+            </a:r>
+          </a:p>
+          <a:p>
+            <a:pPr marL="285750" indent="-285750">
+              <a:buFont typeface="Arial" panose="020B0604020202020204" pitchFamily="34" charset="0"/>
+              <a:buChar char="•"/>
+            </a:pPr>
+            <a:endParaRPr lang="en-US">
+              <a:solidFill>
+                <a:srgbClr val="000000"/>
+              </a:solidFill>
+            </a:endParaRPr>
+          </a:p>
+          <a:p>
+            <a:pPr marL="285750" indent="-285750">
+              <a:buFont typeface="Arial" panose="020B0604020202020204" pitchFamily="34" charset="0"/>
+              <a:buChar char="•"/>
+            </a:pPr>
+            <a:r>
+              <a:rPr lang="en-US" err="1">
+                <a:solidFill>
+                  <a:srgbClr val="000000"/>
+                </a:solidFill>
+              </a:rPr>
+              <a:t>Enegieeffiziente</a:t>
+            </a:r>
+            <a:br>
+              <a:rPr lang="en-US">
+                <a:solidFill>
+                  <a:srgbClr val="000000"/>
+                </a:solidFill>
+              </a:rPr>
+            </a:br>
+            <a:r>
+              <a:rPr lang="en-US">
+                <a:solidFill>
+                  <a:srgbClr val="000000"/>
+                </a:solidFill>
+              </a:rPr>
+              <a:t>Produktion</a:t>
+            </a:r>
+          </a:p>
+          <a:p>
+            <a:pPr marL="285750" indent="-285750">
+              <a:buFont typeface="Arial" panose="020B0604020202020204" pitchFamily="34" charset="0"/>
+              <a:buChar char="•"/>
+            </a:pPr>
+            <a:endParaRPr lang="en-US">
+              <a:solidFill>
+                <a:srgbClr val="000000"/>
+              </a:solidFill>
+            </a:endParaRPr>
+          </a:p>
+          <a:p>
+            <a:pPr marL="285750" indent="-285750">
+              <a:buFont typeface="Arial" panose="020B0604020202020204" pitchFamily="34" charset="0"/>
+              <a:buChar char="•"/>
+            </a:pPr>
+            <a:r>
+              <a:rPr lang="en-US">
+                <a:solidFill>
+                  <a:srgbClr val="000000"/>
+                </a:solidFill>
+              </a:rPr>
+              <a:t>CO2-Reduktion</a:t>
+            </a:r>
+          </a:p>
+          <a:p>
+            <a:pPr marL="285750" indent="-285750">
+              <a:buFont typeface="Arial" panose="020B0604020202020204" pitchFamily="34" charset="0"/>
+              <a:buChar char="•"/>
+            </a:pPr>
+            <a:endParaRPr lang="en-US">
+              <a:solidFill>
+                <a:srgbClr val="000000"/>
+              </a:solidFill>
+            </a:endParaRPr>
+          </a:p>
+          <a:p>
+            <a:pPr marL="285750" indent="-285750">
+              <a:buFont typeface="Arial" panose="020B0604020202020204" pitchFamily="34" charset="0"/>
+              <a:buChar char="•"/>
+            </a:pPr>
+            <a:r>
+              <a:rPr lang="en-US" err="1">
+                <a:solidFill>
+                  <a:srgbClr val="000000"/>
+                </a:solidFill>
+              </a:rPr>
+              <a:t>Kreislauf-wirtschaft</a:t>
+            </a:r>
+            <a:endParaRPr lang="en-US">
+              <a:solidFill>
+                <a:srgbClr val="000000"/>
+              </a:solidFill>
+            </a:endParaRPr>
+          </a:p>
+          <a:p>
+            <a:pPr marL="285750" indent="-285750">
+              <a:buFont typeface="Arial" panose="020B0604020202020204" pitchFamily="34" charset="0"/>
+              <a:buChar char="•"/>
+            </a:pPr>
+            <a:endParaRPr lang="en-US" sz="1600" b="1">
+              <a:solidFill>
+                <a:srgbClr val="000000"/>
+              </a:solidFill>
+            </a:endParaRPr>
+          </a:p>
+          <a:p>
+            <a:pPr marL="285750" indent="-285750">
+              <a:buFont typeface="Arial" panose="020B0604020202020204" pitchFamily="34" charset="0"/>
+              <a:buChar char="•"/>
+            </a:pPr>
+            <a:endParaRPr lang="en-US" sz="1600" b="1">
+              <a:solidFill>
+                <a:srgbClr val="000000"/>
+              </a:solidFill>
+            </a:endParaRPr>
+          </a:p>
+        </p:txBody>
+      </p:sp>
+    </p:spTree>
+    <p:extLst>
+      <p:ext uri="{BB962C8B-B14F-4D97-AF65-F5344CB8AC3E}">
+        <p14:creationId xmlns:p14="http://schemas.microsoft.com/office/powerpoint/2010/main" val="1049315325"/>
+      </p:ext>
+    </p:extLst>
+  </p:cSld>
+  <p:clrMapOvr>
+    <a:masterClrMapping/>
+  </p:clrMapOvr>
+</p:sld>
+</file>
+
+<file path=ppt/slides/slide16.xml><?xml version="1.0" encoding="utf-8"?>
 <p:sld xmlns:a="http://schemas.openxmlformats.org/drawingml/2006/main" xmlns:r="http://schemas.openxmlformats.org/officeDocument/2006/relationships" xmlns:p="http://schemas.openxmlformats.org/presentationml/2006/main">
   <p:cSld>
     <p:spTree>
@@ -18530,7 +25520,7 @@
           <a:p>
             <a:fld id="{807BB0A7-CBBE-454D-9A9A-B1F1ABB9AFDB}" type="datetime1">
               <a:rPr lang="en-US" noProof="1" smtClean="0"/>
-              <a:t>5/4/26</a:t>
+              <a:t>5/17/26</a:t>
             </a:fld>
             <a:endParaRPr lang="de-DE" noProof="1"/>
           </a:p>
@@ -18828,7 +25818,7 @@
           <a:p>
             <a:fld id="{84ECCF49-F9F1-F44B-A18C-FAF24F70FFC5}" type="datetime1">
               <a:rPr lang="en-US" noProof="1" smtClean="0"/>
-              <a:t>5/4/26</a:t>
+              <a:t>5/17/26</a:t>
             </a:fld>
             <a:endParaRPr lang="de-DE" noProof="1"/>
           </a:p>
@@ -19387,7 +26377,7 @@
           <a:p>
             <a:fld id="{FA009E88-CF23-5244-A477-B17F7302E0E4}" type="datetime1">
               <a:rPr lang="en-US" noProof="1" smtClean="0"/>
-              <a:t>5/4/26</a:t>
+              <a:t>5/17/26</a:t>
             </a:fld>
             <a:endParaRPr lang="de-DE" noProof="1"/>
           </a:p>
@@ -20035,7 +27025,7 @@
           <a:p>
             <a:fld id="{078773AF-2259-0B42-AEF5-3C6C7EBEB81F}" type="datetime1">
               <a:rPr lang="en-US" noProof="1" smtClean="0"/>
-              <a:t>5/4/26</a:t>
+              <a:t>5/17/26</a:t>
             </a:fld>
             <a:endParaRPr lang="de-DE" noProof="1"/>
           </a:p>
@@ -20403,7 +27393,7 @@
           <a:p>
             <a:fld id="{6B1497B2-677C-1347-8B94-A5ED10CDCD13}" type="datetime1">
               <a:rPr lang="en-US" noProof="1" smtClean="0"/>
-              <a:t>5/4/26</a:t>
+              <a:t>5/17/26</a:t>
             </a:fld>
             <a:endParaRPr lang="de-DE" noProof="1"/>
           </a:p>
@@ -21027,7 +28017,7 @@
                 <a:latin typeface="Calibri" panose="020F0502020204030204"/>
                 <a:cs typeface="+mn-cs"/>
               </a:rPr>
-              <a:t>5/4/26</a:t>
+              <a:t>5/17/26</a:t>
             </a:fld>
             <a:endParaRPr lang="de-DE" sz="1200" noProof="1">
               <a:solidFill>
@@ -21255,7 +28245,7 @@
                 <a:latin typeface="Calibri" panose="020F0502020204030204"/>
                 <a:cs typeface="+mn-cs"/>
               </a:rPr>
-              <a:t>5/4/26</a:t>
+              <a:t>5/17/26</a:t>
             </a:fld>
             <a:endParaRPr lang="de-DE" sz="1200" noProof="1">
               <a:solidFill>
@@ -21737,7 +28727,7 @@
                 <a:latin typeface="+mn-lt"/>
                 <a:cs typeface="+mn-cs"/>
               </a:rPr>
-              <a:t>5/4/26</a:t>
+              <a:t>5/17/26</a:t>
             </a:fld>
             <a:endParaRPr lang="de-DE" sz="1200" noProof="1">
               <a:solidFill>
@@ -22207,7 +29197,7 @@
           <a:p>
             <a:fld id="{C1A6CE84-93A4-2747-8935-A06C6A07EAE2}" type="datetime1">
               <a:rPr lang="en-US" noProof="1" smtClean="0"/>
-              <a:t>5/4/26</a:t>
+              <a:t>5/17/26</a:t>
             </a:fld>
             <a:endParaRPr lang="de-DE" noProof="1"/>
           </a:p>
